--- a/output/presentations/04-design-patterns.pptx
+++ b/output/presentations/04-design-patterns.pptx
@@ -2,22 +2,24 @@
 <file path=ppt/presentation.xml><?xml version="1.0" encoding="utf-8"?>
 <p:presentation xmlns:p="http://schemas.openxmlformats.org/presentationml/2006/main">
   <p:sldMasterIdLst>
-    <p:sldMasterId xmlns:r="http://schemas.openxmlformats.org/officeDocument/2006/relationships" id="2147483648" r:id="R7311248ebcfc4b4a"/>
+    <p:sldMasterId xmlns:r="http://schemas.openxmlformats.org/officeDocument/2006/relationships" id="2147483648" r:id="R511216f2c2584bb9"/>
   </p:sldMasterIdLst>
   <p:notesMasterIdLst>
-    <p:notesMasterId xmlns:r="http://schemas.openxmlformats.org/officeDocument/2006/relationships" r:id="R43006fe154d54074"/>
+    <p:notesMasterId xmlns:r="http://schemas.openxmlformats.org/officeDocument/2006/relationships" r:id="R17daa54aaf444e71"/>
   </p:notesMasterIdLst>
   <p:sldIdLst>
-    <p:sldId xmlns:r="http://schemas.openxmlformats.org/officeDocument/2006/relationships" id="256" r:id="R3d2b7db48ff142eb"/>
-    <p:sldId xmlns:r="http://schemas.openxmlformats.org/officeDocument/2006/relationships" id="257" r:id="Rf3c34805f6b14695"/>
-    <p:sldId xmlns:r="http://schemas.openxmlformats.org/officeDocument/2006/relationships" id="258" r:id="R964ea8ad90bb40e9"/>
-    <p:sldId xmlns:r="http://schemas.openxmlformats.org/officeDocument/2006/relationships" id="259" r:id="R8fee4965ac324829"/>
-    <p:sldId xmlns:r="http://schemas.openxmlformats.org/officeDocument/2006/relationships" id="260" r:id="R9af866e4ad904b5c"/>
-    <p:sldId xmlns:r="http://schemas.openxmlformats.org/officeDocument/2006/relationships" id="261" r:id="R1bb74634ce0f49b5"/>
-    <p:sldId xmlns:r="http://schemas.openxmlformats.org/officeDocument/2006/relationships" id="262" r:id="R7fd5ca7767594989"/>
-    <p:sldId xmlns:r="http://schemas.openxmlformats.org/officeDocument/2006/relationships" id="263" r:id="R394b0b886dbb4283"/>
-    <p:sldId xmlns:r="http://schemas.openxmlformats.org/officeDocument/2006/relationships" id="264" r:id="R83df25f9e47c43b5"/>
-    <p:sldId xmlns:r="http://schemas.openxmlformats.org/officeDocument/2006/relationships" id="265" r:id="R8d5ef96340f74f68"/>
+    <p:sldId xmlns:r="http://schemas.openxmlformats.org/officeDocument/2006/relationships" id="256" r:id="Re9ce666b80d64331"/>
+    <p:sldId xmlns:r="http://schemas.openxmlformats.org/officeDocument/2006/relationships" id="257" r:id="R0f877f8a8457412c"/>
+    <p:sldId xmlns:r="http://schemas.openxmlformats.org/officeDocument/2006/relationships" id="258" r:id="R28473be19731411e"/>
+    <p:sldId xmlns:r="http://schemas.openxmlformats.org/officeDocument/2006/relationships" id="259" r:id="R9878af7eb1c04ea9"/>
+    <p:sldId xmlns:r="http://schemas.openxmlformats.org/officeDocument/2006/relationships" id="260" r:id="Rcd16890a6e33451f"/>
+    <p:sldId xmlns:r="http://schemas.openxmlformats.org/officeDocument/2006/relationships" id="261" r:id="R10e2362e22094e01"/>
+    <p:sldId xmlns:r="http://schemas.openxmlformats.org/officeDocument/2006/relationships" id="262" r:id="Rc2325ee617724111"/>
+    <p:sldId xmlns:r="http://schemas.openxmlformats.org/officeDocument/2006/relationships" id="263" r:id="Rb0fb7f91aa4a40ad"/>
+    <p:sldId xmlns:r="http://schemas.openxmlformats.org/officeDocument/2006/relationships" id="264" r:id="Rf9a6df7b3d7d46fa"/>
+    <p:sldId xmlns:r="http://schemas.openxmlformats.org/officeDocument/2006/relationships" id="265" r:id="R68ca6db8e34c4c00"/>
+    <p:sldId xmlns:r="http://schemas.openxmlformats.org/officeDocument/2006/relationships" id="266" r:id="R5cab8715cc4b424d"/>
+    <p:sldId xmlns:r="http://schemas.openxmlformats.org/officeDocument/2006/relationships" id="267" r:id="R15ec98ef5b454e61"/>
   </p:sldIdLst>
   <p:sldSz cx="12192000" cy="6858000"/>
   <p:notesSz cx="6858000" cy="9144000"/>
@@ -461,12 +463,52 @@
           </a:p>
           <a:p xmlns:a="http://schemas.openxmlformats.org/drawingml/2006/main">
             <a:r>
+              <a:t>Edition: 2026-09-09</a:t>
+            </a:r>
+          </a:p>
+          <a:p xmlns:a="http://schemas.openxmlformats.org/drawingml/2006/main">
+            <a:r>
+              <a:t/>
+            </a:r>
+          </a:p>
+          <a:p xmlns:a="http://schemas.openxmlformats.org/drawingml/2006/main">
+            <a:r>
               <a:t>[Sources]</a:t>
             </a:r>
           </a:p>
           <a:p xmlns:a="http://schemas.openxmlformats.org/drawingml/2006/main">
             <a:r>
-              <a:t>- Supplied source presentation: 04-design-patterns.pdf</a:t>
+              <a:t>- Original source presentation: 04-design-patterns.pdf</a:t>
+            </a:r>
+          </a:p>
+          <a:p xmlns:a="http://schemas.openxmlformats.org/drawingml/2006/main">
+            <a:r>
+              <a:t>- R1: Patterns and problems in emerging multiagent systems. Anthropic research post, 2026-08-13. https://www.anthropic.com/research/multiagent-systems Controlled coordination experiments. Compare scope and budgets before interpreting the findings.</a:t>
+            </a:r>
+          </a:p>
+          <a:p xmlns:a="http://schemas.openxmlformats.org/drawingml/2006/main">
+            <a:r>
+              <a:t/>
+            </a:r>
+          </a:p>
+          <a:p xmlns:a="http://schemas.openxmlformats.org/drawingml/2006/main">
+            <a:r>
+              <a:t>[Assessed practice]</a:t>
+            </a:r>
+          </a:p>
+          <a:p xmlns:a="http://schemas.openxmlformats.org/drawingml/2006/main">
+            <a:r>
+              <a:t>Compare a single catalog agent with an objective evidence check. Specify when an LLM reviewer would add information that the objective check lacks.</a:t>
+            </a:r>
+          </a:p>
+          <a:p xmlns:a="http://schemas.openxmlformats.org/drawingml/2006/main">
+            <a:r>
+              <a:t>Acceptance: Include a case where review adds no value and one where it changes an incorrect proposal. Count all calls in the live variant.</a:t>
+            </a:r>
+          </a:p>
+          <a:p xmlns:a="http://schemas.openxmlformats.org/drawingml/2006/main">
+            <a:r>
+              <a:t>Lab: labs/07_agents_sdk_evaluation.ipynb</a:t>
             </a:r>
           </a:p>
         </p:txBody>
@@ -536,6 +578,131 @@
           <a:lstStyle xmlns:a="http://schemas.openxmlformats.org/drawingml/2006/main"/>
           <a:p xmlns:a="http://schemas.openxmlformats.org/drawingml/2006/main">
             <a:r>
+              <a:t>Use as retrieval practice. Ask for an answer that defines, compares, traces, and evaluates.</a:t>
+            </a:r>
+          </a:p>
+          <a:p xmlns:a="http://schemas.openxmlformats.org/drawingml/2006/main">
+            <a:r>
+              <a:t/>
+            </a:r>
+          </a:p>
+          <a:p xmlns:a="http://schemas.openxmlformats.org/drawingml/2006/main">
+            <a:r>
+              <a:t>Edition: 2026-09-09</a:t>
+            </a:r>
+          </a:p>
+          <a:p xmlns:a="http://schemas.openxmlformats.org/drawingml/2006/main">
+            <a:r>
+              <a:t/>
+            </a:r>
+          </a:p>
+          <a:p xmlns:a="http://schemas.openxmlformats.org/drawingml/2006/main">
+            <a:r>
+              <a:t>[Sources]</a:t>
+            </a:r>
+          </a:p>
+          <a:p xmlns:a="http://schemas.openxmlformats.org/drawingml/2006/main">
+            <a:r>
+              <a:t>- Original source presentation: 04-design-patterns.pdf</a:t>
+            </a:r>
+          </a:p>
+          <a:p xmlns:a="http://schemas.openxmlformats.org/drawingml/2006/main">
+            <a:r>
+              <a:t>- R1: Patterns and problems in emerging multiagent systems. Anthropic research post, 2026-08-13. https://www.anthropic.com/research/multiagent-systems Controlled coordination experiments. Compare scope and budgets before interpreting the findings.</a:t>
+            </a:r>
+          </a:p>
+          <a:p xmlns:a="http://schemas.openxmlformats.org/drawingml/2006/main">
+            <a:r>
+              <a:t/>
+            </a:r>
+          </a:p>
+          <a:p xmlns:a="http://schemas.openxmlformats.org/drawingml/2006/main">
+            <a:r>
+              <a:t>[Assessed practice]</a:t>
+            </a:r>
+          </a:p>
+          <a:p xmlns:a="http://schemas.openxmlformats.org/drawingml/2006/main">
+            <a:r>
+              <a:t>Compare a single catalog agent with an objective evidence check. Specify when an LLM reviewer would add information that the objective check lacks.</a:t>
+            </a:r>
+          </a:p>
+          <a:p xmlns:a="http://schemas.openxmlformats.org/drawingml/2006/main">
+            <a:r>
+              <a:t>Acceptance: Include a case where review adds no value and one where it changes an incorrect proposal. Count all calls in the live variant.</a:t>
+            </a:r>
+          </a:p>
+          <a:p xmlns:a="http://schemas.openxmlformats.org/drawingml/2006/main">
+            <a:r>
+              <a:t>Lab: labs/07_agents_sdk_evaluation.ipynb</a:t>
+            </a:r>
+          </a:p>
+        </p:txBody>
+      </p:sp>
+      <p:sp>
+        <p:nvSpPr>
+          <p:cNvPr id="4" name="Slide Number Placeholder 3"/>
+          <p:cNvSpPr>
+            <a:spLocks xmlns:a="http://schemas.openxmlformats.org/drawingml/2006/main" noGrp="1"/>
+          </p:cNvSpPr>
+          <p:nvPr>
+            <p:ph type="sldNum" idx="5"/>
+          </p:nvPr>
+        </p:nvSpPr>
+        <p:spPr/>
+        <p:txBody>
+          <a:bodyPr xmlns:a="http://schemas.openxmlformats.org/drawingml/2006/main"/>
+          <a:lstStyle xmlns:a="http://schemas.openxmlformats.org/drawingml/2006/main"/>
+          <a:p xmlns:a="http://schemas.openxmlformats.org/drawingml/2006/main"/>
+        </p:txBody>
+      </p:sp>
+    </p:spTree>
+  </p:cSld>
+  <p:clrMapOvr>
+    <a:masterClrMapping xmlns:a="http://schemas.openxmlformats.org/drawingml/2006/main"/>
+  </p:clrMapOvr>
+</p:notes>
+</file>
+
+<file path=ppt/notesSlides/notesSlide11.xml><?xml version="1.0" encoding="utf-8"?>
+<p:notes xmlns:p="http://schemas.openxmlformats.org/presentationml/2006/main">
+  <p:cSld>
+    <p:spTree>
+      <p:nvGrpSpPr>
+        <p:cNvPr id="1" name=""/>
+        <p:cNvGrpSpPr/>
+        <p:nvPr/>
+      </p:nvGrpSpPr>
+      <p:grpSpPr>
+        <a:xfrm xmlns:a="http://schemas.openxmlformats.org/drawingml/2006/main"/>
+      </p:grpSpPr>
+      <p:sp>
+        <p:nvSpPr>
+          <p:cNvPr id="2" name="Slide Image Placeholder 1"/>
+          <p:cNvSpPr>
+            <a:spLocks xmlns:a="http://schemas.openxmlformats.org/drawingml/2006/main" noGrp="1"/>
+          </p:cNvSpPr>
+          <p:nvPr>
+            <p:ph type="sldImg" idx="0"/>
+          </p:nvPr>
+        </p:nvSpPr>
+        <p:spPr/>
+      </p:sp>
+      <p:sp>
+        <p:nvSpPr>
+          <p:cNvPr id="3" name="Notes Placeholder 2"/>
+          <p:cNvSpPr>
+            <a:spLocks xmlns:a="http://schemas.openxmlformats.org/drawingml/2006/main" noGrp="1"/>
+          </p:cNvSpPr>
+          <p:nvPr>
+            <p:ph type="body" idx="1"/>
+          </p:nvPr>
+        </p:nvSpPr>
+        <p:spPr/>
+        <p:txBody>
+          <a:bodyPr xmlns:a="http://schemas.openxmlformats.org/drawingml/2006/main"/>
+          <a:lstStyle xmlns:a="http://schemas.openxmlformats.org/drawingml/2006/main"/>
+          <a:p xmlns:a="http://schemas.openxmlformats.org/drawingml/2006/main">
+            <a:r>
               <a:t>Close by restating the four durable ideas and linking forward to the next chapter.</a:t>
             </a:r>
           </a:p>
@@ -546,12 +713,177 @@
           </a:p>
           <a:p xmlns:a="http://schemas.openxmlformats.org/drawingml/2006/main">
             <a:r>
+              <a:t>Edition: 2026-09-09</a:t>
+            </a:r>
+          </a:p>
+          <a:p xmlns:a="http://schemas.openxmlformats.org/drawingml/2006/main">
+            <a:r>
+              <a:t/>
+            </a:r>
+          </a:p>
+          <a:p xmlns:a="http://schemas.openxmlformats.org/drawingml/2006/main">
+            <a:r>
               <a:t>[Sources]</a:t>
             </a:r>
           </a:p>
           <a:p xmlns:a="http://schemas.openxmlformats.org/drawingml/2006/main">
             <a:r>
-              <a:t>- Supplied source presentation: 04-design-patterns.pdf</a:t>
+              <a:t>- Original source presentation: 04-design-patterns.pdf</a:t>
+            </a:r>
+          </a:p>
+          <a:p xmlns:a="http://schemas.openxmlformats.org/drawingml/2006/main">
+            <a:r>
+              <a:t>- R1: Patterns and problems in emerging multiagent systems. Anthropic research post, 2026-08-13. https://www.anthropic.com/research/multiagent-systems Controlled coordination experiments. Compare scope and budgets before interpreting the findings.</a:t>
+            </a:r>
+          </a:p>
+          <a:p xmlns:a="http://schemas.openxmlformats.org/drawingml/2006/main">
+            <a:r>
+              <a:t/>
+            </a:r>
+          </a:p>
+          <a:p xmlns:a="http://schemas.openxmlformats.org/drawingml/2006/main">
+            <a:r>
+              <a:t>[Assessed practice]</a:t>
+            </a:r>
+          </a:p>
+          <a:p xmlns:a="http://schemas.openxmlformats.org/drawingml/2006/main">
+            <a:r>
+              <a:t>Compare a single catalog agent with an objective evidence check. Specify when an LLM reviewer would add information that the objective check lacks.</a:t>
+            </a:r>
+          </a:p>
+          <a:p xmlns:a="http://schemas.openxmlformats.org/drawingml/2006/main">
+            <a:r>
+              <a:t>Acceptance: Include a case where review adds no value and one where it changes an incorrect proposal. Count all calls in the live variant.</a:t>
+            </a:r>
+          </a:p>
+          <a:p xmlns:a="http://schemas.openxmlformats.org/drawingml/2006/main">
+            <a:r>
+              <a:t>Lab: labs/07_agents_sdk_evaluation.ipynb</a:t>
+            </a:r>
+          </a:p>
+        </p:txBody>
+      </p:sp>
+      <p:sp>
+        <p:nvSpPr>
+          <p:cNvPr id="4" name="Slide Number Placeholder 3"/>
+          <p:cNvSpPr>
+            <a:spLocks xmlns:a="http://schemas.openxmlformats.org/drawingml/2006/main" noGrp="1"/>
+          </p:cNvSpPr>
+          <p:nvPr>
+            <p:ph type="sldNum" idx="5"/>
+          </p:nvPr>
+        </p:nvSpPr>
+        <p:spPr/>
+        <p:txBody>
+          <a:bodyPr xmlns:a="http://schemas.openxmlformats.org/drawingml/2006/main"/>
+          <a:lstStyle xmlns:a="http://schemas.openxmlformats.org/drawingml/2006/main"/>
+          <a:p xmlns:a="http://schemas.openxmlformats.org/drawingml/2006/main"/>
+        </p:txBody>
+      </p:sp>
+    </p:spTree>
+  </p:cSld>
+  <p:clrMapOvr>
+    <a:masterClrMapping xmlns:a="http://schemas.openxmlformats.org/drawingml/2006/main"/>
+  </p:clrMapOvr>
+</p:notes>
+</file>
+
+<file path=ppt/notesSlides/notesSlide12.xml><?xml version="1.0" encoding="utf-8"?>
+<p:notes xmlns:p="http://schemas.openxmlformats.org/presentationml/2006/main">
+  <p:cSld>
+    <p:spTree>
+      <p:nvGrpSpPr>
+        <p:cNvPr id="1" name=""/>
+        <p:cNvGrpSpPr/>
+        <p:nvPr/>
+      </p:nvGrpSpPr>
+      <p:grpSpPr>
+        <a:xfrm xmlns:a="http://schemas.openxmlformats.org/drawingml/2006/main"/>
+      </p:grpSpPr>
+      <p:sp>
+        <p:nvSpPr>
+          <p:cNvPr id="2" name="Slide Image Placeholder 1"/>
+          <p:cNvSpPr>
+            <a:spLocks xmlns:a="http://schemas.openxmlformats.org/drawingml/2006/main" noGrp="1"/>
+          </p:cNvSpPr>
+          <p:nvPr>
+            <p:ph type="sldImg" idx="0"/>
+          </p:nvPr>
+        </p:nvSpPr>
+        <p:spPr/>
+      </p:sp>
+      <p:sp>
+        <p:nvSpPr>
+          <p:cNvPr id="3" name="Notes Placeholder 2"/>
+          <p:cNvSpPr>
+            <a:spLocks xmlns:a="http://schemas.openxmlformats.org/drawingml/2006/main" noGrp="1"/>
+          </p:cNvSpPr>
+          <p:nvPr>
+            <p:ph type="body" idx="1"/>
+          </p:nvPr>
+        </p:nvSpPr>
+        <p:spPr/>
+        <p:txBody>
+          <a:bodyPr xmlns:a="http://schemas.openxmlformats.org/drawingml/2006/main"/>
+          <a:lstStyle xmlns:a="http://schemas.openxmlformats.org/drawingml/2006/main"/>
+          <a:p xmlns:a="http://schemas.openxmlformats.org/drawingml/2006/main">
+            <a:r>
+              <a:t>Assess the submitted evidence with the stated acceptance check. Reading links and limitations follow.</a:t>
+            </a:r>
+          </a:p>
+          <a:p xmlns:a="http://schemas.openxmlformats.org/drawingml/2006/main">
+            <a:r>
+              <a:t/>
+            </a:r>
+          </a:p>
+          <a:p xmlns:a="http://schemas.openxmlformats.org/drawingml/2006/main">
+            <a:r>
+              <a:t>Edition: 2026-09-09</a:t>
+            </a:r>
+          </a:p>
+          <a:p xmlns:a="http://schemas.openxmlformats.org/drawingml/2006/main">
+            <a:r>
+              <a:t/>
+            </a:r>
+          </a:p>
+          <a:p xmlns:a="http://schemas.openxmlformats.org/drawingml/2006/main">
+            <a:r>
+              <a:t>[Sources]</a:t>
+            </a:r>
+          </a:p>
+          <a:p xmlns:a="http://schemas.openxmlformats.org/drawingml/2006/main">
+            <a:r>
+              <a:t>- Original source presentation: 04-design-patterns.pdf</a:t>
+            </a:r>
+          </a:p>
+          <a:p xmlns:a="http://schemas.openxmlformats.org/drawingml/2006/main">
+            <a:r>
+              <a:t>- R1: Patterns and problems in emerging multiagent systems. Anthropic research post, 2026-08-13. https://www.anthropic.com/research/multiagent-systems Controlled coordination experiments. Compare scope and budgets before interpreting the findings.</a:t>
+            </a:r>
+          </a:p>
+          <a:p xmlns:a="http://schemas.openxmlformats.org/drawingml/2006/main">
+            <a:r>
+              <a:t/>
+            </a:r>
+          </a:p>
+          <a:p xmlns:a="http://schemas.openxmlformats.org/drawingml/2006/main">
+            <a:r>
+              <a:t>[Assessed practice]</a:t>
+            </a:r>
+          </a:p>
+          <a:p xmlns:a="http://schemas.openxmlformats.org/drawingml/2006/main">
+            <a:r>
+              <a:t>Compare a single catalog agent with an objective evidence check. Specify when an LLM reviewer would add information that the objective check lacks.</a:t>
+            </a:r>
+          </a:p>
+          <a:p xmlns:a="http://schemas.openxmlformats.org/drawingml/2006/main">
+            <a:r>
+              <a:t>Acceptance: Include a case where review adds no value and one where it changes an incorrect proposal. Count all calls in the live variant.</a:t>
+            </a:r>
+          </a:p>
+          <a:p xmlns:a="http://schemas.openxmlformats.org/drawingml/2006/main">
+            <a:r>
+              <a:t>Lab: labs/07_agents_sdk_evaluation.ipynb</a:t>
             </a:r>
           </a:p>
         </p:txBody>
@@ -631,12 +963,52 @@
           </a:p>
           <a:p xmlns:a="http://schemas.openxmlformats.org/drawingml/2006/main">
             <a:r>
+              <a:t>Edition: 2026-09-09</a:t>
+            </a:r>
+          </a:p>
+          <a:p xmlns:a="http://schemas.openxmlformats.org/drawingml/2006/main">
+            <a:r>
+              <a:t/>
+            </a:r>
+          </a:p>
+          <a:p xmlns:a="http://schemas.openxmlformats.org/drawingml/2006/main">
+            <a:r>
               <a:t>[Sources]</a:t>
             </a:r>
           </a:p>
           <a:p xmlns:a="http://schemas.openxmlformats.org/drawingml/2006/main">
             <a:r>
-              <a:t>- Supplied source presentation: 04-design-patterns.pdf</a:t>
+              <a:t>- Original source presentation: 04-design-patterns.pdf</a:t>
+            </a:r>
+          </a:p>
+          <a:p xmlns:a="http://schemas.openxmlformats.org/drawingml/2006/main">
+            <a:r>
+              <a:t>- R1: Patterns and problems in emerging multiagent systems. Anthropic research post, 2026-08-13. https://www.anthropic.com/research/multiagent-systems Controlled coordination experiments. Compare scope and budgets before interpreting the findings.</a:t>
+            </a:r>
+          </a:p>
+          <a:p xmlns:a="http://schemas.openxmlformats.org/drawingml/2006/main">
+            <a:r>
+              <a:t/>
+            </a:r>
+          </a:p>
+          <a:p xmlns:a="http://schemas.openxmlformats.org/drawingml/2006/main">
+            <a:r>
+              <a:t>[Assessed practice]</a:t>
+            </a:r>
+          </a:p>
+          <a:p xmlns:a="http://schemas.openxmlformats.org/drawingml/2006/main">
+            <a:r>
+              <a:t>Compare a single catalog agent with an objective evidence check. Specify when an LLM reviewer would add information that the objective check lacks.</a:t>
+            </a:r>
+          </a:p>
+          <a:p xmlns:a="http://schemas.openxmlformats.org/drawingml/2006/main">
+            <a:r>
+              <a:t>Acceptance: Include a case where review adds no value and one where it changes an incorrect proposal. Count all calls in the live variant.</a:t>
+            </a:r>
+          </a:p>
+          <a:p xmlns:a="http://schemas.openxmlformats.org/drawingml/2006/main">
+            <a:r>
+              <a:t>Lab: labs/07_agents_sdk_evaluation.ipynb</a:t>
             </a:r>
           </a:p>
         </p:txBody>
@@ -716,12 +1088,52 @@
           </a:p>
           <a:p xmlns:a="http://schemas.openxmlformats.org/drawingml/2006/main">
             <a:r>
+              <a:t>Edition: 2026-09-09</a:t>
+            </a:r>
+          </a:p>
+          <a:p xmlns:a="http://schemas.openxmlformats.org/drawingml/2006/main">
+            <a:r>
+              <a:t/>
+            </a:r>
+          </a:p>
+          <a:p xmlns:a="http://schemas.openxmlformats.org/drawingml/2006/main">
+            <a:r>
               <a:t>[Sources]</a:t>
             </a:r>
           </a:p>
           <a:p xmlns:a="http://schemas.openxmlformats.org/drawingml/2006/main">
             <a:r>
-              <a:t>- Supplied source presentation: 04-design-patterns.pdf</a:t>
+              <a:t>- Original source presentation: 04-design-patterns.pdf</a:t>
+            </a:r>
+          </a:p>
+          <a:p xmlns:a="http://schemas.openxmlformats.org/drawingml/2006/main">
+            <a:r>
+              <a:t>- R1: Patterns and problems in emerging multiagent systems. Anthropic research post, 2026-08-13. https://www.anthropic.com/research/multiagent-systems Controlled coordination experiments. Compare scope and budgets before interpreting the findings.</a:t>
+            </a:r>
+          </a:p>
+          <a:p xmlns:a="http://schemas.openxmlformats.org/drawingml/2006/main">
+            <a:r>
+              <a:t/>
+            </a:r>
+          </a:p>
+          <a:p xmlns:a="http://schemas.openxmlformats.org/drawingml/2006/main">
+            <a:r>
+              <a:t>[Assessed practice]</a:t>
+            </a:r>
+          </a:p>
+          <a:p xmlns:a="http://schemas.openxmlformats.org/drawingml/2006/main">
+            <a:r>
+              <a:t>Compare a single catalog agent with an objective evidence check. Specify when an LLM reviewer would add information that the objective check lacks.</a:t>
+            </a:r>
+          </a:p>
+          <a:p xmlns:a="http://schemas.openxmlformats.org/drawingml/2006/main">
+            <a:r>
+              <a:t>Acceptance: Include a case where review adds no value and one where it changes an incorrect proposal. Count all calls in the live variant.</a:t>
+            </a:r>
+          </a:p>
+          <a:p xmlns:a="http://schemas.openxmlformats.org/drawingml/2006/main">
+            <a:r>
+              <a:t>Lab: labs/07_agents_sdk_evaluation.ipynb</a:t>
             </a:r>
           </a:p>
         </p:txBody>
@@ -801,12 +1213,52 @@
           </a:p>
           <a:p xmlns:a="http://schemas.openxmlformats.org/drawingml/2006/main">
             <a:r>
+              <a:t>Edition: 2026-09-09</a:t>
+            </a:r>
+          </a:p>
+          <a:p xmlns:a="http://schemas.openxmlformats.org/drawingml/2006/main">
+            <a:r>
+              <a:t/>
+            </a:r>
+          </a:p>
+          <a:p xmlns:a="http://schemas.openxmlformats.org/drawingml/2006/main">
+            <a:r>
               <a:t>[Sources]</a:t>
             </a:r>
           </a:p>
           <a:p xmlns:a="http://schemas.openxmlformats.org/drawingml/2006/main">
             <a:r>
-              <a:t>- Supplied source presentation: 04-design-patterns.pdf</a:t>
+              <a:t>- Original source presentation: 04-design-patterns.pdf</a:t>
+            </a:r>
+          </a:p>
+          <a:p xmlns:a="http://schemas.openxmlformats.org/drawingml/2006/main">
+            <a:r>
+              <a:t>- R1: Patterns and problems in emerging multiagent systems. Anthropic research post, 2026-08-13. https://www.anthropic.com/research/multiagent-systems Controlled coordination experiments. Compare scope and budgets before interpreting the findings.</a:t>
+            </a:r>
+          </a:p>
+          <a:p xmlns:a="http://schemas.openxmlformats.org/drawingml/2006/main">
+            <a:r>
+              <a:t/>
+            </a:r>
+          </a:p>
+          <a:p xmlns:a="http://schemas.openxmlformats.org/drawingml/2006/main">
+            <a:r>
+              <a:t>[Assessed practice]</a:t>
+            </a:r>
+          </a:p>
+          <a:p xmlns:a="http://schemas.openxmlformats.org/drawingml/2006/main">
+            <a:r>
+              <a:t>Compare a single catalog agent with an objective evidence check. Specify when an LLM reviewer would add information that the objective check lacks.</a:t>
+            </a:r>
+          </a:p>
+          <a:p xmlns:a="http://schemas.openxmlformats.org/drawingml/2006/main">
+            <a:r>
+              <a:t>Acceptance: Include a case where review adds no value and one where it changes an incorrect proposal. Count all calls in the live variant.</a:t>
+            </a:r>
+          </a:p>
+          <a:p xmlns:a="http://schemas.openxmlformats.org/drawingml/2006/main">
+            <a:r>
+              <a:t>Lab: labs/07_agents_sdk_evaluation.ipynb</a:t>
             </a:r>
           </a:p>
         </p:txBody>
@@ -886,12 +1338,52 @@
           </a:p>
           <a:p xmlns:a="http://schemas.openxmlformats.org/drawingml/2006/main">
             <a:r>
+              <a:t>Edition: 2026-09-09</a:t>
+            </a:r>
+          </a:p>
+          <a:p xmlns:a="http://schemas.openxmlformats.org/drawingml/2006/main">
+            <a:r>
+              <a:t/>
+            </a:r>
+          </a:p>
+          <a:p xmlns:a="http://schemas.openxmlformats.org/drawingml/2006/main">
+            <a:r>
               <a:t>[Sources]</a:t>
             </a:r>
           </a:p>
           <a:p xmlns:a="http://schemas.openxmlformats.org/drawingml/2006/main">
             <a:r>
-              <a:t>- Supplied source presentation: 04-design-patterns.pdf</a:t>
+              <a:t>- Original source presentation: 04-design-patterns.pdf</a:t>
+            </a:r>
+          </a:p>
+          <a:p xmlns:a="http://schemas.openxmlformats.org/drawingml/2006/main">
+            <a:r>
+              <a:t>- R1: Patterns and problems in emerging multiagent systems. Anthropic research post, 2026-08-13. https://www.anthropic.com/research/multiagent-systems Controlled coordination experiments. Compare scope and budgets before interpreting the findings.</a:t>
+            </a:r>
+          </a:p>
+          <a:p xmlns:a="http://schemas.openxmlformats.org/drawingml/2006/main">
+            <a:r>
+              <a:t/>
+            </a:r>
+          </a:p>
+          <a:p xmlns:a="http://schemas.openxmlformats.org/drawingml/2006/main">
+            <a:r>
+              <a:t>[Assessed practice]</a:t>
+            </a:r>
+          </a:p>
+          <a:p xmlns:a="http://schemas.openxmlformats.org/drawingml/2006/main">
+            <a:r>
+              <a:t>Compare a single catalog agent with an objective evidence check. Specify when an LLM reviewer would add information that the objective check lacks.</a:t>
+            </a:r>
+          </a:p>
+          <a:p xmlns:a="http://schemas.openxmlformats.org/drawingml/2006/main">
+            <a:r>
+              <a:t>Acceptance: Include a case where review adds no value and one where it changes an incorrect proposal. Count all calls in the live variant.</a:t>
+            </a:r>
+          </a:p>
+          <a:p xmlns:a="http://schemas.openxmlformats.org/drawingml/2006/main">
+            <a:r>
+              <a:t>Lab: labs/07_agents_sdk_evaluation.ipynb</a:t>
             </a:r>
           </a:p>
         </p:txBody>
@@ -971,12 +1463,52 @@
           </a:p>
           <a:p xmlns:a="http://schemas.openxmlformats.org/drawingml/2006/main">
             <a:r>
+              <a:t>Edition: 2026-09-09</a:t>
+            </a:r>
+          </a:p>
+          <a:p xmlns:a="http://schemas.openxmlformats.org/drawingml/2006/main">
+            <a:r>
+              <a:t/>
+            </a:r>
+          </a:p>
+          <a:p xmlns:a="http://schemas.openxmlformats.org/drawingml/2006/main">
+            <a:r>
               <a:t>[Sources]</a:t>
             </a:r>
           </a:p>
           <a:p xmlns:a="http://schemas.openxmlformats.org/drawingml/2006/main">
             <a:r>
-              <a:t>- Supplied source presentation: 04-design-patterns.pdf</a:t>
+              <a:t>- Original source presentation: 04-design-patterns.pdf</a:t>
+            </a:r>
+          </a:p>
+          <a:p xmlns:a="http://schemas.openxmlformats.org/drawingml/2006/main">
+            <a:r>
+              <a:t>- R1: Patterns and problems in emerging multiagent systems. Anthropic research post, 2026-08-13. https://www.anthropic.com/research/multiagent-systems Controlled coordination experiments. Compare scope and budgets before interpreting the findings.</a:t>
+            </a:r>
+          </a:p>
+          <a:p xmlns:a="http://schemas.openxmlformats.org/drawingml/2006/main">
+            <a:r>
+              <a:t/>
+            </a:r>
+          </a:p>
+          <a:p xmlns:a="http://schemas.openxmlformats.org/drawingml/2006/main">
+            <a:r>
+              <a:t>[Assessed practice]</a:t>
+            </a:r>
+          </a:p>
+          <a:p xmlns:a="http://schemas.openxmlformats.org/drawingml/2006/main">
+            <a:r>
+              <a:t>Compare a single catalog agent with an objective evidence check. Specify when an LLM reviewer would add information that the objective check lacks.</a:t>
+            </a:r>
+          </a:p>
+          <a:p xmlns:a="http://schemas.openxmlformats.org/drawingml/2006/main">
+            <a:r>
+              <a:t>Acceptance: Include a case where review adds no value and one where it changes an incorrect proposal. Count all calls in the live variant.</a:t>
+            </a:r>
+          </a:p>
+          <a:p xmlns:a="http://schemas.openxmlformats.org/drawingml/2006/main">
+            <a:r>
+              <a:t>Lab: labs/07_agents_sdk_evaluation.ipynb</a:t>
             </a:r>
           </a:p>
         </p:txBody>
@@ -1056,12 +1588,52 @@
           </a:p>
           <a:p xmlns:a="http://schemas.openxmlformats.org/drawingml/2006/main">
             <a:r>
+              <a:t>Edition: 2026-09-09</a:t>
+            </a:r>
+          </a:p>
+          <a:p xmlns:a="http://schemas.openxmlformats.org/drawingml/2006/main">
+            <a:r>
+              <a:t/>
+            </a:r>
+          </a:p>
+          <a:p xmlns:a="http://schemas.openxmlformats.org/drawingml/2006/main">
+            <a:r>
               <a:t>[Sources]</a:t>
             </a:r>
           </a:p>
           <a:p xmlns:a="http://schemas.openxmlformats.org/drawingml/2006/main">
             <a:r>
-              <a:t>- Supplied source presentation: 04-design-patterns.pdf</a:t>
+              <a:t>- Original source presentation: 04-design-patterns.pdf</a:t>
+            </a:r>
+          </a:p>
+          <a:p xmlns:a="http://schemas.openxmlformats.org/drawingml/2006/main">
+            <a:r>
+              <a:t>- R1: Patterns and problems in emerging multiagent systems. Anthropic research post, 2026-08-13. https://www.anthropic.com/research/multiagent-systems Controlled coordination experiments. Compare scope and budgets before interpreting the findings.</a:t>
+            </a:r>
+          </a:p>
+          <a:p xmlns:a="http://schemas.openxmlformats.org/drawingml/2006/main">
+            <a:r>
+              <a:t/>
+            </a:r>
+          </a:p>
+          <a:p xmlns:a="http://schemas.openxmlformats.org/drawingml/2006/main">
+            <a:r>
+              <a:t>[Assessed practice]</a:t>
+            </a:r>
+          </a:p>
+          <a:p xmlns:a="http://schemas.openxmlformats.org/drawingml/2006/main">
+            <a:r>
+              <a:t>Compare a single catalog agent with an objective evidence check. Specify when an LLM reviewer would add information that the objective check lacks.</a:t>
+            </a:r>
+          </a:p>
+          <a:p xmlns:a="http://schemas.openxmlformats.org/drawingml/2006/main">
+            <a:r>
+              <a:t>Acceptance: Include a case where review adds no value and one where it changes an incorrect proposal. Count all calls in the live variant.</a:t>
+            </a:r>
+          </a:p>
+          <a:p xmlns:a="http://schemas.openxmlformats.org/drawingml/2006/main">
+            <a:r>
+              <a:t>Lab: labs/07_agents_sdk_evaluation.ipynb</a:t>
             </a:r>
           </a:p>
         </p:txBody>
@@ -1141,12 +1713,52 @@
           </a:p>
           <a:p xmlns:a="http://schemas.openxmlformats.org/drawingml/2006/main">
             <a:r>
+              <a:t>Edition: 2026-09-09</a:t>
+            </a:r>
+          </a:p>
+          <a:p xmlns:a="http://schemas.openxmlformats.org/drawingml/2006/main">
+            <a:r>
+              <a:t/>
+            </a:r>
+          </a:p>
+          <a:p xmlns:a="http://schemas.openxmlformats.org/drawingml/2006/main">
+            <a:r>
               <a:t>[Sources]</a:t>
             </a:r>
           </a:p>
           <a:p xmlns:a="http://schemas.openxmlformats.org/drawingml/2006/main">
             <a:r>
-              <a:t>- Supplied source presentation: 04-design-patterns.pdf</a:t>
+              <a:t>- Original source presentation: 04-design-patterns.pdf</a:t>
+            </a:r>
+          </a:p>
+          <a:p xmlns:a="http://schemas.openxmlformats.org/drawingml/2006/main">
+            <a:r>
+              <a:t>- R1: Patterns and problems in emerging multiagent systems. Anthropic research post, 2026-08-13. https://www.anthropic.com/research/multiagent-systems Controlled coordination experiments. Compare scope and budgets before interpreting the findings.</a:t>
+            </a:r>
+          </a:p>
+          <a:p xmlns:a="http://schemas.openxmlformats.org/drawingml/2006/main">
+            <a:r>
+              <a:t/>
+            </a:r>
+          </a:p>
+          <a:p xmlns:a="http://schemas.openxmlformats.org/drawingml/2006/main">
+            <a:r>
+              <a:t>[Assessed practice]</a:t>
+            </a:r>
+          </a:p>
+          <a:p xmlns:a="http://schemas.openxmlformats.org/drawingml/2006/main">
+            <a:r>
+              <a:t>Compare a single catalog agent with an objective evidence check. Specify when an LLM reviewer would add information that the objective check lacks.</a:t>
+            </a:r>
+          </a:p>
+          <a:p xmlns:a="http://schemas.openxmlformats.org/drawingml/2006/main">
+            <a:r>
+              <a:t>Acceptance: Include a case where review adds no value and one where it changes an incorrect proposal. Count all calls in the live variant.</a:t>
+            </a:r>
+          </a:p>
+          <a:p xmlns:a="http://schemas.openxmlformats.org/drawingml/2006/main">
+            <a:r>
+              <a:t>Lab: labs/07_agents_sdk_evaluation.ipynb</a:t>
             </a:r>
           </a:p>
         </p:txBody>
@@ -1216,7 +1828,7 @@
           <a:lstStyle xmlns:a="http://schemas.openxmlformats.org/drawingml/2006/main"/>
           <a:p xmlns:a="http://schemas.openxmlformats.org/drawingml/2006/main">
             <a:r>
-              <a:t>Use as retrieval practice. Ask for an answer that defines, compares, traces, and evaluates.</a:t>
+              <a:t>Explain the claim first, then use the numbered points as evidence and design consequences.</a:t>
             </a:r>
           </a:p>
           <a:p xmlns:a="http://schemas.openxmlformats.org/drawingml/2006/main">
@@ -1226,12 +1838,52 @@
           </a:p>
           <a:p xmlns:a="http://schemas.openxmlformats.org/drawingml/2006/main">
             <a:r>
+              <a:t>Edition: 2026-09-09</a:t>
+            </a:r>
+          </a:p>
+          <a:p xmlns:a="http://schemas.openxmlformats.org/drawingml/2006/main">
+            <a:r>
+              <a:t/>
+            </a:r>
+          </a:p>
+          <a:p xmlns:a="http://schemas.openxmlformats.org/drawingml/2006/main">
+            <a:r>
               <a:t>[Sources]</a:t>
             </a:r>
           </a:p>
           <a:p xmlns:a="http://schemas.openxmlformats.org/drawingml/2006/main">
             <a:r>
-              <a:t>- Supplied source presentation: 04-design-patterns.pdf</a:t>
+              <a:t>- Original source presentation: 04-design-patterns.pdf</a:t>
+            </a:r>
+          </a:p>
+          <a:p xmlns:a="http://schemas.openxmlformats.org/drawingml/2006/main">
+            <a:r>
+              <a:t>- R1: Patterns and problems in emerging multiagent systems. Anthropic research post, 2026-08-13. https://www.anthropic.com/research/multiagent-systems Controlled coordination experiments. Compare scope and budgets before interpreting the findings.</a:t>
+            </a:r>
+          </a:p>
+          <a:p xmlns:a="http://schemas.openxmlformats.org/drawingml/2006/main">
+            <a:r>
+              <a:t/>
+            </a:r>
+          </a:p>
+          <a:p xmlns:a="http://schemas.openxmlformats.org/drawingml/2006/main">
+            <a:r>
+              <a:t>[Assessed practice]</a:t>
+            </a:r>
+          </a:p>
+          <a:p xmlns:a="http://schemas.openxmlformats.org/drawingml/2006/main">
+            <a:r>
+              <a:t>Compare a single catalog agent with an objective evidence check. Specify when an LLM reviewer would add information that the objective check lacks.</a:t>
+            </a:r>
+          </a:p>
+          <a:p xmlns:a="http://schemas.openxmlformats.org/drawingml/2006/main">
+            <a:r>
+              <a:t>Acceptance: Include a case where review adds no value and one where it changes an incorrect proposal. Count all calls in the live variant.</a:t>
+            </a:r>
+          </a:p>
+          <a:p xmlns:a="http://schemas.openxmlformats.org/drawingml/2006/main">
+            <a:r>
+              <a:t>Lab: labs/07_agents_sdk_evaluation.ipynb</a:t>
             </a:r>
           </a:p>
         </p:txBody>
@@ -1299,7 +1951,7 @@
   </p:cSld>
   <p:clrMap bg1="lt1" tx1="dk1" bg2="lt2" tx2="dk2" accent1="accent1" accent2="accent2" accent3="accent3" accent4="accent4" accent5="accent5" accent6="accent6" hlink="hlink" folHlink="folHlink"/>
   <p:sldLayoutIdLst>
-    <p:sldLayoutId xmlns:r="http://schemas.openxmlformats.org/officeDocument/2006/relationships" id="2147483649" r:id="Rc85f090aae364989"/>
+    <p:sldLayoutId xmlns:r="http://schemas.openxmlformats.org/officeDocument/2006/relationships" id="2147483649" r:id="R904c46fee0514600"/>
   </p:sldLayoutIdLst>
   <p:txStyles>
     <p:titleStyle>
@@ -1850,7 +2502,7 @@
           <p:cNvPr id="8" name="title-accent">
             <a:extLst xmlns:a="http://schemas.openxmlformats.org/drawingml/2006/main">
               <a:ext uri="{FF2B5EF4-FFF2-40B4-BE49-F238E27FC236}">
-                <a16:creationId xmlns:a16="http://schemas.microsoft.com/office/drawing/2014/main" id="{ECB85416-9D86-42A5-B727-3EC69EEDA54D}"/>
+                <a16:creationId xmlns:a16="http://schemas.microsoft.com/office/drawing/2014/main" id="{4629714D-88DD-467F-9B10-6EEB3CEA1CEC}"/>
               </a:ext>
             </a:extLst>
           </p:cNvPr>
@@ -1883,7 +2535,7 @@
           <p:cNvPr id="2" name="course-title">
             <a:extLst xmlns:a="http://schemas.openxmlformats.org/drawingml/2006/main">
               <a:ext uri="{FF2B5EF4-FFF2-40B4-BE49-F238E27FC236}">
-                <a16:creationId xmlns:a16="http://schemas.microsoft.com/office/drawing/2014/main" id="{04FDC008-A83F-4E3B-AD76-F8ABE1BCFCCF}"/>
+                <a16:creationId xmlns:a16="http://schemas.microsoft.com/office/drawing/2014/main" id="{4784E2E5-426A-4658-B681-D61A404F1D84}"/>
               </a:ext>
             </a:extLst>
           </p:cNvPr>
@@ -1941,7 +2593,7 @@
           <p:cNvPr id="3" name="chapter-number">
             <a:extLst xmlns:a="http://schemas.openxmlformats.org/drawingml/2006/main">
               <a:ext uri="{FF2B5EF4-FFF2-40B4-BE49-F238E27FC236}">
-                <a16:creationId xmlns:a16="http://schemas.microsoft.com/office/drawing/2014/main" id="{17718093-002A-4121-AB33-2C6973C2B908}"/>
+                <a16:creationId xmlns:a16="http://schemas.microsoft.com/office/drawing/2014/main" id="{483D3FAE-CE80-45CC-8D51-2314A8DB7D23}"/>
               </a:ext>
             </a:extLst>
           </p:cNvPr>
@@ -1999,7 +2651,7 @@
           <p:cNvPr id="4" name="deck-title">
             <a:extLst xmlns:a="http://schemas.openxmlformats.org/drawingml/2006/main">
               <a:ext uri="{FF2B5EF4-FFF2-40B4-BE49-F238E27FC236}">
-                <a16:creationId xmlns:a16="http://schemas.microsoft.com/office/drawing/2014/main" id="{6A63C86D-F3A1-4F52-AB39-D1EA2663339F}"/>
+                <a16:creationId xmlns:a16="http://schemas.microsoft.com/office/drawing/2014/main" id="{659996D7-E75D-4B36-8F79-A58B3621E446}"/>
               </a:ext>
             </a:extLst>
           </p:cNvPr>
@@ -2057,7 +2709,7 @@
           <p:cNvPr id="5" name="deck-thesis">
             <a:extLst xmlns:a="http://schemas.openxmlformats.org/drawingml/2006/main">
               <a:ext uri="{FF2B5EF4-FFF2-40B4-BE49-F238E27FC236}">
-                <a16:creationId xmlns:a16="http://schemas.microsoft.com/office/drawing/2014/main" id="{403C3B8E-E62C-42AE-9D1D-2B1D94E01341}"/>
+                <a16:creationId xmlns:a16="http://schemas.microsoft.com/office/drawing/2014/main" id="{43006AF1-6042-4C1C-A7B6-9797E9DA4243}"/>
               </a:ext>
             </a:extLst>
           </p:cNvPr>
@@ -2115,7 +2767,7 @@
           <p:cNvPr id="6" name="title-marker">
             <a:extLst xmlns:a="http://schemas.openxmlformats.org/drawingml/2006/main">
               <a:ext uri="{FF2B5EF4-FFF2-40B4-BE49-F238E27FC236}">
-                <a16:creationId xmlns:a16="http://schemas.microsoft.com/office/drawing/2014/main" id="{A90DECCD-8CDB-4723-854E-548A35772CBE}"/>
+                <a16:creationId xmlns:a16="http://schemas.microsoft.com/office/drawing/2014/main" id="{93027071-C23E-4185-AB27-E6BA56B42802}"/>
               </a:ext>
             </a:extLst>
           </p:cNvPr>
@@ -2148,7 +2800,7 @@
           <p:cNvPr id="7" name="title-marker-text">
             <a:extLst xmlns:a="http://schemas.openxmlformats.org/drawingml/2006/main">
               <a:ext uri="{FF2B5EF4-FFF2-40B4-BE49-F238E27FC236}">
-                <a16:creationId xmlns:a16="http://schemas.microsoft.com/office/drawing/2014/main" id="{0C8C44A8-2FBB-422C-8046-8D4B2BEA78C3}"/>
+                <a16:creationId xmlns:a16="http://schemas.microsoft.com/office/drawing/2014/main" id="{C3C8815E-D8AA-4B38-92D5-D64E9A72C320}"/>
               </a:ext>
             </a:extLst>
           </p:cNvPr>
@@ -2227,7 +2879,7 @@
     </p:spTree>
     <p:extLst>
       <p:ext uri="{BB962C8B-B14F-4D97-AF65-F5344CB8AC3E}">
-        <p14:creationId xmlns:p14="http://schemas.microsoft.com/office/powerpoint/2010/main" val="2108800439"/>
+        <p14:creationId xmlns:p14="http://schemas.microsoft.com/office/powerpoint/2010/main" val="2141171082"/>
       </p:ext>
     </p:extLst>
   </p:cSld>
@@ -2235,6 +2887,996 @@
 </file>
 
 <file path=ppt/slides/slide10.xml><?xml version="1.0" encoding="utf-8"?>
+<p:sld xmlns:p="http://schemas.openxmlformats.org/presentationml/2006/main">
+  <p:cSld>
+    <p:bg>
+      <p:bgPr>
+        <a:solidFill xmlns:a="http://schemas.openxmlformats.org/drawingml/2006/main">
+          <a:srgbClr val="FFFFFF"/>
+        </a:solidFill>
+      </p:bgPr>
+    </p:bg>
+    <p:spTree>
+      <p:nvGrpSpPr>
+        <p:cNvPr id="1" name=""/>
+        <p:cNvGrpSpPr/>
+        <p:nvPr/>
+      </p:nvGrpSpPr>
+      <p:grpSpPr>
+        <a:xfrm xmlns:a="http://schemas.openxmlformats.org/drawingml/2006/main"/>
+      </p:grpSpPr>
+      <p:sp>
+        <p:nvSpPr>
+          <p:cNvPr id="18" name="accent-line">
+            <a:extLst xmlns:a="http://schemas.openxmlformats.org/drawingml/2006/main">
+              <a:ext uri="{FF2B5EF4-FFF2-40B4-BE49-F238E27FC236}">
+                <a16:creationId xmlns:a16="http://schemas.microsoft.com/office/drawing/2014/main" id="{321D0400-FCFA-41C3-ABBE-59031142D135}"/>
+              </a:ext>
+            </a:extLst>
+          </p:cNvPr>
+          <p:cNvSpPr>
+            <a:spLocks xmlns:a="http://schemas.openxmlformats.org/drawingml/2006/main" noGrp="1"/>
+          </p:cNvSpPr>
+          <p:nvPr/>
+        </p:nvSpPr>
+        <p:spPr>
+          <a:xfrm xmlns:a="http://schemas.openxmlformats.org/drawingml/2006/main">
+            <a:off x="390525" y="304800"/>
+            <a:ext cx="11410950" cy="66675"/>
+          </a:xfrm>
+          <a:prstGeom xmlns:a="http://schemas.openxmlformats.org/drawingml/2006/main" prst="rect">
+            <a:avLst/>
+          </a:prstGeom>
+          <a:solidFill xmlns:a="http://schemas.openxmlformats.org/drawingml/2006/main">
+            <a:srgbClr val="73C8FF"/>
+          </a:solidFill>
+          <a:ln xmlns:a="http://schemas.openxmlformats.org/drawingml/2006/main" w="0">
+            <a:solidFill>
+              <a:srgbClr val="73C8FF"/>
+            </a:solidFill>
+            <a:prstDash val="solid"/>
+          </a:ln>
+        </p:spPr>
+      </p:sp>
+      <p:sp>
+        <p:nvSpPr>
+          <p:cNvPr id="2" name="chapter-label">
+            <a:extLst xmlns:a="http://schemas.openxmlformats.org/drawingml/2006/main">
+              <a:ext uri="{FF2B5EF4-FFF2-40B4-BE49-F238E27FC236}">
+                <a16:creationId xmlns:a16="http://schemas.microsoft.com/office/drawing/2014/main" id="{85672532-99CC-4840-B940-E149AC3BE751}"/>
+              </a:ext>
+            </a:extLst>
+          </p:cNvPr>
+          <p:cNvSpPr>
+            <a:spLocks xmlns:a="http://schemas.openxmlformats.org/drawingml/2006/main" noGrp="1"/>
+          </p:cNvSpPr>
+          <p:nvPr/>
+        </p:nvSpPr>
+        <p:spPr>
+          <a:xfrm xmlns:a="http://schemas.openxmlformats.org/drawingml/2006/main">
+            <a:off x="390525" y="466725"/>
+            <a:ext cx="4953000" cy="323850"/>
+          </a:xfrm>
+          <a:prstGeom xmlns:a="http://schemas.openxmlformats.org/drawingml/2006/main" prst="rect">
+            <a:avLst/>
+          </a:prstGeom>
+          <a:noFill xmlns:a="http://schemas.openxmlformats.org/drawingml/2006/main"/>
+          <a:ln xmlns:a="http://schemas.openxmlformats.org/drawingml/2006/main" w="0">
+            <a:noFill/>
+            <a:prstDash val="solid"/>
+          </a:ln>
+        </p:spPr>
+        <p:txBody>
+          <a:bodyPr xmlns:a="http://schemas.openxmlformats.org/drawingml/2006/main" anchor="t">
+            <a:noAutofit/>
+          </a:bodyPr>
+          <a:lstStyle xmlns:a="http://schemas.openxmlformats.org/drawingml/2006/main"/>
+          <a:p xmlns:a="http://schemas.openxmlformats.org/drawingml/2006/main">
+            <a:pPr algn="l">
+              <a:defRPr sz="1275" b="1">
+                <a:solidFill>
+                  <a:srgbClr val="5B5B57"/>
+                </a:solidFill>
+                <a:latin typeface="Helvetica Neue"/>
+                <a:ea typeface="Helvetica Neue"/>
+                <a:cs typeface="Helvetica Neue"/>
+              </a:defRPr>
+            </a:pPr>
+            <a:r>
+              <a:rPr sz="1275" b="1">
+                <a:solidFill>
+                  <a:srgbClr val="5B5B57"/>
+                </a:solidFill>
+                <a:latin typeface="Helvetica Neue"/>
+                <a:ea typeface="Helvetica Neue"/>
+                <a:cs typeface="Helvetica Neue"/>
+              </a:rPr>
+              <a:t>EXAM CHECK  /  04</a:t>
+            </a:r>
+          </a:p>
+        </p:txBody>
+      </p:sp>
+      <p:sp>
+        <p:nvSpPr>
+          <p:cNvPr id="3" name="slide-number">
+            <a:extLst xmlns:a="http://schemas.openxmlformats.org/drawingml/2006/main">
+              <a:ext uri="{FF2B5EF4-FFF2-40B4-BE49-F238E27FC236}">
+                <a16:creationId xmlns:a16="http://schemas.microsoft.com/office/drawing/2014/main" id="{8DEDDA40-758F-45A5-9997-E2B29A49BB27}"/>
+              </a:ext>
+            </a:extLst>
+          </p:cNvPr>
+          <p:cNvSpPr>
+            <a:spLocks xmlns:a="http://schemas.openxmlformats.org/drawingml/2006/main" noGrp="1"/>
+          </p:cNvSpPr>
+          <p:nvPr/>
+        </p:nvSpPr>
+        <p:spPr>
+          <a:xfrm xmlns:a="http://schemas.openxmlformats.org/drawingml/2006/main">
+            <a:off x="11049000" y="6286500"/>
+            <a:ext cx="742950" cy="266700"/>
+          </a:xfrm>
+          <a:prstGeom xmlns:a="http://schemas.openxmlformats.org/drawingml/2006/main" prst="rect">
+            <a:avLst/>
+          </a:prstGeom>
+          <a:noFill xmlns:a="http://schemas.openxmlformats.org/drawingml/2006/main"/>
+          <a:ln xmlns:a="http://schemas.openxmlformats.org/drawingml/2006/main" w="0">
+            <a:noFill/>
+            <a:prstDash val="solid"/>
+          </a:ln>
+        </p:spPr>
+        <p:txBody>
+          <a:bodyPr xmlns:a="http://schemas.openxmlformats.org/drawingml/2006/main" anchor="t">
+            <a:noAutofit/>
+          </a:bodyPr>
+          <a:lstStyle xmlns:a="http://schemas.openxmlformats.org/drawingml/2006/main"/>
+          <a:p xmlns:a="http://schemas.openxmlformats.org/drawingml/2006/main">
+            <a:pPr algn="r">
+              <a:defRPr sz="1200" b="0">
+                <a:solidFill>
+                  <a:srgbClr val="5B5B57"/>
+                </a:solidFill>
+                <a:latin typeface="Helvetica Neue"/>
+                <a:ea typeface="Helvetica Neue"/>
+                <a:cs typeface="Helvetica Neue"/>
+              </a:defRPr>
+            </a:pPr>
+            <a:r>
+              <a:rPr sz="1200" b="0">
+                <a:solidFill>
+                  <a:srgbClr val="5B5B57"/>
+                </a:solidFill>
+                <a:latin typeface="Helvetica Neue"/>
+                <a:ea typeface="Helvetica Neue"/>
+                <a:cs typeface="Helvetica Neue"/>
+              </a:rPr>
+              <a:t>10</a:t>
+            </a:r>
+          </a:p>
+        </p:txBody>
+      </p:sp>
+      <p:sp>
+        <p:nvSpPr>
+          <p:cNvPr id="4" name="chapter-footer">
+            <a:extLst xmlns:a="http://schemas.openxmlformats.org/drawingml/2006/main">
+              <a:ext uri="{FF2B5EF4-FFF2-40B4-BE49-F238E27FC236}">
+                <a16:creationId xmlns:a16="http://schemas.microsoft.com/office/drawing/2014/main" id="{3F29B4C1-BDBD-4BEC-8AC9-35B983D48EF9}"/>
+              </a:ext>
+            </a:extLst>
+          </p:cNvPr>
+          <p:cNvSpPr>
+            <a:spLocks xmlns:a="http://schemas.openxmlformats.org/drawingml/2006/main" noGrp="1"/>
+          </p:cNvSpPr>
+          <p:nvPr/>
+        </p:nvSpPr>
+        <p:spPr>
+          <a:xfrm xmlns:a="http://schemas.openxmlformats.org/drawingml/2006/main">
+            <a:off x="390525" y="6286500"/>
+            <a:ext cx="8191500" cy="266700"/>
+          </a:xfrm>
+          <a:prstGeom xmlns:a="http://schemas.openxmlformats.org/drawingml/2006/main" prst="rect">
+            <a:avLst/>
+          </a:prstGeom>
+          <a:noFill xmlns:a="http://schemas.openxmlformats.org/drawingml/2006/main"/>
+          <a:ln xmlns:a="http://schemas.openxmlformats.org/drawingml/2006/main" w="0">
+            <a:noFill/>
+            <a:prstDash val="solid"/>
+          </a:ln>
+        </p:spPr>
+        <p:txBody>
+          <a:bodyPr xmlns:a="http://schemas.openxmlformats.org/drawingml/2006/main" anchor="t">
+            <a:noAutofit/>
+          </a:bodyPr>
+          <a:lstStyle xmlns:a="http://schemas.openxmlformats.org/drawingml/2006/main"/>
+          <a:p xmlns:a="http://schemas.openxmlformats.org/drawingml/2006/main">
+            <a:pPr algn="l">
+              <a:defRPr sz="1125" b="0">
+                <a:solidFill>
+                  <a:srgbClr val="5B5B57"/>
+                </a:solidFill>
+                <a:latin typeface="Helvetica Neue"/>
+                <a:ea typeface="Helvetica Neue"/>
+                <a:cs typeface="Helvetica Neue"/>
+              </a:defRPr>
+            </a:pPr>
+            <a:r>
+              <a:rPr sz="1125" b="0">
+                <a:solidFill>
+                  <a:srgbClr val="5B5B57"/>
+                </a:solidFill>
+                <a:latin typeface="Helvetica Neue"/>
+                <a:ea typeface="Helvetica Neue"/>
+                <a:cs typeface="Helvetica Neue"/>
+              </a:rPr>
+              <a:t>Agentic Design Patterns</a:t>
+            </a:r>
+          </a:p>
+        </p:txBody>
+      </p:sp>
+      <p:sp>
+        <p:nvSpPr>
+          <p:cNvPr id="5" name="exam-title">
+            <a:extLst xmlns:a="http://schemas.openxmlformats.org/drawingml/2006/main">
+              <a:ext uri="{FF2B5EF4-FFF2-40B4-BE49-F238E27FC236}">
+                <a16:creationId xmlns:a16="http://schemas.microsoft.com/office/drawing/2014/main" id="{7E6F0184-C8EA-4FAB-B9DB-5DD019BFBE54}"/>
+              </a:ext>
+            </a:extLst>
+          </p:cNvPr>
+          <p:cNvSpPr>
+            <a:spLocks xmlns:a="http://schemas.openxmlformats.org/drawingml/2006/main" noGrp="1"/>
+          </p:cNvSpPr>
+          <p:nvPr/>
+        </p:nvSpPr>
+        <p:spPr>
+          <a:xfrm xmlns:a="http://schemas.openxmlformats.org/drawingml/2006/main">
+            <a:off x="390525" y="981075"/>
+            <a:ext cx="10668000" cy="781050"/>
+          </a:xfrm>
+          <a:prstGeom xmlns:a="http://schemas.openxmlformats.org/drawingml/2006/main" prst="rect">
+            <a:avLst/>
+          </a:prstGeom>
+          <a:noFill xmlns:a="http://schemas.openxmlformats.org/drawingml/2006/main"/>
+          <a:ln xmlns:a="http://schemas.openxmlformats.org/drawingml/2006/main" w="0">
+            <a:noFill/>
+            <a:prstDash val="solid"/>
+          </a:ln>
+        </p:spPr>
+        <p:txBody>
+          <a:bodyPr xmlns:a="http://schemas.openxmlformats.org/drawingml/2006/main" anchor="t">
+            <a:noAutofit/>
+          </a:bodyPr>
+          <a:lstStyle xmlns:a="http://schemas.openxmlformats.org/drawingml/2006/main"/>
+          <a:p xmlns:a="http://schemas.openxmlformats.org/drawingml/2006/main">
+            <a:pPr algn="l">
+              <a:defRPr sz="3150" b="1">
+                <a:solidFill>
+                  <a:srgbClr val="111111"/>
+                </a:solidFill>
+                <a:latin typeface="Helvetica Neue"/>
+                <a:ea typeface="Helvetica Neue"/>
+                <a:cs typeface="Helvetica Neue"/>
+              </a:defRPr>
+            </a:pPr>
+            <a:r>
+              <a:rPr sz="3150" b="1">
+                <a:solidFill>
+                  <a:srgbClr val="111111"/>
+                </a:solidFill>
+                <a:latin typeface="Helvetica Neue"/>
+                <a:ea typeface="Helvetica Neue"/>
+                <a:cs typeface="Helvetica Neue"/>
+              </a:rPr>
+              <a:t>Can you answer these without notes?</a:t>
+            </a:r>
+          </a:p>
+        </p:txBody>
+      </p:sp>
+      <p:sp>
+        <p:nvSpPr>
+          <p:cNvPr id="6" name="exam-number-1">
+            <a:extLst xmlns:a="http://schemas.openxmlformats.org/drawingml/2006/main">
+              <a:ext uri="{FF2B5EF4-FFF2-40B4-BE49-F238E27FC236}">
+                <a16:creationId xmlns:a16="http://schemas.microsoft.com/office/drawing/2014/main" id="{ACECFA2A-3D19-488A-9F2D-4179BCE41C64}"/>
+              </a:ext>
+            </a:extLst>
+          </p:cNvPr>
+          <p:cNvSpPr>
+            <a:spLocks xmlns:a="http://schemas.openxmlformats.org/drawingml/2006/main" noGrp="1"/>
+          </p:cNvSpPr>
+          <p:nvPr/>
+        </p:nvSpPr>
+        <p:spPr>
+          <a:xfrm xmlns:a="http://schemas.openxmlformats.org/drawingml/2006/main">
+            <a:off x="390525" y="2238375"/>
+            <a:ext cx="590550" cy="400050"/>
+          </a:xfrm>
+          <a:prstGeom xmlns:a="http://schemas.openxmlformats.org/drawingml/2006/main" prst="rect">
+            <a:avLst/>
+          </a:prstGeom>
+          <a:noFill xmlns:a="http://schemas.openxmlformats.org/drawingml/2006/main"/>
+          <a:ln xmlns:a="http://schemas.openxmlformats.org/drawingml/2006/main" w="0">
+            <a:noFill/>
+            <a:prstDash val="solid"/>
+          </a:ln>
+        </p:spPr>
+        <p:txBody>
+          <a:bodyPr xmlns:a="http://schemas.openxmlformats.org/drawingml/2006/main" anchor="t">
+            <a:noAutofit/>
+          </a:bodyPr>
+          <a:lstStyle xmlns:a="http://schemas.openxmlformats.org/drawingml/2006/main"/>
+          <a:p xmlns:a="http://schemas.openxmlformats.org/drawingml/2006/main">
+            <a:pPr algn="l">
+              <a:defRPr sz="1725" b="1">
+                <a:solidFill>
+                  <a:srgbClr val="73C8FF"/>
+                </a:solidFill>
+                <a:latin typeface="Helvetica Neue"/>
+                <a:ea typeface="Helvetica Neue"/>
+                <a:cs typeface="Helvetica Neue"/>
+              </a:defRPr>
+            </a:pPr>
+            <a:r>
+              <a:rPr sz="1725" b="1">
+                <a:solidFill>
+                  <a:srgbClr val="73C8FF"/>
+                </a:solidFill>
+                <a:latin typeface="Helvetica Neue"/>
+                <a:ea typeface="Helvetica Neue"/>
+                <a:cs typeface="Helvetica Neue"/>
+              </a:rPr>
+              <a:t>01</a:t>
+            </a:r>
+          </a:p>
+        </p:txBody>
+      </p:sp>
+      <p:sp>
+        <p:nvSpPr>
+          <p:cNvPr id="7" name="exam-question-1">
+            <a:extLst xmlns:a="http://schemas.openxmlformats.org/drawingml/2006/main">
+              <a:ext uri="{FF2B5EF4-FFF2-40B4-BE49-F238E27FC236}">
+                <a16:creationId xmlns:a16="http://schemas.microsoft.com/office/drawing/2014/main" id="{FD872E9A-C07A-4FB7-AF9A-B7755972A936}"/>
+              </a:ext>
+            </a:extLst>
+          </p:cNvPr>
+          <p:cNvSpPr>
+            <a:spLocks xmlns:a="http://schemas.openxmlformats.org/drawingml/2006/main" noGrp="1"/>
+          </p:cNvSpPr>
+          <p:nvPr/>
+        </p:nvSpPr>
+        <p:spPr>
+          <a:xfrm xmlns:a="http://schemas.openxmlformats.org/drawingml/2006/main">
+            <a:off x="1076325" y="2238375"/>
+            <a:ext cx="4762500" cy="895350"/>
+          </a:xfrm>
+          <a:prstGeom xmlns:a="http://schemas.openxmlformats.org/drawingml/2006/main" prst="rect">
+            <a:avLst/>
+          </a:prstGeom>
+          <a:noFill xmlns:a="http://schemas.openxmlformats.org/drawingml/2006/main"/>
+          <a:ln xmlns:a="http://schemas.openxmlformats.org/drawingml/2006/main" w="0">
+            <a:noFill/>
+            <a:prstDash val="solid"/>
+          </a:ln>
+        </p:spPr>
+        <p:txBody>
+          <a:bodyPr xmlns:a="http://schemas.openxmlformats.org/drawingml/2006/main" anchor="t">
+            <a:normAutofit fontScale="100000"/>
+          </a:bodyPr>
+          <a:lstStyle xmlns:a="http://schemas.openxmlformats.org/drawingml/2006/main"/>
+          <a:p xmlns:a="http://schemas.openxmlformats.org/drawingml/2006/main">
+            <a:pPr algn="l">
+              <a:defRPr sz="1575" b="1">
+                <a:solidFill>
+                  <a:srgbClr val="111111"/>
+                </a:solidFill>
+                <a:latin typeface="Helvetica Neue"/>
+                <a:ea typeface="Helvetica Neue"/>
+                <a:cs typeface="Helvetica Neue"/>
+              </a:defRPr>
+            </a:pPr>
+            <a:r>
+              <a:rPr sz="1575" b="1">
+                <a:solidFill>
+                  <a:srgbClr val="111111"/>
+                </a:solidFill>
+                <a:latin typeface="Helvetica Neue"/>
+                <a:ea typeface="Helvetica Neue"/>
+                <a:cs typeface="Helvetica Neue"/>
+              </a:rPr>
+              <a:t>What distinguishes a workflow from an agent?</a:t>
+            </a:r>
+          </a:p>
+        </p:txBody>
+      </p:sp>
+      <p:sp>
+        <p:nvSpPr>
+          <p:cNvPr id="8" name="exam-number-2">
+            <a:extLst xmlns:a="http://schemas.openxmlformats.org/drawingml/2006/main">
+              <a:ext uri="{FF2B5EF4-FFF2-40B4-BE49-F238E27FC236}">
+                <a16:creationId xmlns:a16="http://schemas.microsoft.com/office/drawing/2014/main" id="{046B81CD-7026-41E8-92E3-F7E245292091}"/>
+              </a:ext>
+            </a:extLst>
+          </p:cNvPr>
+          <p:cNvSpPr>
+            <a:spLocks xmlns:a="http://schemas.openxmlformats.org/drawingml/2006/main" noGrp="1"/>
+          </p:cNvSpPr>
+          <p:nvPr/>
+        </p:nvSpPr>
+        <p:spPr>
+          <a:xfrm xmlns:a="http://schemas.openxmlformats.org/drawingml/2006/main">
+            <a:off x="6191250" y="2238375"/>
+            <a:ext cx="590550" cy="400050"/>
+          </a:xfrm>
+          <a:prstGeom xmlns:a="http://schemas.openxmlformats.org/drawingml/2006/main" prst="rect">
+            <a:avLst/>
+          </a:prstGeom>
+          <a:noFill xmlns:a="http://schemas.openxmlformats.org/drawingml/2006/main"/>
+          <a:ln xmlns:a="http://schemas.openxmlformats.org/drawingml/2006/main" w="0">
+            <a:noFill/>
+            <a:prstDash val="solid"/>
+          </a:ln>
+        </p:spPr>
+        <p:txBody>
+          <a:bodyPr xmlns:a="http://schemas.openxmlformats.org/drawingml/2006/main" anchor="t">
+            <a:noAutofit/>
+          </a:bodyPr>
+          <a:lstStyle xmlns:a="http://schemas.openxmlformats.org/drawingml/2006/main"/>
+          <a:p xmlns:a="http://schemas.openxmlformats.org/drawingml/2006/main">
+            <a:pPr algn="l">
+              <a:defRPr sz="1725" b="1">
+                <a:solidFill>
+                  <a:srgbClr val="73C8FF"/>
+                </a:solidFill>
+                <a:latin typeface="Helvetica Neue"/>
+                <a:ea typeface="Helvetica Neue"/>
+                <a:cs typeface="Helvetica Neue"/>
+              </a:defRPr>
+            </a:pPr>
+            <a:r>
+              <a:rPr sz="1725" b="1">
+                <a:solidFill>
+                  <a:srgbClr val="73C8FF"/>
+                </a:solidFill>
+                <a:latin typeface="Helvetica Neue"/>
+                <a:ea typeface="Helvetica Neue"/>
+                <a:cs typeface="Helvetica Neue"/>
+              </a:rPr>
+              <a:t>02</a:t>
+            </a:r>
+          </a:p>
+        </p:txBody>
+      </p:sp>
+      <p:sp>
+        <p:nvSpPr>
+          <p:cNvPr id="9" name="exam-question-2">
+            <a:extLst xmlns:a="http://schemas.openxmlformats.org/drawingml/2006/main">
+              <a:ext uri="{FF2B5EF4-FFF2-40B4-BE49-F238E27FC236}">
+                <a16:creationId xmlns:a16="http://schemas.microsoft.com/office/drawing/2014/main" id="{EF60A7AE-1307-4FFF-AB1D-4EFA69D0E821}"/>
+              </a:ext>
+            </a:extLst>
+          </p:cNvPr>
+          <p:cNvSpPr>
+            <a:spLocks xmlns:a="http://schemas.openxmlformats.org/drawingml/2006/main" noGrp="1"/>
+          </p:cNvSpPr>
+          <p:nvPr/>
+        </p:nvSpPr>
+        <p:spPr>
+          <a:xfrm xmlns:a="http://schemas.openxmlformats.org/drawingml/2006/main">
+            <a:off x="6877050" y="2238375"/>
+            <a:ext cx="4762500" cy="895350"/>
+          </a:xfrm>
+          <a:prstGeom xmlns:a="http://schemas.openxmlformats.org/drawingml/2006/main" prst="rect">
+            <a:avLst/>
+          </a:prstGeom>
+          <a:noFill xmlns:a="http://schemas.openxmlformats.org/drawingml/2006/main"/>
+          <a:ln xmlns:a="http://schemas.openxmlformats.org/drawingml/2006/main" w="0">
+            <a:noFill/>
+            <a:prstDash val="solid"/>
+          </a:ln>
+        </p:spPr>
+        <p:txBody>
+          <a:bodyPr xmlns:a="http://schemas.openxmlformats.org/drawingml/2006/main" anchor="t">
+            <a:normAutofit fontScale="100000"/>
+          </a:bodyPr>
+          <a:lstStyle xmlns:a="http://schemas.openxmlformats.org/drawingml/2006/main"/>
+          <a:p xmlns:a="http://schemas.openxmlformats.org/drawingml/2006/main">
+            <a:pPr algn="l">
+              <a:defRPr sz="1575" b="1">
+                <a:solidFill>
+                  <a:srgbClr val="111111"/>
+                </a:solidFill>
+                <a:latin typeface="Helvetica Neue"/>
+                <a:ea typeface="Helvetica Neue"/>
+                <a:cs typeface="Helvetica Neue"/>
+              </a:defRPr>
+            </a:pPr>
+            <a:r>
+              <a:rPr sz="1575" b="1">
+                <a:solidFill>
+                  <a:srgbClr val="111111"/>
+                </a:solidFill>
+                <a:latin typeface="Helvetica Neue"/>
+                <a:ea typeface="Helvetica Neue"/>
+                <a:cs typeface="Helvetica Neue"/>
+              </a:rPr>
+              <a:t>Compare prompt chaining and orchestrator-workers.</a:t>
+            </a:r>
+          </a:p>
+        </p:txBody>
+      </p:sp>
+      <p:sp>
+        <p:nvSpPr>
+          <p:cNvPr id="10" name="exam-number-3">
+            <a:extLst xmlns:a="http://schemas.openxmlformats.org/drawingml/2006/main">
+              <a:ext uri="{FF2B5EF4-FFF2-40B4-BE49-F238E27FC236}">
+                <a16:creationId xmlns:a16="http://schemas.microsoft.com/office/drawing/2014/main" id="{368B24D7-8A78-47B5-8C47-172805B95E9D}"/>
+              </a:ext>
+            </a:extLst>
+          </p:cNvPr>
+          <p:cNvSpPr>
+            <a:spLocks xmlns:a="http://schemas.openxmlformats.org/drawingml/2006/main" noGrp="1"/>
+          </p:cNvSpPr>
+          <p:nvPr/>
+        </p:nvSpPr>
+        <p:spPr>
+          <a:xfrm xmlns:a="http://schemas.openxmlformats.org/drawingml/2006/main">
+            <a:off x="390525" y="3495675"/>
+            <a:ext cx="590550" cy="400050"/>
+          </a:xfrm>
+          <a:prstGeom xmlns:a="http://schemas.openxmlformats.org/drawingml/2006/main" prst="rect">
+            <a:avLst/>
+          </a:prstGeom>
+          <a:noFill xmlns:a="http://schemas.openxmlformats.org/drawingml/2006/main"/>
+          <a:ln xmlns:a="http://schemas.openxmlformats.org/drawingml/2006/main" w="0">
+            <a:noFill/>
+            <a:prstDash val="solid"/>
+          </a:ln>
+        </p:spPr>
+        <p:txBody>
+          <a:bodyPr xmlns:a="http://schemas.openxmlformats.org/drawingml/2006/main" anchor="t">
+            <a:noAutofit/>
+          </a:bodyPr>
+          <a:lstStyle xmlns:a="http://schemas.openxmlformats.org/drawingml/2006/main"/>
+          <a:p xmlns:a="http://schemas.openxmlformats.org/drawingml/2006/main">
+            <a:pPr algn="l">
+              <a:defRPr sz="1725" b="1">
+                <a:solidFill>
+                  <a:srgbClr val="73C8FF"/>
+                </a:solidFill>
+                <a:latin typeface="Helvetica Neue"/>
+                <a:ea typeface="Helvetica Neue"/>
+                <a:cs typeface="Helvetica Neue"/>
+              </a:defRPr>
+            </a:pPr>
+            <a:r>
+              <a:rPr sz="1725" b="1">
+                <a:solidFill>
+                  <a:srgbClr val="73C8FF"/>
+                </a:solidFill>
+                <a:latin typeface="Helvetica Neue"/>
+                <a:ea typeface="Helvetica Neue"/>
+                <a:cs typeface="Helvetica Neue"/>
+              </a:rPr>
+              <a:t>03</a:t>
+            </a:r>
+          </a:p>
+        </p:txBody>
+      </p:sp>
+      <p:sp>
+        <p:nvSpPr>
+          <p:cNvPr id="11" name="exam-question-3">
+            <a:extLst xmlns:a="http://schemas.openxmlformats.org/drawingml/2006/main">
+              <a:ext uri="{FF2B5EF4-FFF2-40B4-BE49-F238E27FC236}">
+                <a16:creationId xmlns:a16="http://schemas.microsoft.com/office/drawing/2014/main" id="{C84D6535-7830-4ACF-8FAB-B9EF90B515AD}"/>
+              </a:ext>
+            </a:extLst>
+          </p:cNvPr>
+          <p:cNvSpPr>
+            <a:spLocks xmlns:a="http://schemas.openxmlformats.org/drawingml/2006/main" noGrp="1"/>
+          </p:cNvSpPr>
+          <p:nvPr/>
+        </p:nvSpPr>
+        <p:spPr>
+          <a:xfrm xmlns:a="http://schemas.openxmlformats.org/drawingml/2006/main">
+            <a:off x="1076325" y="3495675"/>
+            <a:ext cx="4762500" cy="895350"/>
+          </a:xfrm>
+          <a:prstGeom xmlns:a="http://schemas.openxmlformats.org/drawingml/2006/main" prst="rect">
+            <a:avLst/>
+          </a:prstGeom>
+          <a:noFill xmlns:a="http://schemas.openxmlformats.org/drawingml/2006/main"/>
+          <a:ln xmlns:a="http://schemas.openxmlformats.org/drawingml/2006/main" w="0">
+            <a:noFill/>
+            <a:prstDash val="solid"/>
+          </a:ln>
+        </p:spPr>
+        <p:txBody>
+          <a:bodyPr xmlns:a="http://schemas.openxmlformats.org/drawingml/2006/main" anchor="t">
+            <a:normAutofit fontScale="100000"/>
+          </a:bodyPr>
+          <a:lstStyle xmlns:a="http://schemas.openxmlformats.org/drawingml/2006/main"/>
+          <a:p xmlns:a="http://schemas.openxmlformats.org/drawingml/2006/main">
+            <a:pPr algn="l">
+              <a:defRPr sz="1575" b="1">
+                <a:solidFill>
+                  <a:srgbClr val="111111"/>
+                </a:solidFill>
+                <a:latin typeface="Helvetica Neue"/>
+                <a:ea typeface="Helvetica Neue"/>
+                <a:cs typeface="Helvetica Neue"/>
+              </a:defRPr>
+            </a:pPr>
+            <a:r>
+              <a:rPr sz="1575" b="1">
+                <a:solidFill>
+                  <a:srgbClr val="111111"/>
+                </a:solidFill>
+                <a:latin typeface="Helvetica Neue"/>
+                <a:ea typeface="Helvetica Neue"/>
+                <a:cs typeface="Helvetica Neue"/>
+              </a:rPr>
+              <a:t>Name the two forms of parallelization and their goals.</a:t>
+            </a:r>
+          </a:p>
+        </p:txBody>
+      </p:sp>
+      <p:sp>
+        <p:nvSpPr>
+          <p:cNvPr id="12" name="exam-number-4">
+            <a:extLst xmlns:a="http://schemas.openxmlformats.org/drawingml/2006/main">
+              <a:ext uri="{FF2B5EF4-FFF2-40B4-BE49-F238E27FC236}">
+                <a16:creationId xmlns:a16="http://schemas.microsoft.com/office/drawing/2014/main" id="{B3038D21-FACF-4B96-B1C0-D8C6F889EAA4}"/>
+              </a:ext>
+            </a:extLst>
+          </p:cNvPr>
+          <p:cNvSpPr>
+            <a:spLocks xmlns:a="http://schemas.openxmlformats.org/drawingml/2006/main" noGrp="1"/>
+          </p:cNvSpPr>
+          <p:nvPr/>
+        </p:nvSpPr>
+        <p:spPr>
+          <a:xfrm xmlns:a="http://schemas.openxmlformats.org/drawingml/2006/main">
+            <a:off x="6191250" y="3495675"/>
+            <a:ext cx="590550" cy="400050"/>
+          </a:xfrm>
+          <a:prstGeom xmlns:a="http://schemas.openxmlformats.org/drawingml/2006/main" prst="rect">
+            <a:avLst/>
+          </a:prstGeom>
+          <a:noFill xmlns:a="http://schemas.openxmlformats.org/drawingml/2006/main"/>
+          <a:ln xmlns:a="http://schemas.openxmlformats.org/drawingml/2006/main" w="0">
+            <a:noFill/>
+            <a:prstDash val="solid"/>
+          </a:ln>
+        </p:spPr>
+        <p:txBody>
+          <a:bodyPr xmlns:a="http://schemas.openxmlformats.org/drawingml/2006/main" anchor="t">
+            <a:noAutofit/>
+          </a:bodyPr>
+          <a:lstStyle xmlns:a="http://schemas.openxmlformats.org/drawingml/2006/main"/>
+          <a:p xmlns:a="http://schemas.openxmlformats.org/drawingml/2006/main">
+            <a:pPr algn="l">
+              <a:defRPr sz="1725" b="1">
+                <a:solidFill>
+                  <a:srgbClr val="73C8FF"/>
+                </a:solidFill>
+                <a:latin typeface="Helvetica Neue"/>
+                <a:ea typeface="Helvetica Neue"/>
+                <a:cs typeface="Helvetica Neue"/>
+              </a:defRPr>
+            </a:pPr>
+            <a:r>
+              <a:rPr sz="1725" b="1">
+                <a:solidFill>
+                  <a:srgbClr val="73C8FF"/>
+                </a:solidFill>
+                <a:latin typeface="Helvetica Neue"/>
+                <a:ea typeface="Helvetica Neue"/>
+                <a:cs typeface="Helvetica Neue"/>
+              </a:rPr>
+              <a:t>04</a:t>
+            </a:r>
+          </a:p>
+        </p:txBody>
+      </p:sp>
+      <p:sp>
+        <p:nvSpPr>
+          <p:cNvPr id="13" name="exam-question-4">
+            <a:extLst xmlns:a="http://schemas.openxmlformats.org/drawingml/2006/main">
+              <a:ext uri="{FF2B5EF4-FFF2-40B4-BE49-F238E27FC236}">
+                <a16:creationId xmlns:a16="http://schemas.microsoft.com/office/drawing/2014/main" id="{C8C78931-DE66-407D-8590-CFC558F963BE}"/>
+              </a:ext>
+            </a:extLst>
+          </p:cNvPr>
+          <p:cNvSpPr>
+            <a:spLocks xmlns:a="http://schemas.openxmlformats.org/drawingml/2006/main" noGrp="1"/>
+          </p:cNvSpPr>
+          <p:nvPr/>
+        </p:nvSpPr>
+        <p:spPr>
+          <a:xfrm xmlns:a="http://schemas.openxmlformats.org/drawingml/2006/main">
+            <a:off x="6877050" y="3495675"/>
+            <a:ext cx="4762500" cy="895350"/>
+          </a:xfrm>
+          <a:prstGeom xmlns:a="http://schemas.openxmlformats.org/drawingml/2006/main" prst="rect">
+            <a:avLst/>
+          </a:prstGeom>
+          <a:noFill xmlns:a="http://schemas.openxmlformats.org/drawingml/2006/main"/>
+          <a:ln xmlns:a="http://schemas.openxmlformats.org/drawingml/2006/main" w="0">
+            <a:noFill/>
+            <a:prstDash val="solid"/>
+          </a:ln>
+        </p:spPr>
+        <p:txBody>
+          <a:bodyPr xmlns:a="http://schemas.openxmlformats.org/drawingml/2006/main" anchor="t">
+            <a:normAutofit fontScale="100000"/>
+          </a:bodyPr>
+          <a:lstStyle xmlns:a="http://schemas.openxmlformats.org/drawingml/2006/main"/>
+          <a:p xmlns:a="http://schemas.openxmlformats.org/drawingml/2006/main">
+            <a:pPr algn="l">
+              <a:defRPr sz="1575" b="1">
+                <a:solidFill>
+                  <a:srgbClr val="111111"/>
+                </a:solidFill>
+                <a:latin typeface="Helvetica Neue"/>
+                <a:ea typeface="Helvetica Neue"/>
+                <a:cs typeface="Helvetica Neue"/>
+              </a:defRPr>
+            </a:pPr>
+            <a:r>
+              <a:rPr sz="1575" b="1">
+                <a:solidFill>
+                  <a:srgbClr val="111111"/>
+                </a:solidFill>
+                <a:latin typeface="Helvetica Neue"/>
+                <a:ea typeface="Helvetica Neue"/>
+                <a:cs typeface="Helvetica Neue"/>
+              </a:rPr>
+              <a:t>Why do evaluator-optimizer loops need verifiable criteria?</a:t>
+            </a:r>
+          </a:p>
+        </p:txBody>
+      </p:sp>
+      <p:sp>
+        <p:nvSpPr>
+          <p:cNvPr id="14" name="exam-number-5">
+            <a:extLst xmlns:a="http://schemas.openxmlformats.org/drawingml/2006/main">
+              <a:ext uri="{FF2B5EF4-FFF2-40B4-BE49-F238E27FC236}">
+                <a16:creationId xmlns:a16="http://schemas.microsoft.com/office/drawing/2014/main" id="{6CFE32D4-A0EA-4E9F-A179-3F063507782A}"/>
+              </a:ext>
+            </a:extLst>
+          </p:cNvPr>
+          <p:cNvSpPr>
+            <a:spLocks xmlns:a="http://schemas.openxmlformats.org/drawingml/2006/main" noGrp="1"/>
+          </p:cNvSpPr>
+          <p:nvPr/>
+        </p:nvSpPr>
+        <p:spPr>
+          <a:xfrm xmlns:a="http://schemas.openxmlformats.org/drawingml/2006/main">
+            <a:off x="390525" y="4752975"/>
+            <a:ext cx="590550" cy="400050"/>
+          </a:xfrm>
+          <a:prstGeom xmlns:a="http://schemas.openxmlformats.org/drawingml/2006/main" prst="rect">
+            <a:avLst/>
+          </a:prstGeom>
+          <a:noFill xmlns:a="http://schemas.openxmlformats.org/drawingml/2006/main"/>
+          <a:ln xmlns:a="http://schemas.openxmlformats.org/drawingml/2006/main" w="0">
+            <a:noFill/>
+            <a:prstDash val="solid"/>
+          </a:ln>
+        </p:spPr>
+        <p:txBody>
+          <a:bodyPr xmlns:a="http://schemas.openxmlformats.org/drawingml/2006/main" anchor="t">
+            <a:noAutofit/>
+          </a:bodyPr>
+          <a:lstStyle xmlns:a="http://schemas.openxmlformats.org/drawingml/2006/main"/>
+          <a:p xmlns:a="http://schemas.openxmlformats.org/drawingml/2006/main">
+            <a:pPr algn="l">
+              <a:defRPr sz="1725" b="1">
+                <a:solidFill>
+                  <a:srgbClr val="73C8FF"/>
+                </a:solidFill>
+                <a:latin typeface="Helvetica Neue"/>
+                <a:ea typeface="Helvetica Neue"/>
+                <a:cs typeface="Helvetica Neue"/>
+              </a:defRPr>
+            </a:pPr>
+            <a:r>
+              <a:rPr sz="1725" b="1">
+                <a:solidFill>
+                  <a:srgbClr val="73C8FF"/>
+                </a:solidFill>
+                <a:latin typeface="Helvetica Neue"/>
+                <a:ea typeface="Helvetica Neue"/>
+                <a:cs typeface="Helvetica Neue"/>
+              </a:rPr>
+              <a:t>05</a:t>
+            </a:r>
+          </a:p>
+        </p:txBody>
+      </p:sp>
+      <p:sp>
+        <p:nvSpPr>
+          <p:cNvPr id="15" name="exam-question-5">
+            <a:extLst xmlns:a="http://schemas.openxmlformats.org/drawingml/2006/main">
+              <a:ext uri="{FF2B5EF4-FFF2-40B4-BE49-F238E27FC236}">
+                <a16:creationId xmlns:a16="http://schemas.microsoft.com/office/drawing/2014/main" id="{7988A6A2-566B-4DBD-BB53-748D49AC7903}"/>
+              </a:ext>
+            </a:extLst>
+          </p:cNvPr>
+          <p:cNvSpPr>
+            <a:spLocks xmlns:a="http://schemas.openxmlformats.org/drawingml/2006/main" noGrp="1"/>
+          </p:cNvSpPr>
+          <p:nvPr/>
+        </p:nvSpPr>
+        <p:spPr>
+          <a:xfrm xmlns:a="http://schemas.openxmlformats.org/drawingml/2006/main">
+            <a:off x="1076325" y="4752975"/>
+            <a:ext cx="4762500" cy="895350"/>
+          </a:xfrm>
+          <a:prstGeom xmlns:a="http://schemas.openxmlformats.org/drawingml/2006/main" prst="rect">
+            <a:avLst/>
+          </a:prstGeom>
+          <a:noFill xmlns:a="http://schemas.openxmlformats.org/drawingml/2006/main"/>
+          <a:ln xmlns:a="http://schemas.openxmlformats.org/drawingml/2006/main" w="0">
+            <a:noFill/>
+            <a:prstDash val="solid"/>
+          </a:ln>
+        </p:spPr>
+        <p:txBody>
+          <a:bodyPr xmlns:a="http://schemas.openxmlformats.org/drawingml/2006/main" anchor="t">
+            <a:normAutofit fontScale="100000"/>
+          </a:bodyPr>
+          <a:lstStyle xmlns:a="http://schemas.openxmlformats.org/drawingml/2006/main"/>
+          <a:p xmlns:a="http://schemas.openxmlformats.org/drawingml/2006/main">
+            <a:pPr algn="l">
+              <a:defRPr sz="1575" b="1">
+                <a:solidFill>
+                  <a:srgbClr val="111111"/>
+                </a:solidFill>
+                <a:latin typeface="Helvetica Neue"/>
+                <a:ea typeface="Helvetica Neue"/>
+                <a:cs typeface="Helvetica Neue"/>
+              </a:defRPr>
+            </a:pPr>
+            <a:r>
+              <a:rPr sz="1575" b="1">
+                <a:solidFill>
+                  <a:srgbClr val="111111"/>
+                </a:solidFill>
+                <a:latin typeface="Helvetica Neue"/>
+                <a:ea typeface="Helvetica Neue"/>
+                <a:cs typeface="Helvetica Neue"/>
+              </a:rPr>
+              <a:t>Give a valid composition of three patterns.</a:t>
+            </a:r>
+          </a:p>
+        </p:txBody>
+      </p:sp>
+      <p:sp>
+        <p:nvSpPr>
+          <p:cNvPr id="16" name="exam-number-6">
+            <a:extLst xmlns:a="http://schemas.openxmlformats.org/drawingml/2006/main">
+              <a:ext uri="{FF2B5EF4-FFF2-40B4-BE49-F238E27FC236}">
+                <a16:creationId xmlns:a16="http://schemas.microsoft.com/office/drawing/2014/main" id="{A3C97D4B-7212-4433-BE02-9D54B6C86045}"/>
+              </a:ext>
+            </a:extLst>
+          </p:cNvPr>
+          <p:cNvSpPr>
+            <a:spLocks xmlns:a="http://schemas.openxmlformats.org/drawingml/2006/main" noGrp="1"/>
+          </p:cNvSpPr>
+          <p:nvPr/>
+        </p:nvSpPr>
+        <p:spPr>
+          <a:xfrm xmlns:a="http://schemas.openxmlformats.org/drawingml/2006/main">
+            <a:off x="6191250" y="4752975"/>
+            <a:ext cx="590550" cy="400050"/>
+          </a:xfrm>
+          <a:prstGeom xmlns:a="http://schemas.openxmlformats.org/drawingml/2006/main" prst="rect">
+            <a:avLst/>
+          </a:prstGeom>
+          <a:noFill xmlns:a="http://schemas.openxmlformats.org/drawingml/2006/main"/>
+          <a:ln xmlns:a="http://schemas.openxmlformats.org/drawingml/2006/main" w="0">
+            <a:noFill/>
+            <a:prstDash val="solid"/>
+          </a:ln>
+        </p:spPr>
+        <p:txBody>
+          <a:bodyPr xmlns:a="http://schemas.openxmlformats.org/drawingml/2006/main" anchor="t">
+            <a:noAutofit/>
+          </a:bodyPr>
+          <a:lstStyle xmlns:a="http://schemas.openxmlformats.org/drawingml/2006/main"/>
+          <a:p xmlns:a="http://schemas.openxmlformats.org/drawingml/2006/main">
+            <a:pPr algn="l">
+              <a:defRPr sz="1725" b="1">
+                <a:solidFill>
+                  <a:srgbClr val="73C8FF"/>
+                </a:solidFill>
+                <a:latin typeface="Helvetica Neue"/>
+                <a:ea typeface="Helvetica Neue"/>
+                <a:cs typeface="Helvetica Neue"/>
+              </a:defRPr>
+            </a:pPr>
+            <a:r>
+              <a:rPr sz="1725" b="1">
+                <a:solidFill>
+                  <a:srgbClr val="73C8FF"/>
+                </a:solidFill>
+                <a:latin typeface="Helvetica Neue"/>
+                <a:ea typeface="Helvetica Neue"/>
+                <a:cs typeface="Helvetica Neue"/>
+              </a:rPr>
+              <a:t>06</a:t>
+            </a:r>
+          </a:p>
+        </p:txBody>
+      </p:sp>
+      <p:sp>
+        <p:nvSpPr>
+          <p:cNvPr id="17" name="exam-question-6">
+            <a:extLst xmlns:a="http://schemas.openxmlformats.org/drawingml/2006/main">
+              <a:ext uri="{FF2B5EF4-FFF2-40B4-BE49-F238E27FC236}">
+                <a16:creationId xmlns:a16="http://schemas.microsoft.com/office/drawing/2014/main" id="{15FB1F26-15FF-4999-B4FD-73B78EC1B1F6}"/>
+              </a:ext>
+            </a:extLst>
+          </p:cNvPr>
+          <p:cNvSpPr>
+            <a:spLocks xmlns:a="http://schemas.openxmlformats.org/drawingml/2006/main" noGrp="1"/>
+          </p:cNvSpPr>
+          <p:nvPr/>
+        </p:nvSpPr>
+        <p:spPr>
+          <a:xfrm xmlns:a="http://schemas.openxmlformats.org/drawingml/2006/main">
+            <a:off x="6877050" y="4752975"/>
+            <a:ext cx="4762500" cy="895350"/>
+          </a:xfrm>
+          <a:prstGeom xmlns:a="http://schemas.openxmlformats.org/drawingml/2006/main" prst="rect">
+            <a:avLst/>
+          </a:prstGeom>
+          <a:noFill xmlns:a="http://schemas.openxmlformats.org/drawingml/2006/main"/>
+          <a:ln xmlns:a="http://schemas.openxmlformats.org/drawingml/2006/main" w="0">
+            <a:noFill/>
+            <a:prstDash val="solid"/>
+          </a:ln>
+        </p:spPr>
+        <p:txBody>
+          <a:bodyPr xmlns:a="http://schemas.openxmlformats.org/drawingml/2006/main" anchor="t">
+            <a:normAutofit fontScale="100000"/>
+          </a:bodyPr>
+          <a:lstStyle xmlns:a="http://schemas.openxmlformats.org/drawingml/2006/main"/>
+          <a:p xmlns:a="http://schemas.openxmlformats.org/drawingml/2006/main">
+            <a:pPr algn="l">
+              <a:defRPr sz="1575" b="1">
+                <a:solidFill>
+                  <a:srgbClr val="111111"/>
+                </a:solidFill>
+                <a:latin typeface="Helvetica Neue"/>
+                <a:ea typeface="Helvetica Neue"/>
+                <a:cs typeface="Helvetica Neue"/>
+              </a:defRPr>
+            </a:pPr>
+            <a:r>
+              <a:rPr sz="1575" b="1">
+                <a:solidFill>
+                  <a:srgbClr val="111111"/>
+                </a:solidFill>
+                <a:latin typeface="Helvetica Neue"/>
+                <a:ea typeface="Helvetica Neue"/>
+                <a:cs typeface="Helvetica Neue"/>
+              </a:rPr>
+              <a:t>How can a reviewer increase cost without increasing correctness?</a:t>
+            </a:r>
+          </a:p>
+        </p:txBody>
+      </p:sp>
+    </p:spTree>
+    <p:extLst>
+      <p:ext uri="{BB962C8B-B14F-4D97-AF65-F5344CB8AC3E}">
+        <p14:creationId xmlns:p14="http://schemas.microsoft.com/office/powerpoint/2010/main" val="1139011957"/>
+      </p:ext>
+    </p:extLst>
+  </p:cSld>
+</p:sld>
+</file>
+
+<file path=ppt/slides/slide11.xml><?xml version="1.0" encoding="utf-8"?>
 <p:sld xmlns:p="http://schemas.openxmlformats.org/presentationml/2006/main">
   <p:cSld>
     <p:bg>
@@ -2258,7 +3900,7 @@
           <p:cNvPr id="14" name="accent-line">
             <a:extLst xmlns:a="http://schemas.openxmlformats.org/drawingml/2006/main">
               <a:ext uri="{FF2B5EF4-FFF2-40B4-BE49-F238E27FC236}">
-                <a16:creationId xmlns:a16="http://schemas.microsoft.com/office/drawing/2014/main" id="{0323C88B-8CBA-46FB-8AE1-7060582444F3}"/>
+                <a16:creationId xmlns:a16="http://schemas.microsoft.com/office/drawing/2014/main" id="{49CB37A9-764E-4A18-9290-2A423032615A}"/>
               </a:ext>
             </a:extLst>
           </p:cNvPr>
@@ -2291,7 +3933,7 @@
           <p:cNvPr id="2" name="chapter-label">
             <a:extLst xmlns:a="http://schemas.openxmlformats.org/drawingml/2006/main">
               <a:ext uri="{FF2B5EF4-FFF2-40B4-BE49-F238E27FC236}">
-                <a16:creationId xmlns:a16="http://schemas.microsoft.com/office/drawing/2014/main" id="{1CA176A2-4636-4317-A01F-735BCD748A49}"/>
+                <a16:creationId xmlns:a16="http://schemas.microsoft.com/office/drawing/2014/main" id="{4BE6DD87-A96E-4F3B-86FC-B300F12A4912}"/>
               </a:ext>
             </a:extLst>
           </p:cNvPr>
@@ -2349,7 +3991,7 @@
           <p:cNvPr id="3" name="slide-number">
             <a:extLst xmlns:a="http://schemas.openxmlformats.org/drawingml/2006/main">
               <a:ext uri="{FF2B5EF4-FFF2-40B4-BE49-F238E27FC236}">
-                <a16:creationId xmlns:a16="http://schemas.microsoft.com/office/drawing/2014/main" id="{DCF47171-5116-45B0-B469-6D87FAC3CA79}"/>
+                <a16:creationId xmlns:a16="http://schemas.microsoft.com/office/drawing/2014/main" id="{E0ED83D5-77C9-45BF-843A-770BB3222867}"/>
               </a:ext>
             </a:extLst>
           </p:cNvPr>
@@ -2397,7 +4039,7 @@
                 <a:ea typeface="Helvetica Neue"/>
                 <a:cs typeface="Helvetica Neue"/>
               </a:rPr>
-              <a:t>10</a:t>
+              <a:t>11</a:t>
             </a:r>
           </a:p>
         </p:txBody>
@@ -2407,7 +4049,7 @@
           <p:cNvPr id="4" name="chapter-footer">
             <a:extLst xmlns:a="http://schemas.openxmlformats.org/drawingml/2006/main">
               <a:ext uri="{FF2B5EF4-FFF2-40B4-BE49-F238E27FC236}">
-                <a16:creationId xmlns:a16="http://schemas.microsoft.com/office/drawing/2014/main" id="{A7022AE1-A77E-45C0-9046-C22B7D1F33B1}"/>
+                <a16:creationId xmlns:a16="http://schemas.microsoft.com/office/drawing/2014/main" id="{BD38329F-6D14-4A5B-9E34-40AA2FEE2B38}"/>
               </a:ext>
             </a:extLst>
           </p:cNvPr>
@@ -2465,7 +4107,7 @@
           <p:cNvPr id="5" name="closing-title">
             <a:extLst xmlns:a="http://schemas.openxmlformats.org/drawingml/2006/main">
               <a:ext uri="{FF2B5EF4-FFF2-40B4-BE49-F238E27FC236}">
-                <a16:creationId xmlns:a16="http://schemas.microsoft.com/office/drawing/2014/main" id="{F23E8C66-DE39-4871-880A-D23E90C3607C}"/>
+                <a16:creationId xmlns:a16="http://schemas.microsoft.com/office/drawing/2014/main" id="{B11AC055-B0C2-490E-BDCA-0B0A1CCF6B52}"/>
               </a:ext>
             </a:extLst>
           </p:cNvPr>
@@ -2523,7 +4165,7 @@
           <p:cNvPr id="6" name="takeaway-number-1">
             <a:extLst xmlns:a="http://schemas.openxmlformats.org/drawingml/2006/main">
               <a:ext uri="{FF2B5EF4-FFF2-40B4-BE49-F238E27FC236}">
-                <a16:creationId xmlns:a16="http://schemas.microsoft.com/office/drawing/2014/main" id="{F449F09D-FC70-4695-A9EF-91FA42C70428}"/>
+                <a16:creationId xmlns:a16="http://schemas.microsoft.com/office/drawing/2014/main" id="{4520E21D-CE9D-4077-9465-D6729CC93E2D}"/>
               </a:ext>
             </a:extLst>
           </p:cNvPr>
@@ -2581,7 +4223,7 @@
           <p:cNvPr id="7" name="takeaway-1">
             <a:extLst xmlns:a="http://schemas.openxmlformats.org/drawingml/2006/main">
               <a:ext uri="{FF2B5EF4-FFF2-40B4-BE49-F238E27FC236}">
-                <a16:creationId xmlns:a16="http://schemas.microsoft.com/office/drawing/2014/main" id="{ADD2E2F9-D400-4DB4-9EC2-4D853E66BE4C}"/>
+                <a16:creationId xmlns:a16="http://schemas.microsoft.com/office/drawing/2014/main" id="{62E4F6E1-6D54-4169-9C52-559589088620}"/>
               </a:ext>
             </a:extLst>
           </p:cNvPr>
@@ -2639,7 +4281,7 @@
           <p:cNvPr id="8" name="takeaway-number-2">
             <a:extLst xmlns:a="http://schemas.openxmlformats.org/drawingml/2006/main">
               <a:ext uri="{FF2B5EF4-FFF2-40B4-BE49-F238E27FC236}">
-                <a16:creationId xmlns:a16="http://schemas.microsoft.com/office/drawing/2014/main" id="{25C7656E-B5A6-40DB-8A31-B5BB75B1C934}"/>
+                <a16:creationId xmlns:a16="http://schemas.microsoft.com/office/drawing/2014/main" id="{6029581E-84FC-4585-8771-7DA76A7DF8CF}"/>
               </a:ext>
             </a:extLst>
           </p:cNvPr>
@@ -2697,7 +4339,7 @@
           <p:cNvPr id="9" name="takeaway-2">
             <a:extLst xmlns:a="http://schemas.openxmlformats.org/drawingml/2006/main">
               <a:ext uri="{FF2B5EF4-FFF2-40B4-BE49-F238E27FC236}">
-                <a16:creationId xmlns:a16="http://schemas.microsoft.com/office/drawing/2014/main" id="{7B9A4CD6-5DB5-4DEA-9732-36223250D4A8}"/>
+                <a16:creationId xmlns:a16="http://schemas.microsoft.com/office/drawing/2014/main" id="{3A3CFFF7-DDE5-4896-ADFB-689912E65662}"/>
               </a:ext>
             </a:extLst>
           </p:cNvPr>
@@ -2755,7 +4397,7 @@
           <p:cNvPr id="10" name="takeaway-number-3">
             <a:extLst xmlns:a="http://schemas.openxmlformats.org/drawingml/2006/main">
               <a:ext uri="{FF2B5EF4-FFF2-40B4-BE49-F238E27FC236}">
-                <a16:creationId xmlns:a16="http://schemas.microsoft.com/office/drawing/2014/main" id="{18BB25C9-5927-4606-8CF0-242127A59463}"/>
+                <a16:creationId xmlns:a16="http://schemas.microsoft.com/office/drawing/2014/main" id="{89CE94B7-0685-4135-8A14-CEBC0107EF85}"/>
               </a:ext>
             </a:extLst>
           </p:cNvPr>
@@ -2813,7 +4455,7 @@
           <p:cNvPr id="11" name="takeaway-3">
             <a:extLst xmlns:a="http://schemas.openxmlformats.org/drawingml/2006/main">
               <a:ext uri="{FF2B5EF4-FFF2-40B4-BE49-F238E27FC236}">
-                <a16:creationId xmlns:a16="http://schemas.microsoft.com/office/drawing/2014/main" id="{1D9D95A4-7FA3-4E58-A020-82B5CAECA52A}"/>
+                <a16:creationId xmlns:a16="http://schemas.microsoft.com/office/drawing/2014/main" id="{D36FEBA3-B7E1-428C-844D-4308FB5A66E3}"/>
               </a:ext>
             </a:extLst>
           </p:cNvPr>
@@ -2871,7 +4513,7 @@
           <p:cNvPr id="12" name="takeaway-number-4">
             <a:extLst xmlns:a="http://schemas.openxmlformats.org/drawingml/2006/main">
               <a:ext uri="{FF2B5EF4-FFF2-40B4-BE49-F238E27FC236}">
-                <a16:creationId xmlns:a16="http://schemas.microsoft.com/office/drawing/2014/main" id="{9F709598-0321-4F3E-90B9-BF319B45101B}"/>
+                <a16:creationId xmlns:a16="http://schemas.microsoft.com/office/drawing/2014/main" id="{4B05473C-C588-4A8E-91DB-0F38BB4F5AC4}"/>
               </a:ext>
             </a:extLst>
           </p:cNvPr>
@@ -2929,7 +4571,7 @@
           <p:cNvPr id="13" name="takeaway-4">
             <a:extLst xmlns:a="http://schemas.openxmlformats.org/drawingml/2006/main">
               <a:ext uri="{FF2B5EF4-FFF2-40B4-BE49-F238E27FC236}">
-                <a16:creationId xmlns:a16="http://schemas.microsoft.com/office/drawing/2014/main" id="{10E35E6F-A3F2-4B09-B2B9-2676574393E5}"/>
+                <a16:creationId xmlns:a16="http://schemas.microsoft.com/office/drawing/2014/main" id="{775700BA-DE74-4019-953F-B935EAE2C488}"/>
               </a:ext>
             </a:extLst>
           </p:cNvPr>
@@ -2985,7 +4627,533 @@
     </p:spTree>
     <p:extLst>
       <p:ext uri="{BB962C8B-B14F-4D97-AF65-F5344CB8AC3E}">
-        <p14:creationId xmlns:p14="http://schemas.microsoft.com/office/powerpoint/2010/main" val="2115996641"/>
+        <p14:creationId xmlns:p14="http://schemas.microsoft.com/office/powerpoint/2010/main" val="1122246452"/>
+      </p:ext>
+    </p:extLst>
+  </p:cSld>
+</p:sld>
+</file>
+
+<file path=ppt/slides/slide12.xml><?xml version="1.0" encoding="utf-8"?>
+<p:sld xmlns:p="http://schemas.openxmlformats.org/presentationml/2006/main">
+  <p:cSld>
+    <p:bg>
+      <p:bgPr>
+        <a:solidFill xmlns:a="http://schemas.openxmlformats.org/drawingml/2006/main">
+          <a:srgbClr val="FFFFFF"/>
+        </a:solidFill>
+      </p:bgPr>
+    </p:bg>
+    <p:spTree>
+      <p:nvGrpSpPr>
+        <p:cNvPr id="1" name=""/>
+        <p:cNvGrpSpPr/>
+        <p:nvPr/>
+      </p:nvGrpSpPr>
+      <p:grpSpPr>
+        <a:xfrm xmlns:a="http://schemas.openxmlformats.org/drawingml/2006/main"/>
+      </p:grpSpPr>
+      <p:sp>
+        <p:nvSpPr>
+          <p:cNvPr id="10" name="accent-line">
+            <a:extLst xmlns:a="http://schemas.openxmlformats.org/drawingml/2006/main">
+              <a:ext uri="{FF2B5EF4-FFF2-40B4-BE49-F238E27FC236}">
+                <a16:creationId xmlns:a16="http://schemas.microsoft.com/office/drawing/2014/main" id="{86E3BA6D-05C5-42C6-B297-7C17A54D9C42}"/>
+              </a:ext>
+            </a:extLst>
+          </p:cNvPr>
+          <p:cNvSpPr>
+            <a:spLocks xmlns:a="http://schemas.openxmlformats.org/drawingml/2006/main" noGrp="1"/>
+          </p:cNvSpPr>
+          <p:nvPr/>
+        </p:nvSpPr>
+        <p:spPr>
+          <a:xfrm xmlns:a="http://schemas.openxmlformats.org/drawingml/2006/main">
+            <a:off x="390525" y="304800"/>
+            <a:ext cx="11410950" cy="66675"/>
+          </a:xfrm>
+          <a:prstGeom xmlns:a="http://schemas.openxmlformats.org/drawingml/2006/main" prst="rect">
+            <a:avLst/>
+          </a:prstGeom>
+          <a:solidFill xmlns:a="http://schemas.openxmlformats.org/drawingml/2006/main">
+            <a:srgbClr val="73C8FF"/>
+          </a:solidFill>
+          <a:ln xmlns:a="http://schemas.openxmlformats.org/drawingml/2006/main" w="0">
+            <a:solidFill>
+              <a:srgbClr val="73C8FF"/>
+            </a:solidFill>
+            <a:prstDash val="solid"/>
+          </a:ln>
+        </p:spPr>
+      </p:sp>
+      <p:sp>
+        <p:nvSpPr>
+          <p:cNvPr id="2" name="chapter-label">
+            <a:extLst xmlns:a="http://schemas.openxmlformats.org/drawingml/2006/main">
+              <a:ext uri="{FF2B5EF4-FFF2-40B4-BE49-F238E27FC236}">
+                <a16:creationId xmlns:a16="http://schemas.microsoft.com/office/drawing/2014/main" id="{B95F3CB1-FCD4-43AE-A909-73482F2E9143}"/>
+              </a:ext>
+            </a:extLst>
+          </p:cNvPr>
+          <p:cNvSpPr>
+            <a:spLocks xmlns:a="http://schemas.openxmlformats.org/drawingml/2006/main" noGrp="1"/>
+          </p:cNvSpPr>
+          <p:nvPr/>
+        </p:nvSpPr>
+        <p:spPr>
+          <a:xfrm xmlns:a="http://schemas.openxmlformats.org/drawingml/2006/main">
+            <a:off x="390525" y="466725"/>
+            <a:ext cx="4953000" cy="323850"/>
+          </a:xfrm>
+          <a:prstGeom xmlns:a="http://schemas.openxmlformats.org/drawingml/2006/main" prst="rect">
+            <a:avLst/>
+          </a:prstGeom>
+          <a:noFill xmlns:a="http://schemas.openxmlformats.org/drawingml/2006/main"/>
+          <a:ln xmlns:a="http://schemas.openxmlformats.org/drawingml/2006/main" w="0">
+            <a:noFill/>
+            <a:prstDash val="solid"/>
+          </a:ln>
+        </p:spPr>
+        <p:txBody>
+          <a:bodyPr xmlns:a="http://schemas.openxmlformats.org/drawingml/2006/main" anchor="t">
+            <a:noAutofit/>
+          </a:bodyPr>
+          <a:lstStyle xmlns:a="http://schemas.openxmlformats.org/drawingml/2006/main"/>
+          <a:p xmlns:a="http://schemas.openxmlformats.org/drawingml/2006/main">
+            <a:pPr algn="l">
+              <a:defRPr sz="1275" b="1">
+                <a:solidFill>
+                  <a:srgbClr val="5B5B57"/>
+                </a:solidFill>
+                <a:latin typeface="Helvetica Neue"/>
+                <a:ea typeface="Helvetica Neue"/>
+                <a:cs typeface="Helvetica Neue"/>
+              </a:defRPr>
+            </a:pPr>
+            <a:r>
+              <a:rPr sz="1275" b="1">
+                <a:solidFill>
+                  <a:srgbClr val="5B5B57"/>
+                </a:solidFill>
+                <a:latin typeface="Helvetica Neue"/>
+                <a:ea typeface="Helvetica Neue"/>
+                <a:cs typeface="Helvetica Neue"/>
+              </a:rPr>
+              <a:t>PRACTICE AND READING  /  04</a:t>
+            </a:r>
+          </a:p>
+        </p:txBody>
+      </p:sp>
+      <p:sp>
+        <p:nvSpPr>
+          <p:cNvPr id="3" name="slide-number">
+            <a:extLst xmlns:a="http://schemas.openxmlformats.org/drawingml/2006/main">
+              <a:ext uri="{FF2B5EF4-FFF2-40B4-BE49-F238E27FC236}">
+                <a16:creationId xmlns:a16="http://schemas.microsoft.com/office/drawing/2014/main" id="{96E2CC9C-8329-4A2B-BFC5-5223D46B38E5}"/>
+              </a:ext>
+            </a:extLst>
+          </p:cNvPr>
+          <p:cNvSpPr>
+            <a:spLocks xmlns:a="http://schemas.openxmlformats.org/drawingml/2006/main" noGrp="1"/>
+          </p:cNvSpPr>
+          <p:nvPr/>
+        </p:nvSpPr>
+        <p:spPr>
+          <a:xfrm xmlns:a="http://schemas.openxmlformats.org/drawingml/2006/main">
+            <a:off x="11049000" y="6286500"/>
+            <a:ext cx="742950" cy="266700"/>
+          </a:xfrm>
+          <a:prstGeom xmlns:a="http://schemas.openxmlformats.org/drawingml/2006/main" prst="rect">
+            <a:avLst/>
+          </a:prstGeom>
+          <a:noFill xmlns:a="http://schemas.openxmlformats.org/drawingml/2006/main"/>
+          <a:ln xmlns:a="http://schemas.openxmlformats.org/drawingml/2006/main" w="0">
+            <a:noFill/>
+            <a:prstDash val="solid"/>
+          </a:ln>
+        </p:spPr>
+        <p:txBody>
+          <a:bodyPr xmlns:a="http://schemas.openxmlformats.org/drawingml/2006/main" anchor="t">
+            <a:noAutofit/>
+          </a:bodyPr>
+          <a:lstStyle xmlns:a="http://schemas.openxmlformats.org/drawingml/2006/main"/>
+          <a:p xmlns:a="http://schemas.openxmlformats.org/drawingml/2006/main">
+            <a:pPr algn="r">
+              <a:defRPr sz="1200" b="0">
+                <a:solidFill>
+                  <a:srgbClr val="5B5B57"/>
+                </a:solidFill>
+                <a:latin typeface="Helvetica Neue"/>
+                <a:ea typeface="Helvetica Neue"/>
+                <a:cs typeface="Helvetica Neue"/>
+              </a:defRPr>
+            </a:pPr>
+            <a:r>
+              <a:rPr sz="1200" b="0">
+                <a:solidFill>
+                  <a:srgbClr val="5B5B57"/>
+                </a:solidFill>
+                <a:latin typeface="Helvetica Neue"/>
+                <a:ea typeface="Helvetica Neue"/>
+                <a:cs typeface="Helvetica Neue"/>
+              </a:rPr>
+              <a:t>12</a:t>
+            </a:r>
+          </a:p>
+        </p:txBody>
+      </p:sp>
+      <p:sp>
+        <p:nvSpPr>
+          <p:cNvPr id="4" name="chapter-footer">
+            <a:extLst xmlns:a="http://schemas.openxmlformats.org/drawingml/2006/main">
+              <a:ext uri="{FF2B5EF4-FFF2-40B4-BE49-F238E27FC236}">
+                <a16:creationId xmlns:a16="http://schemas.microsoft.com/office/drawing/2014/main" id="{A54D0B71-BA4A-4ABD-A517-53612F64A56B}"/>
+              </a:ext>
+            </a:extLst>
+          </p:cNvPr>
+          <p:cNvSpPr>
+            <a:spLocks xmlns:a="http://schemas.openxmlformats.org/drawingml/2006/main" noGrp="1"/>
+          </p:cNvSpPr>
+          <p:nvPr/>
+        </p:nvSpPr>
+        <p:spPr>
+          <a:xfrm xmlns:a="http://schemas.openxmlformats.org/drawingml/2006/main">
+            <a:off x="390525" y="6286500"/>
+            <a:ext cx="8191500" cy="266700"/>
+          </a:xfrm>
+          <a:prstGeom xmlns:a="http://schemas.openxmlformats.org/drawingml/2006/main" prst="rect">
+            <a:avLst/>
+          </a:prstGeom>
+          <a:noFill xmlns:a="http://schemas.openxmlformats.org/drawingml/2006/main"/>
+          <a:ln xmlns:a="http://schemas.openxmlformats.org/drawingml/2006/main" w="0">
+            <a:noFill/>
+            <a:prstDash val="solid"/>
+          </a:ln>
+        </p:spPr>
+        <p:txBody>
+          <a:bodyPr xmlns:a="http://schemas.openxmlformats.org/drawingml/2006/main" anchor="t">
+            <a:noAutofit/>
+          </a:bodyPr>
+          <a:lstStyle xmlns:a="http://schemas.openxmlformats.org/drawingml/2006/main"/>
+          <a:p xmlns:a="http://schemas.openxmlformats.org/drawingml/2006/main">
+            <a:pPr algn="l">
+              <a:defRPr sz="1125" b="0">
+                <a:solidFill>
+                  <a:srgbClr val="5B5B57"/>
+                </a:solidFill>
+                <a:latin typeface="Helvetica Neue"/>
+                <a:ea typeface="Helvetica Neue"/>
+                <a:cs typeface="Helvetica Neue"/>
+              </a:defRPr>
+            </a:pPr>
+            <a:r>
+              <a:rPr sz="1125" b="0">
+                <a:solidFill>
+                  <a:srgbClr val="5B5B57"/>
+                </a:solidFill>
+                <a:latin typeface="Helvetica Neue"/>
+                <a:ea typeface="Helvetica Neue"/>
+                <a:cs typeface="Helvetica Neue"/>
+              </a:rPr>
+              <a:t>Agentic Design Patterns</a:t>
+            </a:r>
+          </a:p>
+        </p:txBody>
+      </p:sp>
+      <p:sp>
+        <p:nvSpPr>
+          <p:cNvPr id="5" name="practice-title">
+            <a:extLst xmlns:a="http://schemas.openxmlformats.org/drawingml/2006/main">
+              <a:ext uri="{FF2B5EF4-FFF2-40B4-BE49-F238E27FC236}">
+                <a16:creationId xmlns:a16="http://schemas.microsoft.com/office/drawing/2014/main" id="{F8F5A2F4-C82D-41F1-A5C8-FEC2077266B6}"/>
+              </a:ext>
+            </a:extLst>
+          </p:cNvPr>
+          <p:cNvSpPr>
+            <a:spLocks xmlns:a="http://schemas.openxmlformats.org/drawingml/2006/main" noGrp="1"/>
+          </p:cNvSpPr>
+          <p:nvPr/>
+        </p:nvSpPr>
+        <p:spPr>
+          <a:xfrm xmlns:a="http://schemas.openxmlformats.org/drawingml/2006/main">
+            <a:off x="390525" y="1000125"/>
+            <a:ext cx="11144250" cy="666750"/>
+          </a:xfrm>
+          <a:prstGeom xmlns:a="http://schemas.openxmlformats.org/drawingml/2006/main" prst="rect">
+            <a:avLst/>
+          </a:prstGeom>
+          <a:noFill xmlns:a="http://schemas.openxmlformats.org/drawingml/2006/main"/>
+          <a:ln xmlns:a="http://schemas.openxmlformats.org/drawingml/2006/main" w="0">
+            <a:noFill/>
+            <a:prstDash val="solid"/>
+          </a:ln>
+        </p:spPr>
+        <p:txBody>
+          <a:bodyPr xmlns:a="http://schemas.openxmlformats.org/drawingml/2006/main" anchor="t">
+            <a:normAutofit fontScale="100000"/>
+          </a:bodyPr>
+          <a:lstStyle xmlns:a="http://schemas.openxmlformats.org/drawingml/2006/main"/>
+          <a:p xmlns:a="http://schemas.openxmlformats.org/drawingml/2006/main">
+            <a:pPr algn="l">
+              <a:defRPr sz="3000" b="1">
+                <a:solidFill>
+                  <a:srgbClr val="111111"/>
+                </a:solidFill>
+                <a:latin typeface="Helvetica Neue"/>
+                <a:ea typeface="Helvetica Neue"/>
+                <a:cs typeface="Helvetica Neue"/>
+              </a:defRPr>
+            </a:pPr>
+            <a:r>
+              <a:rPr sz="3000" b="1">
+                <a:solidFill>
+                  <a:srgbClr val="111111"/>
+                </a:solidFill>
+                <a:latin typeface="Helvetica Neue"/>
+                <a:ea typeface="Helvetica Neue"/>
+                <a:cs typeface="Helvetica Neue"/>
+              </a:rPr>
+              <a:t>Evidence to submit</a:t>
+            </a:r>
+          </a:p>
+        </p:txBody>
+      </p:sp>
+      <p:sp>
+        <p:nvSpPr>
+          <p:cNvPr id="6" name="practice-task">
+            <a:extLst xmlns:a="http://schemas.openxmlformats.org/drawingml/2006/main">
+              <a:ext uri="{FF2B5EF4-FFF2-40B4-BE49-F238E27FC236}">
+                <a16:creationId xmlns:a16="http://schemas.microsoft.com/office/drawing/2014/main" id="{0CC64A6D-5386-48C0-9CCE-474B95F15D02}"/>
+              </a:ext>
+            </a:extLst>
+          </p:cNvPr>
+          <p:cNvSpPr>
+            <a:spLocks xmlns:a="http://schemas.openxmlformats.org/drawingml/2006/main" noGrp="1"/>
+          </p:cNvSpPr>
+          <p:nvPr/>
+        </p:nvSpPr>
+        <p:spPr>
+          <a:xfrm xmlns:a="http://schemas.openxmlformats.org/drawingml/2006/main">
+            <a:off x="390525" y="2000250"/>
+            <a:ext cx="10953750" cy="1238250"/>
+          </a:xfrm>
+          <a:prstGeom xmlns:a="http://schemas.openxmlformats.org/drawingml/2006/main" prst="rect">
+            <a:avLst/>
+          </a:prstGeom>
+          <a:noFill xmlns:a="http://schemas.openxmlformats.org/drawingml/2006/main"/>
+          <a:ln xmlns:a="http://schemas.openxmlformats.org/drawingml/2006/main" w="0">
+            <a:noFill/>
+            <a:prstDash val="solid"/>
+          </a:ln>
+        </p:spPr>
+        <p:txBody>
+          <a:bodyPr xmlns:a="http://schemas.openxmlformats.org/drawingml/2006/main" anchor="t">
+            <a:normAutofit fontScale="100000"/>
+          </a:bodyPr>
+          <a:lstStyle xmlns:a="http://schemas.openxmlformats.org/drawingml/2006/main"/>
+          <a:p xmlns:a="http://schemas.openxmlformats.org/drawingml/2006/main">
+            <a:pPr algn="l">
+              <a:defRPr sz="1950" b="0">
+                <a:solidFill>
+                  <a:srgbClr val="111111"/>
+                </a:solidFill>
+                <a:latin typeface="Helvetica Neue"/>
+                <a:ea typeface="Helvetica Neue"/>
+                <a:cs typeface="Helvetica Neue"/>
+              </a:defRPr>
+            </a:pPr>
+            <a:r>
+              <a:rPr sz="1950" b="0">
+                <a:solidFill>
+                  <a:srgbClr val="111111"/>
+                </a:solidFill>
+                <a:latin typeface="Helvetica Neue"/>
+                <a:ea typeface="Helvetica Neue"/>
+                <a:cs typeface="Helvetica Neue"/>
+              </a:rPr>
+              <a:t>Compare a single catalog agent with an objective evidence check. Specify when an LLM reviewer would add information that the objective check lacks.</a:t>
+            </a:r>
+          </a:p>
+        </p:txBody>
+      </p:sp>
+      <p:sp>
+        <p:nvSpPr>
+          <p:cNvPr id="7" name="practice-check">
+            <a:extLst xmlns:a="http://schemas.openxmlformats.org/drawingml/2006/main">
+              <a:ext uri="{FF2B5EF4-FFF2-40B4-BE49-F238E27FC236}">
+                <a16:creationId xmlns:a16="http://schemas.microsoft.com/office/drawing/2014/main" id="{44A5CB6F-1BB6-4017-9099-1341609C329A}"/>
+              </a:ext>
+            </a:extLst>
+          </p:cNvPr>
+          <p:cNvSpPr>
+            <a:spLocks xmlns:a="http://schemas.openxmlformats.org/drawingml/2006/main" noGrp="1"/>
+          </p:cNvSpPr>
+          <p:nvPr/>
+        </p:nvSpPr>
+        <p:spPr>
+          <a:xfrm xmlns:a="http://schemas.openxmlformats.org/drawingml/2006/main">
+            <a:off x="390525" y="3381375"/>
+            <a:ext cx="10953750" cy="1095375"/>
+          </a:xfrm>
+          <a:prstGeom xmlns:a="http://schemas.openxmlformats.org/drawingml/2006/main" prst="rect">
+            <a:avLst/>
+          </a:prstGeom>
+          <a:noFill xmlns:a="http://schemas.openxmlformats.org/drawingml/2006/main"/>
+          <a:ln xmlns:a="http://schemas.openxmlformats.org/drawingml/2006/main" w="0">
+            <a:noFill/>
+            <a:prstDash val="solid"/>
+          </a:ln>
+        </p:spPr>
+        <p:txBody>
+          <a:bodyPr xmlns:a="http://schemas.openxmlformats.org/drawingml/2006/main" anchor="t">
+            <a:normAutofit fontScale="100000"/>
+          </a:bodyPr>
+          <a:lstStyle xmlns:a="http://schemas.openxmlformats.org/drawingml/2006/main"/>
+          <a:p xmlns:a="http://schemas.openxmlformats.org/drawingml/2006/main">
+            <a:pPr algn="l">
+              <a:defRPr sz="1800" b="0">
+                <a:solidFill>
+                  <a:srgbClr val="5B5B57"/>
+                </a:solidFill>
+                <a:latin typeface="Helvetica Neue"/>
+                <a:ea typeface="Helvetica Neue"/>
+                <a:cs typeface="Helvetica Neue"/>
+              </a:defRPr>
+            </a:pPr>
+            <a:r>
+              <a:rPr sz="1800" b="0">
+                <a:solidFill>
+                  <a:srgbClr val="5B5B57"/>
+                </a:solidFill>
+                <a:latin typeface="Helvetica Neue"/>
+                <a:ea typeface="Helvetica Neue"/>
+                <a:cs typeface="Helvetica Neue"/>
+              </a:rPr>
+              <a:t>Include a case where review adds no value and one where it changes an incorrect proposal. Count all calls in the live variant.</a:t>
+            </a:r>
+          </a:p>
+        </p:txBody>
+      </p:sp>
+      <p:sp>
+        <p:nvSpPr>
+          <p:cNvPr id="8" name="practice-readings">
+            <a:extLst xmlns:a="http://schemas.openxmlformats.org/drawingml/2006/main">
+              <a:ext uri="{FF2B5EF4-FFF2-40B4-BE49-F238E27FC236}">
+                <a16:creationId xmlns:a16="http://schemas.microsoft.com/office/drawing/2014/main" id="{F50A46E5-9DDE-425F-9489-37FBBA04260A}"/>
+              </a:ext>
+            </a:extLst>
+          </p:cNvPr>
+          <p:cNvSpPr>
+            <a:spLocks xmlns:a="http://schemas.openxmlformats.org/drawingml/2006/main" noGrp="1"/>
+          </p:cNvSpPr>
+          <p:nvPr/>
+        </p:nvSpPr>
+        <p:spPr>
+          <a:xfrm xmlns:a="http://schemas.openxmlformats.org/drawingml/2006/main">
+            <a:off x="390525" y="4667250"/>
+            <a:ext cx="10953750" cy="1000125"/>
+          </a:xfrm>
+          <a:prstGeom xmlns:a="http://schemas.openxmlformats.org/drawingml/2006/main" prst="rect">
+            <a:avLst/>
+          </a:prstGeom>
+          <a:noFill xmlns:a="http://schemas.openxmlformats.org/drawingml/2006/main"/>
+          <a:ln xmlns:a="http://schemas.openxmlformats.org/drawingml/2006/main" w="0">
+            <a:noFill/>
+            <a:prstDash val="solid"/>
+          </a:ln>
+        </p:spPr>
+        <p:txBody>
+          <a:bodyPr xmlns:a="http://schemas.openxmlformats.org/drawingml/2006/main" anchor="t">
+            <a:normAutofit fontScale="100000"/>
+          </a:bodyPr>
+          <a:lstStyle xmlns:a="http://schemas.openxmlformats.org/drawingml/2006/main"/>
+          <a:p xmlns:a="http://schemas.openxmlformats.org/drawingml/2006/main">
+            <a:pPr algn="l">
+              <a:defRPr sz="1425" b="0">
+                <a:solidFill>
+                  <a:srgbClr val="111111"/>
+                </a:solidFill>
+                <a:latin typeface="Helvetica Neue"/>
+                <a:ea typeface="Helvetica Neue"/>
+                <a:cs typeface="Helvetica Neue"/>
+              </a:defRPr>
+            </a:pPr>
+            <a:r>
+              <a:rPr sz="1425" b="0">
+                <a:solidFill>
+                  <a:srgbClr val="111111"/>
+                </a:solidFill>
+                <a:latin typeface="Helvetica Neue"/>
+                <a:ea typeface="Helvetica Neue"/>
+                <a:cs typeface="Helvetica Neue"/>
+              </a:rPr>
+              <a:t>R1  Patterns and problems in emerging multiagent systems</a:t>
+            </a:r>
+          </a:p>
+        </p:txBody>
+      </p:sp>
+      <p:sp>
+        <p:nvSpPr>
+          <p:cNvPr id="9" name="practice-lab">
+            <a:extLst xmlns:a="http://schemas.openxmlformats.org/drawingml/2006/main">
+              <a:ext uri="{FF2B5EF4-FFF2-40B4-BE49-F238E27FC236}">
+                <a16:creationId xmlns:a16="http://schemas.microsoft.com/office/drawing/2014/main" id="{6060D9BB-0154-4926-9B41-020C68528C59}"/>
+              </a:ext>
+            </a:extLst>
+          </p:cNvPr>
+          <p:cNvSpPr>
+            <a:spLocks xmlns:a="http://schemas.openxmlformats.org/drawingml/2006/main" noGrp="1"/>
+          </p:cNvSpPr>
+          <p:nvPr/>
+        </p:nvSpPr>
+        <p:spPr>
+          <a:xfrm xmlns:a="http://schemas.openxmlformats.org/drawingml/2006/main">
+            <a:off x="390525" y="5857875"/>
+            <a:ext cx="10953750" cy="266700"/>
+          </a:xfrm>
+          <a:prstGeom xmlns:a="http://schemas.openxmlformats.org/drawingml/2006/main" prst="rect">
+            <a:avLst/>
+          </a:prstGeom>
+          <a:noFill xmlns:a="http://schemas.openxmlformats.org/drawingml/2006/main"/>
+          <a:ln xmlns:a="http://schemas.openxmlformats.org/drawingml/2006/main" w="0">
+            <a:noFill/>
+            <a:prstDash val="solid"/>
+          </a:ln>
+        </p:spPr>
+        <p:txBody>
+          <a:bodyPr xmlns:a="http://schemas.openxmlformats.org/drawingml/2006/main" anchor="t">
+            <a:normAutofit fontScale="90196"/>
+          </a:bodyPr>
+          <a:lstStyle xmlns:a="http://schemas.openxmlformats.org/drawingml/2006/main"/>
+          <a:p xmlns:a="http://schemas.openxmlformats.org/drawingml/2006/main">
+            <a:pPr algn="l">
+              <a:defRPr sz="1275" b="0">
+                <a:solidFill>
+                  <a:srgbClr val="5B5B57"/>
+                </a:solidFill>
+                <a:latin typeface="Helvetica Neue"/>
+                <a:ea typeface="Helvetica Neue"/>
+                <a:cs typeface="Helvetica Neue"/>
+              </a:defRPr>
+            </a:pPr>
+            <a:r>
+              <a:rPr sz="1275" b="0">
+                <a:solidFill>
+                  <a:srgbClr val="5B5B57"/>
+                </a:solidFill>
+                <a:latin typeface="Helvetica Neue"/>
+                <a:ea typeface="Helvetica Neue"/>
+                <a:cs typeface="Helvetica Neue"/>
+              </a:rPr>
+              <a:t>labs/07_agents_sdk_evaluation.ipynb</a:t>
+            </a:r>
+          </a:p>
+        </p:txBody>
+      </p:sp>
+    </p:spTree>
+    <p:extLst>
+      <p:ext uri="{BB962C8B-B14F-4D97-AF65-F5344CB8AC3E}">
+        <p14:creationId xmlns:p14="http://schemas.microsoft.com/office/powerpoint/2010/main" val="1810858708"/>
       </p:ext>
     </p:extLst>
   </p:cSld>
@@ -3016,7 +5184,7 @@
           <p:cNvPr id="14" name="accent-line">
             <a:extLst xmlns:a="http://schemas.openxmlformats.org/drawingml/2006/main">
               <a:ext uri="{FF2B5EF4-FFF2-40B4-BE49-F238E27FC236}">
-                <a16:creationId xmlns:a16="http://schemas.microsoft.com/office/drawing/2014/main" id="{AC37C6DD-98DF-4D3F-8D6C-BB3D82E217B1}"/>
+                <a16:creationId xmlns:a16="http://schemas.microsoft.com/office/drawing/2014/main" id="{C990A9E6-9277-46AC-B9DC-089555A88D11}"/>
               </a:ext>
             </a:extLst>
           </p:cNvPr>
@@ -3049,7 +5217,7 @@
           <p:cNvPr id="2" name="chapter-label">
             <a:extLst xmlns:a="http://schemas.openxmlformats.org/drawingml/2006/main">
               <a:ext uri="{FF2B5EF4-FFF2-40B4-BE49-F238E27FC236}">
-                <a16:creationId xmlns:a16="http://schemas.microsoft.com/office/drawing/2014/main" id="{872331AF-B596-43A7-919A-71485ED94AD9}"/>
+                <a16:creationId xmlns:a16="http://schemas.microsoft.com/office/drawing/2014/main" id="{CABE16D6-44AE-44CF-92D9-B0C0E4F549AF}"/>
               </a:ext>
             </a:extLst>
           </p:cNvPr>
@@ -3107,7 +5275,7 @@
           <p:cNvPr id="3" name="slide-number">
             <a:extLst xmlns:a="http://schemas.openxmlformats.org/drawingml/2006/main">
               <a:ext uri="{FF2B5EF4-FFF2-40B4-BE49-F238E27FC236}">
-                <a16:creationId xmlns:a16="http://schemas.microsoft.com/office/drawing/2014/main" id="{F3AA3833-9A69-4F63-B0F2-4883F1EA191F}"/>
+                <a16:creationId xmlns:a16="http://schemas.microsoft.com/office/drawing/2014/main" id="{1C659F4B-E0B5-4A2E-B8BE-AEC9F8CF4137}"/>
               </a:ext>
             </a:extLst>
           </p:cNvPr>
@@ -3165,7 +5333,7 @@
           <p:cNvPr id="4" name="chapter-footer">
             <a:extLst xmlns:a="http://schemas.openxmlformats.org/drawingml/2006/main">
               <a:ext uri="{FF2B5EF4-FFF2-40B4-BE49-F238E27FC236}">
-                <a16:creationId xmlns:a16="http://schemas.microsoft.com/office/drawing/2014/main" id="{547D96DD-DBC2-4047-AC3D-DC66D2609DF0}"/>
+                <a16:creationId xmlns:a16="http://schemas.microsoft.com/office/drawing/2014/main" id="{C36B90AD-3AC2-41E8-A237-F454BD9402EE}"/>
               </a:ext>
             </a:extLst>
           </p:cNvPr>
@@ -3223,7 +5391,7 @@
           <p:cNvPr id="5" name="objectives-title">
             <a:extLst xmlns:a="http://schemas.openxmlformats.org/drawingml/2006/main">
               <a:ext uri="{FF2B5EF4-FFF2-40B4-BE49-F238E27FC236}">
-                <a16:creationId xmlns:a16="http://schemas.microsoft.com/office/drawing/2014/main" id="{62658085-6011-4D9A-8461-3C9ADDF91F63}"/>
+                <a16:creationId xmlns:a16="http://schemas.microsoft.com/office/drawing/2014/main" id="{5ABF56EA-6E58-4D34-BBFC-E8F93B2F3AF5}"/>
               </a:ext>
             </a:extLst>
           </p:cNvPr>
@@ -3281,7 +5449,7 @@
           <p:cNvPr id="6" name="objective-number-1">
             <a:extLst xmlns:a="http://schemas.openxmlformats.org/drawingml/2006/main">
               <a:ext uri="{FF2B5EF4-FFF2-40B4-BE49-F238E27FC236}">
-                <a16:creationId xmlns:a16="http://schemas.microsoft.com/office/drawing/2014/main" id="{34E93BE0-D2A0-434A-82FA-AAA800B47B64}"/>
+                <a16:creationId xmlns:a16="http://schemas.microsoft.com/office/drawing/2014/main" id="{DFFBED35-1592-4138-BE75-67D31A6871B5}"/>
               </a:ext>
             </a:extLst>
           </p:cNvPr>
@@ -3339,7 +5507,7 @@
           <p:cNvPr id="7" name="objective-1">
             <a:extLst xmlns:a="http://schemas.openxmlformats.org/drawingml/2006/main">
               <a:ext uri="{FF2B5EF4-FFF2-40B4-BE49-F238E27FC236}">
-                <a16:creationId xmlns:a16="http://schemas.microsoft.com/office/drawing/2014/main" id="{F98ADDCB-42EE-483E-8C78-79E44CF4AB71}"/>
+                <a16:creationId xmlns:a16="http://schemas.microsoft.com/office/drawing/2014/main" id="{3594707B-C760-48D5-9859-A018C5A022F1}"/>
               </a:ext>
             </a:extLst>
           </p:cNvPr>
@@ -3397,7 +5565,7 @@
           <p:cNvPr id="8" name="objective-number-2">
             <a:extLst xmlns:a="http://schemas.openxmlformats.org/drawingml/2006/main">
               <a:ext uri="{FF2B5EF4-FFF2-40B4-BE49-F238E27FC236}">
-                <a16:creationId xmlns:a16="http://schemas.microsoft.com/office/drawing/2014/main" id="{F1E24541-8585-4F80-BEEA-A39489547CA1}"/>
+                <a16:creationId xmlns:a16="http://schemas.microsoft.com/office/drawing/2014/main" id="{7E11DDB0-8289-4A2C-86F3-E78E5DA38188}"/>
               </a:ext>
             </a:extLst>
           </p:cNvPr>
@@ -3455,7 +5623,7 @@
           <p:cNvPr id="9" name="objective-2">
             <a:extLst xmlns:a="http://schemas.openxmlformats.org/drawingml/2006/main">
               <a:ext uri="{FF2B5EF4-FFF2-40B4-BE49-F238E27FC236}">
-                <a16:creationId xmlns:a16="http://schemas.microsoft.com/office/drawing/2014/main" id="{97085CDA-AA30-44DC-A83C-8969BD019D8A}"/>
+                <a16:creationId xmlns:a16="http://schemas.microsoft.com/office/drawing/2014/main" id="{DE60FB6D-7BA6-4E76-90BB-5D497B41A241}"/>
               </a:ext>
             </a:extLst>
           </p:cNvPr>
@@ -3513,7 +5681,7 @@
           <p:cNvPr id="10" name="objective-number-3">
             <a:extLst xmlns:a="http://schemas.openxmlformats.org/drawingml/2006/main">
               <a:ext uri="{FF2B5EF4-FFF2-40B4-BE49-F238E27FC236}">
-                <a16:creationId xmlns:a16="http://schemas.microsoft.com/office/drawing/2014/main" id="{2968FE2A-995B-488A-A814-1FD7373232C6}"/>
+                <a16:creationId xmlns:a16="http://schemas.microsoft.com/office/drawing/2014/main" id="{59AB277A-B7D1-4144-8FEB-DDAC9C31E051}"/>
               </a:ext>
             </a:extLst>
           </p:cNvPr>
@@ -3571,7 +5739,7 @@
           <p:cNvPr id="11" name="objective-3">
             <a:extLst xmlns:a="http://schemas.openxmlformats.org/drawingml/2006/main">
               <a:ext uri="{FF2B5EF4-FFF2-40B4-BE49-F238E27FC236}">
-                <a16:creationId xmlns:a16="http://schemas.microsoft.com/office/drawing/2014/main" id="{210F83E5-0224-427D-B6B2-F9C137619E8F}"/>
+                <a16:creationId xmlns:a16="http://schemas.microsoft.com/office/drawing/2014/main" id="{7F28081F-8F8B-4E53-8462-5A7A4AA5447D}"/>
               </a:ext>
             </a:extLst>
           </p:cNvPr>
@@ -3629,7 +5797,7 @@
           <p:cNvPr id="12" name="objective-number-4">
             <a:extLst xmlns:a="http://schemas.openxmlformats.org/drawingml/2006/main">
               <a:ext uri="{FF2B5EF4-FFF2-40B4-BE49-F238E27FC236}">
-                <a16:creationId xmlns:a16="http://schemas.microsoft.com/office/drawing/2014/main" id="{236BE3B4-3645-4D81-A0A7-F580AE34A4CB}"/>
+                <a16:creationId xmlns:a16="http://schemas.microsoft.com/office/drawing/2014/main" id="{9838591E-28F1-41A2-BA87-124245CC0598}"/>
               </a:ext>
             </a:extLst>
           </p:cNvPr>
@@ -3687,7 +5855,7 @@
           <p:cNvPr id="13" name="objective-4">
             <a:extLst xmlns:a="http://schemas.openxmlformats.org/drawingml/2006/main">
               <a:ext uri="{FF2B5EF4-FFF2-40B4-BE49-F238E27FC236}">
-                <a16:creationId xmlns:a16="http://schemas.microsoft.com/office/drawing/2014/main" id="{FB395DE4-56BE-4B1A-842B-1AC6C788AC62}"/>
+                <a16:creationId xmlns:a16="http://schemas.microsoft.com/office/drawing/2014/main" id="{1AF2DBBB-935F-4625-BA8E-916F131963C7}"/>
               </a:ext>
             </a:extLst>
           </p:cNvPr>
@@ -3743,7 +5911,7 @@
     </p:spTree>
     <p:extLst>
       <p:ext uri="{BB962C8B-B14F-4D97-AF65-F5344CB8AC3E}">
-        <p14:creationId xmlns:p14="http://schemas.microsoft.com/office/powerpoint/2010/main" val="854109179"/>
+        <p14:creationId xmlns:p14="http://schemas.microsoft.com/office/powerpoint/2010/main" val="190048099"/>
       </p:ext>
     </p:extLst>
   </p:cSld>
@@ -3774,7 +5942,7 @@
           <p:cNvPr id="9" name="accent-line">
             <a:extLst xmlns:a="http://schemas.openxmlformats.org/drawingml/2006/main">
               <a:ext uri="{FF2B5EF4-FFF2-40B4-BE49-F238E27FC236}">
-                <a16:creationId xmlns:a16="http://schemas.microsoft.com/office/drawing/2014/main" id="{09B6A622-09F4-4E8C-BC48-CD1E782A13CE}"/>
+                <a16:creationId xmlns:a16="http://schemas.microsoft.com/office/drawing/2014/main" id="{DB71BC8E-4468-458F-81F5-CBD0558D0BB9}"/>
               </a:ext>
             </a:extLst>
           </p:cNvPr>
@@ -3807,7 +5975,7 @@
           <p:cNvPr id="2" name="chapter-label">
             <a:extLst xmlns:a="http://schemas.openxmlformats.org/drawingml/2006/main">
               <a:ext uri="{FF2B5EF4-FFF2-40B4-BE49-F238E27FC236}">
-                <a16:creationId xmlns:a16="http://schemas.microsoft.com/office/drawing/2014/main" id="{71DADBDC-4E20-4D99-B04B-26515A27B743}"/>
+                <a16:creationId xmlns:a16="http://schemas.microsoft.com/office/drawing/2014/main" id="{3C3D2B11-392E-4600-8580-B81E10253230}"/>
               </a:ext>
             </a:extLst>
           </p:cNvPr>
@@ -3865,7 +6033,7 @@
           <p:cNvPr id="3" name="slide-number">
             <a:extLst xmlns:a="http://schemas.openxmlformats.org/drawingml/2006/main">
               <a:ext uri="{FF2B5EF4-FFF2-40B4-BE49-F238E27FC236}">
-                <a16:creationId xmlns:a16="http://schemas.microsoft.com/office/drawing/2014/main" id="{562333EF-69BC-4AB0-8DED-AE0EDD0508F5}"/>
+                <a16:creationId xmlns:a16="http://schemas.microsoft.com/office/drawing/2014/main" id="{7F1094CF-86FD-4D54-BE4D-3C51823A134D}"/>
               </a:ext>
             </a:extLst>
           </p:cNvPr>
@@ -3923,7 +6091,7 @@
           <p:cNvPr id="4" name="chapter-footer">
             <a:extLst xmlns:a="http://schemas.openxmlformats.org/drawingml/2006/main">
               <a:ext uri="{FF2B5EF4-FFF2-40B4-BE49-F238E27FC236}">
-                <a16:creationId xmlns:a16="http://schemas.microsoft.com/office/drawing/2014/main" id="{23FD02BA-DA01-454F-9EC5-065F57897EC0}"/>
+                <a16:creationId xmlns:a16="http://schemas.microsoft.com/office/drawing/2014/main" id="{937B5A2C-D556-4F61-B388-EFACBDEC0D86}"/>
               </a:ext>
             </a:extLst>
           </p:cNvPr>
@@ -3981,7 +6149,7 @@
           <p:cNvPr id="5" name="section-title">
             <a:extLst xmlns:a="http://schemas.openxmlformats.org/drawingml/2006/main">
               <a:ext uri="{FF2B5EF4-FFF2-40B4-BE49-F238E27FC236}">
-                <a16:creationId xmlns:a16="http://schemas.microsoft.com/office/drawing/2014/main" id="{60D1969D-1114-457C-B72F-8AC0A7182BCE}"/>
+                <a16:creationId xmlns:a16="http://schemas.microsoft.com/office/drawing/2014/main" id="{61AD3B2C-72BF-4CC3-A570-D1C796760B7D}"/>
               </a:ext>
             </a:extLst>
           </p:cNvPr>
@@ -4039,7 +6207,7 @@
           <p:cNvPr id="6" name="section-explanation">
             <a:extLst xmlns:a="http://schemas.openxmlformats.org/drawingml/2006/main">
               <a:ext uri="{FF2B5EF4-FFF2-40B4-BE49-F238E27FC236}">
-                <a16:creationId xmlns:a16="http://schemas.microsoft.com/office/drawing/2014/main" id="{2C39DCE1-E1E8-4DF0-AB79-3ADD7C8F2C30}"/>
+                <a16:creationId xmlns:a16="http://schemas.microsoft.com/office/drawing/2014/main" id="{5DABF97D-36C3-4D0C-BB3A-8734D78BE036}"/>
               </a:ext>
             </a:extLst>
           </p:cNvPr>
@@ -4097,7 +6265,7 @@
           <p:cNvPr id="7" name="column-rule">
             <a:extLst xmlns:a="http://schemas.openxmlformats.org/drawingml/2006/main">
               <a:ext uri="{FF2B5EF4-FFF2-40B4-BE49-F238E27FC236}">
-                <a16:creationId xmlns:a16="http://schemas.microsoft.com/office/drawing/2014/main" id="{71730198-81BE-451B-A94A-F9C49BDE5789}"/>
+                <a16:creationId xmlns:a16="http://schemas.microsoft.com/office/drawing/2014/main" id="{D9A8AAAA-1629-42D0-8D92-C9C12753B825}"/>
               </a:ext>
             </a:extLst>
           </p:cNvPr>
@@ -4130,7 +6298,7 @@
           <p:cNvPr id="8" name="section-points">
             <a:extLst xmlns:a="http://schemas.openxmlformats.org/drawingml/2006/main">
               <a:ext uri="{FF2B5EF4-FFF2-40B4-BE49-F238E27FC236}">
-                <a16:creationId xmlns:a16="http://schemas.microsoft.com/office/drawing/2014/main" id="{6F5C27AC-E4A3-4DCB-A2B8-D274DE84CE33}"/>
+                <a16:creationId xmlns:a16="http://schemas.microsoft.com/office/drawing/2014/main" id="{CEC6E4B6-FC49-45BF-8140-1321F86C5229}"/>
               </a:ext>
             </a:extLst>
           </p:cNvPr>
@@ -4242,7 +6410,7 @@
     </p:spTree>
     <p:extLst>
       <p:ext uri="{BB962C8B-B14F-4D97-AF65-F5344CB8AC3E}">
-        <p14:creationId xmlns:p14="http://schemas.microsoft.com/office/powerpoint/2010/main" val="727096775"/>
+        <p14:creationId xmlns:p14="http://schemas.microsoft.com/office/powerpoint/2010/main" val="1160062563"/>
       </p:ext>
     </p:extLst>
   </p:cSld>
@@ -4273,7 +6441,7 @@
           <p:cNvPr id="15" name="accent-line">
             <a:extLst xmlns:a="http://schemas.openxmlformats.org/drawingml/2006/main">
               <a:ext uri="{FF2B5EF4-FFF2-40B4-BE49-F238E27FC236}">
-                <a16:creationId xmlns:a16="http://schemas.microsoft.com/office/drawing/2014/main" id="{54C62C56-5093-4ED2-BBA7-0C3752348208}"/>
+                <a16:creationId xmlns:a16="http://schemas.microsoft.com/office/drawing/2014/main" id="{DF83694E-4912-478B-841E-27DB1643B9B9}"/>
               </a:ext>
             </a:extLst>
           </p:cNvPr>
@@ -4306,7 +6474,7 @@
           <p:cNvPr id="2" name="chapter-label">
             <a:extLst xmlns:a="http://schemas.openxmlformats.org/drawingml/2006/main">
               <a:ext uri="{FF2B5EF4-FFF2-40B4-BE49-F238E27FC236}">
-                <a16:creationId xmlns:a16="http://schemas.microsoft.com/office/drawing/2014/main" id="{7634D6A0-4451-42D6-8C97-2425FC530EAC}"/>
+                <a16:creationId xmlns:a16="http://schemas.microsoft.com/office/drawing/2014/main" id="{4935653E-99BB-4013-AC94-FC3E16FC5C23}"/>
               </a:ext>
             </a:extLst>
           </p:cNvPr>
@@ -4364,7 +6532,7 @@
           <p:cNvPr id="3" name="slide-number">
             <a:extLst xmlns:a="http://schemas.openxmlformats.org/drawingml/2006/main">
               <a:ext uri="{FF2B5EF4-FFF2-40B4-BE49-F238E27FC236}">
-                <a16:creationId xmlns:a16="http://schemas.microsoft.com/office/drawing/2014/main" id="{FD67E0BC-6C44-49BF-B713-EF7DB1826538}"/>
+                <a16:creationId xmlns:a16="http://schemas.microsoft.com/office/drawing/2014/main" id="{544F34B0-D78F-43A6-92E3-725C79E398CF}"/>
               </a:ext>
             </a:extLst>
           </p:cNvPr>
@@ -4422,7 +6590,7 @@
           <p:cNvPr id="4" name="chapter-footer">
             <a:extLst xmlns:a="http://schemas.openxmlformats.org/drawingml/2006/main">
               <a:ext uri="{FF2B5EF4-FFF2-40B4-BE49-F238E27FC236}">
-                <a16:creationId xmlns:a16="http://schemas.microsoft.com/office/drawing/2014/main" id="{1755B4F5-8A8A-467E-9A8B-3ED8460C12CA}"/>
+                <a16:creationId xmlns:a16="http://schemas.microsoft.com/office/drawing/2014/main" id="{F9EEAE57-BDA8-4A20-AFAD-CDDC56F2BF55}"/>
               </a:ext>
             </a:extLst>
           </p:cNvPr>
@@ -4480,7 +6648,7 @@
           <p:cNvPr id="5" name="section-title">
             <a:extLst xmlns:a="http://schemas.openxmlformats.org/drawingml/2006/main">
               <a:ext uri="{FF2B5EF4-FFF2-40B4-BE49-F238E27FC236}">
-                <a16:creationId xmlns:a16="http://schemas.microsoft.com/office/drawing/2014/main" id="{2DC8D519-D569-4F47-A4D5-F6A2A3A76497}"/>
+                <a16:creationId xmlns:a16="http://schemas.microsoft.com/office/drawing/2014/main" id="{4C9C0F15-9180-48D1-B94E-67386DE3EDED}"/>
               </a:ext>
             </a:extLst>
           </p:cNvPr>
@@ -4538,7 +6706,7 @@
           <p:cNvPr id="6" name="section-explanation">
             <a:extLst xmlns:a="http://schemas.openxmlformats.org/drawingml/2006/main">
               <a:ext uri="{FF2B5EF4-FFF2-40B4-BE49-F238E27FC236}">
-                <a16:creationId xmlns:a16="http://schemas.microsoft.com/office/drawing/2014/main" id="{F2E4D185-163F-4A57-8712-DCAA69B23E65}"/>
+                <a16:creationId xmlns:a16="http://schemas.microsoft.com/office/drawing/2014/main" id="{1C362603-9055-481B-AC22-9E694687E69D}"/>
               </a:ext>
             </a:extLst>
           </p:cNvPr>
@@ -4596,7 +6764,7 @@
           <p:cNvPr id="7" name="point-band-1">
             <a:extLst xmlns:a="http://schemas.openxmlformats.org/drawingml/2006/main">
               <a:ext uri="{FF2B5EF4-FFF2-40B4-BE49-F238E27FC236}">
-                <a16:creationId xmlns:a16="http://schemas.microsoft.com/office/drawing/2014/main" id="{DFDDD450-BF12-4F0C-A40F-5E251CDB306A}"/>
+                <a16:creationId xmlns:a16="http://schemas.microsoft.com/office/drawing/2014/main" id="{06612227-2F61-4080-ABA3-7EE3EBC0FA59}"/>
               </a:ext>
             </a:extLst>
           </p:cNvPr>
@@ -4629,7 +6797,7 @@
           <p:cNvPr id="8" name="point-1">
             <a:extLst xmlns:a="http://schemas.openxmlformats.org/drawingml/2006/main">
               <a:ext uri="{FF2B5EF4-FFF2-40B4-BE49-F238E27FC236}">
-                <a16:creationId xmlns:a16="http://schemas.microsoft.com/office/drawing/2014/main" id="{6157D65F-ED08-423F-918E-3431A7BDB04E}"/>
+                <a16:creationId xmlns:a16="http://schemas.microsoft.com/office/drawing/2014/main" id="{85DE1F9D-1F2E-43B9-916D-10C80DA81DDD}"/>
               </a:ext>
             </a:extLst>
           </p:cNvPr>
@@ -4687,7 +6855,7 @@
           <p:cNvPr id="9" name="point-band-2">
             <a:extLst xmlns:a="http://schemas.openxmlformats.org/drawingml/2006/main">
               <a:ext uri="{FF2B5EF4-FFF2-40B4-BE49-F238E27FC236}">
-                <a16:creationId xmlns:a16="http://schemas.microsoft.com/office/drawing/2014/main" id="{6ECD28D9-1A82-4A0D-9A7C-A9F887107C94}"/>
+                <a16:creationId xmlns:a16="http://schemas.microsoft.com/office/drawing/2014/main" id="{2CF7A2FF-752B-4360-81F0-C8BF90051E0C}"/>
               </a:ext>
             </a:extLst>
           </p:cNvPr>
@@ -4720,7 +6888,7 @@
           <p:cNvPr id="10" name="point-2">
             <a:extLst xmlns:a="http://schemas.openxmlformats.org/drawingml/2006/main">
               <a:ext uri="{FF2B5EF4-FFF2-40B4-BE49-F238E27FC236}">
-                <a16:creationId xmlns:a16="http://schemas.microsoft.com/office/drawing/2014/main" id="{EE08B2CD-78B2-4DF6-8F9D-D0A552D54AF2}"/>
+                <a16:creationId xmlns:a16="http://schemas.microsoft.com/office/drawing/2014/main" id="{9A4609DF-A989-4CFB-AF97-2F17C6624676}"/>
               </a:ext>
             </a:extLst>
           </p:cNvPr>
@@ -4778,7 +6946,7 @@
           <p:cNvPr id="11" name="point-band-3">
             <a:extLst xmlns:a="http://schemas.openxmlformats.org/drawingml/2006/main">
               <a:ext uri="{FF2B5EF4-FFF2-40B4-BE49-F238E27FC236}">
-                <a16:creationId xmlns:a16="http://schemas.microsoft.com/office/drawing/2014/main" id="{05BF2001-0EF3-4DD3-960B-7410333CE4F6}"/>
+                <a16:creationId xmlns:a16="http://schemas.microsoft.com/office/drawing/2014/main" id="{0305F25F-79A1-4277-9FC0-B21D8C78B345}"/>
               </a:ext>
             </a:extLst>
           </p:cNvPr>
@@ -4811,7 +6979,7 @@
           <p:cNvPr id="12" name="point-3">
             <a:extLst xmlns:a="http://schemas.openxmlformats.org/drawingml/2006/main">
               <a:ext uri="{FF2B5EF4-FFF2-40B4-BE49-F238E27FC236}">
-                <a16:creationId xmlns:a16="http://schemas.microsoft.com/office/drawing/2014/main" id="{946FB919-DD2B-4EC3-928E-22501982290C}"/>
+                <a16:creationId xmlns:a16="http://schemas.microsoft.com/office/drawing/2014/main" id="{C39C3EFF-E47E-43CD-AD88-478E4F6F2089}"/>
               </a:ext>
             </a:extLst>
           </p:cNvPr>
@@ -4869,7 +7037,7 @@
           <p:cNvPr id="13" name="point-band-4">
             <a:extLst xmlns:a="http://schemas.openxmlformats.org/drawingml/2006/main">
               <a:ext uri="{FF2B5EF4-FFF2-40B4-BE49-F238E27FC236}">
-                <a16:creationId xmlns:a16="http://schemas.microsoft.com/office/drawing/2014/main" id="{D0714F0D-DE6D-4C21-A635-9933C0DD4EB4}"/>
+                <a16:creationId xmlns:a16="http://schemas.microsoft.com/office/drawing/2014/main" id="{A746225A-92A2-4271-BDC3-7E7F80940AFC}"/>
               </a:ext>
             </a:extLst>
           </p:cNvPr>
@@ -4902,7 +7070,7 @@
           <p:cNvPr id="14" name="point-4">
             <a:extLst xmlns:a="http://schemas.openxmlformats.org/drawingml/2006/main">
               <a:ext uri="{FF2B5EF4-FFF2-40B4-BE49-F238E27FC236}">
-                <a16:creationId xmlns:a16="http://schemas.microsoft.com/office/drawing/2014/main" id="{F460FF37-A2DB-4AA5-BDD4-DEEBC1638A3B}"/>
+                <a16:creationId xmlns:a16="http://schemas.microsoft.com/office/drawing/2014/main" id="{BF809049-72AE-4473-A1BE-051C604117EC}"/>
               </a:ext>
             </a:extLst>
           </p:cNvPr>
@@ -4958,7 +7126,7 @@
     </p:spTree>
     <p:extLst>
       <p:ext uri="{BB962C8B-B14F-4D97-AF65-F5344CB8AC3E}">
-        <p14:creationId xmlns:p14="http://schemas.microsoft.com/office/powerpoint/2010/main" val="2042895296"/>
+        <p14:creationId xmlns:p14="http://schemas.microsoft.com/office/powerpoint/2010/main" val="147489933"/>
       </p:ext>
     </p:extLst>
   </p:cSld>
@@ -4989,7 +7157,7 @@
           <p:cNvPr id="9" name="accent-line">
             <a:extLst xmlns:a="http://schemas.openxmlformats.org/drawingml/2006/main">
               <a:ext uri="{FF2B5EF4-FFF2-40B4-BE49-F238E27FC236}">
-                <a16:creationId xmlns:a16="http://schemas.microsoft.com/office/drawing/2014/main" id="{F4A1DF79-D943-42AA-89B4-737F91C875B6}"/>
+                <a16:creationId xmlns:a16="http://schemas.microsoft.com/office/drawing/2014/main" id="{9C8EA44C-0C04-4D14-A247-373A22DF7C95}"/>
               </a:ext>
             </a:extLst>
           </p:cNvPr>
@@ -5022,7 +7190,7 @@
           <p:cNvPr id="2" name="chapter-label">
             <a:extLst xmlns:a="http://schemas.openxmlformats.org/drawingml/2006/main">
               <a:ext uri="{FF2B5EF4-FFF2-40B4-BE49-F238E27FC236}">
-                <a16:creationId xmlns:a16="http://schemas.microsoft.com/office/drawing/2014/main" id="{EDF3BDB0-BBCE-49B5-ADF9-361467129E27}"/>
+                <a16:creationId xmlns:a16="http://schemas.microsoft.com/office/drawing/2014/main" id="{7FB8EE3B-76B3-4873-95A9-2EB52F9241B7}"/>
               </a:ext>
             </a:extLst>
           </p:cNvPr>
@@ -5080,7 +7248,7 @@
           <p:cNvPr id="3" name="slide-number">
             <a:extLst xmlns:a="http://schemas.openxmlformats.org/drawingml/2006/main">
               <a:ext uri="{FF2B5EF4-FFF2-40B4-BE49-F238E27FC236}">
-                <a16:creationId xmlns:a16="http://schemas.microsoft.com/office/drawing/2014/main" id="{7D8F6B0A-DE20-4347-9405-7CD1B98A3C54}"/>
+                <a16:creationId xmlns:a16="http://schemas.microsoft.com/office/drawing/2014/main" id="{3E7616F3-7C89-46FC-9DB9-F2BBD7E70AC6}"/>
               </a:ext>
             </a:extLst>
           </p:cNvPr>
@@ -5138,7 +7306,7 @@
           <p:cNvPr id="4" name="chapter-footer">
             <a:extLst xmlns:a="http://schemas.openxmlformats.org/drawingml/2006/main">
               <a:ext uri="{FF2B5EF4-FFF2-40B4-BE49-F238E27FC236}">
-                <a16:creationId xmlns:a16="http://schemas.microsoft.com/office/drawing/2014/main" id="{92F8FB6A-3910-4B4C-9A33-46091013ED6D}"/>
+                <a16:creationId xmlns:a16="http://schemas.microsoft.com/office/drawing/2014/main" id="{707A8F63-D3C2-4C42-BA83-6470AFAC90C4}"/>
               </a:ext>
             </a:extLst>
           </p:cNvPr>
@@ -5196,7 +7364,7 @@
           <p:cNvPr id="5" name="section-title">
             <a:extLst xmlns:a="http://schemas.openxmlformats.org/drawingml/2006/main">
               <a:ext uri="{FF2B5EF4-FFF2-40B4-BE49-F238E27FC236}">
-                <a16:creationId xmlns:a16="http://schemas.microsoft.com/office/drawing/2014/main" id="{186BD6DD-354F-4BFD-815A-1595CD228793}"/>
+                <a16:creationId xmlns:a16="http://schemas.microsoft.com/office/drawing/2014/main" id="{2BCEB9B0-FE8B-482B-B5FE-311906BE24C9}"/>
               </a:ext>
             </a:extLst>
           </p:cNvPr>
@@ -5254,7 +7422,7 @@
           <p:cNvPr id="6" name="section-explanation">
             <a:extLst xmlns:a="http://schemas.openxmlformats.org/drawingml/2006/main">
               <a:ext uri="{FF2B5EF4-FFF2-40B4-BE49-F238E27FC236}">
-                <a16:creationId xmlns:a16="http://schemas.microsoft.com/office/drawing/2014/main" id="{D4C283E7-CC3A-4D73-86D2-7F49F8972038}"/>
+                <a16:creationId xmlns:a16="http://schemas.microsoft.com/office/drawing/2014/main" id="{80391AA8-E150-4A11-81E6-049F292776D9}"/>
               </a:ext>
             </a:extLst>
           </p:cNvPr>
@@ -5312,7 +7480,7 @@
           <p:cNvPr id="7" name="column-rule">
             <a:extLst xmlns:a="http://schemas.openxmlformats.org/drawingml/2006/main">
               <a:ext uri="{FF2B5EF4-FFF2-40B4-BE49-F238E27FC236}">
-                <a16:creationId xmlns:a16="http://schemas.microsoft.com/office/drawing/2014/main" id="{6F215D28-C4DE-45B9-B52A-A640D388367B}"/>
+                <a16:creationId xmlns:a16="http://schemas.microsoft.com/office/drawing/2014/main" id="{30604850-962B-4D91-9797-3B4FED42236C}"/>
               </a:ext>
             </a:extLst>
           </p:cNvPr>
@@ -5345,7 +7513,7 @@
           <p:cNvPr id="8" name="section-points">
             <a:extLst xmlns:a="http://schemas.openxmlformats.org/drawingml/2006/main">
               <a:ext uri="{FF2B5EF4-FFF2-40B4-BE49-F238E27FC236}">
-                <a16:creationId xmlns:a16="http://schemas.microsoft.com/office/drawing/2014/main" id="{DF7C0482-9260-438F-822E-A615B015D41C}"/>
+                <a16:creationId xmlns:a16="http://schemas.microsoft.com/office/drawing/2014/main" id="{06DF23C5-AA22-4D93-86F4-26E6C6DDF3E3}"/>
               </a:ext>
             </a:extLst>
           </p:cNvPr>
@@ -5457,7 +7625,7 @@
     </p:spTree>
     <p:extLst>
       <p:ext uri="{BB962C8B-B14F-4D97-AF65-F5344CB8AC3E}">
-        <p14:creationId xmlns:p14="http://schemas.microsoft.com/office/powerpoint/2010/main" val="1042732760"/>
+        <p14:creationId xmlns:p14="http://schemas.microsoft.com/office/powerpoint/2010/main" val="1203308052"/>
       </p:ext>
     </p:extLst>
   </p:cSld>
@@ -5488,7 +7656,7 @@
           <p:cNvPr id="13" name="accent-line">
             <a:extLst xmlns:a="http://schemas.openxmlformats.org/drawingml/2006/main">
               <a:ext uri="{FF2B5EF4-FFF2-40B4-BE49-F238E27FC236}">
-                <a16:creationId xmlns:a16="http://schemas.microsoft.com/office/drawing/2014/main" id="{FA946303-BD15-47D7-B70D-EBCBDCA9C0C3}"/>
+                <a16:creationId xmlns:a16="http://schemas.microsoft.com/office/drawing/2014/main" id="{D3844282-24A5-4DF2-AE51-52D7A63D213B}"/>
               </a:ext>
             </a:extLst>
           </p:cNvPr>
@@ -5521,7 +7689,7 @@
           <p:cNvPr id="2" name="chapter-label">
             <a:extLst xmlns:a="http://schemas.openxmlformats.org/drawingml/2006/main">
               <a:ext uri="{FF2B5EF4-FFF2-40B4-BE49-F238E27FC236}">
-                <a16:creationId xmlns:a16="http://schemas.microsoft.com/office/drawing/2014/main" id="{10CF6EFB-6796-472A-BF60-88B38EFE76C3}"/>
+                <a16:creationId xmlns:a16="http://schemas.microsoft.com/office/drawing/2014/main" id="{057769DC-0A8E-4AB1-A7A4-838108CD623B}"/>
               </a:ext>
             </a:extLst>
           </p:cNvPr>
@@ -5579,7 +7747,7 @@
           <p:cNvPr id="3" name="slide-number">
             <a:extLst xmlns:a="http://schemas.openxmlformats.org/drawingml/2006/main">
               <a:ext uri="{FF2B5EF4-FFF2-40B4-BE49-F238E27FC236}">
-                <a16:creationId xmlns:a16="http://schemas.microsoft.com/office/drawing/2014/main" id="{287FA595-D736-48F3-A4B0-F07848488A01}"/>
+                <a16:creationId xmlns:a16="http://schemas.microsoft.com/office/drawing/2014/main" id="{3D9F558B-E9ED-4080-8E9C-44B017B64104}"/>
               </a:ext>
             </a:extLst>
           </p:cNvPr>
@@ -5637,7 +7805,7 @@
           <p:cNvPr id="4" name="chapter-footer">
             <a:extLst xmlns:a="http://schemas.openxmlformats.org/drawingml/2006/main">
               <a:ext uri="{FF2B5EF4-FFF2-40B4-BE49-F238E27FC236}">
-                <a16:creationId xmlns:a16="http://schemas.microsoft.com/office/drawing/2014/main" id="{272FBE45-16B2-4001-A07A-4EEBBE5EDDF7}"/>
+                <a16:creationId xmlns:a16="http://schemas.microsoft.com/office/drawing/2014/main" id="{6F5787BA-0514-4F6D-B044-F564790EA366}"/>
               </a:ext>
             </a:extLst>
           </p:cNvPr>
@@ -5695,7 +7863,7 @@
           <p:cNvPr id="5" name="section-title">
             <a:extLst xmlns:a="http://schemas.openxmlformats.org/drawingml/2006/main">
               <a:ext uri="{FF2B5EF4-FFF2-40B4-BE49-F238E27FC236}">
-                <a16:creationId xmlns:a16="http://schemas.microsoft.com/office/drawing/2014/main" id="{9FBC0376-2CF9-4C43-BFA6-D46A183C242E}"/>
+                <a16:creationId xmlns:a16="http://schemas.microsoft.com/office/drawing/2014/main" id="{B31B9A26-61E3-4F7A-A1B1-F8E69F12A250}"/>
               </a:ext>
             </a:extLst>
           </p:cNvPr>
@@ -5753,7 +7921,7 @@
           <p:cNvPr id="6" name="section-explanation">
             <a:extLst xmlns:a="http://schemas.openxmlformats.org/drawingml/2006/main">
               <a:ext uri="{FF2B5EF4-FFF2-40B4-BE49-F238E27FC236}">
-                <a16:creationId xmlns:a16="http://schemas.microsoft.com/office/drawing/2014/main" id="{4639FEC4-6B65-4777-8348-0CE59C9F891B}"/>
+                <a16:creationId xmlns:a16="http://schemas.microsoft.com/office/drawing/2014/main" id="{69B8BB36-A72A-49B1-A959-3AB73D2FDC20}"/>
               </a:ext>
             </a:extLst>
           </p:cNvPr>
@@ -5811,7 +7979,7 @@
           <p:cNvPr id="7" name="point-band-1">
             <a:extLst xmlns:a="http://schemas.openxmlformats.org/drawingml/2006/main">
               <a:ext uri="{FF2B5EF4-FFF2-40B4-BE49-F238E27FC236}">
-                <a16:creationId xmlns:a16="http://schemas.microsoft.com/office/drawing/2014/main" id="{73ED24B6-06F1-47B0-A78E-74B79DD5B105}"/>
+                <a16:creationId xmlns:a16="http://schemas.microsoft.com/office/drawing/2014/main" id="{A77A2CF1-E0AF-409F-B359-DFA29ACF11AD}"/>
               </a:ext>
             </a:extLst>
           </p:cNvPr>
@@ -5844,7 +8012,7 @@
           <p:cNvPr id="8" name="point-1">
             <a:extLst xmlns:a="http://schemas.openxmlformats.org/drawingml/2006/main">
               <a:ext uri="{FF2B5EF4-FFF2-40B4-BE49-F238E27FC236}">
-                <a16:creationId xmlns:a16="http://schemas.microsoft.com/office/drawing/2014/main" id="{0264CFCB-00F7-4870-8D8B-85974F94F709}"/>
+                <a16:creationId xmlns:a16="http://schemas.microsoft.com/office/drawing/2014/main" id="{B2ACA0A8-259B-4599-A4A5-8DACB69C9344}"/>
               </a:ext>
             </a:extLst>
           </p:cNvPr>
@@ -5902,7 +8070,7 @@
           <p:cNvPr id="9" name="point-band-2">
             <a:extLst xmlns:a="http://schemas.openxmlformats.org/drawingml/2006/main">
               <a:ext uri="{FF2B5EF4-FFF2-40B4-BE49-F238E27FC236}">
-                <a16:creationId xmlns:a16="http://schemas.microsoft.com/office/drawing/2014/main" id="{C19AEE4E-DB7F-49C3-BCA2-A238D0060D95}"/>
+                <a16:creationId xmlns:a16="http://schemas.microsoft.com/office/drawing/2014/main" id="{2BF0B371-092F-4B44-8A2C-3483647EF0AA}"/>
               </a:ext>
             </a:extLst>
           </p:cNvPr>
@@ -5935,7 +8103,7 @@
           <p:cNvPr id="10" name="point-2">
             <a:extLst xmlns:a="http://schemas.openxmlformats.org/drawingml/2006/main">
               <a:ext uri="{FF2B5EF4-FFF2-40B4-BE49-F238E27FC236}">
-                <a16:creationId xmlns:a16="http://schemas.microsoft.com/office/drawing/2014/main" id="{6D7251F2-6890-4475-BCBE-9C1CD74C3175}"/>
+                <a16:creationId xmlns:a16="http://schemas.microsoft.com/office/drawing/2014/main" id="{7BEDC43D-D9D7-4EE9-86E8-74AC984D0D0C}"/>
               </a:ext>
             </a:extLst>
           </p:cNvPr>
@@ -5993,7 +8161,7 @@
           <p:cNvPr id="11" name="point-band-3">
             <a:extLst xmlns:a="http://schemas.openxmlformats.org/drawingml/2006/main">
               <a:ext uri="{FF2B5EF4-FFF2-40B4-BE49-F238E27FC236}">
-                <a16:creationId xmlns:a16="http://schemas.microsoft.com/office/drawing/2014/main" id="{77052196-6327-41EA-9CD9-895AAC046849}"/>
+                <a16:creationId xmlns:a16="http://schemas.microsoft.com/office/drawing/2014/main" id="{08C294C5-8C87-4527-BF6C-A47F2F38D3FC}"/>
               </a:ext>
             </a:extLst>
           </p:cNvPr>
@@ -6026,7 +8194,7 @@
           <p:cNvPr id="12" name="point-3">
             <a:extLst xmlns:a="http://schemas.openxmlformats.org/drawingml/2006/main">
               <a:ext uri="{FF2B5EF4-FFF2-40B4-BE49-F238E27FC236}">
-                <a16:creationId xmlns:a16="http://schemas.microsoft.com/office/drawing/2014/main" id="{9425CAAB-8B41-4B9A-BB0C-8D74B7161E24}"/>
+                <a16:creationId xmlns:a16="http://schemas.microsoft.com/office/drawing/2014/main" id="{05659363-80DE-46CB-A7ED-B5BDA71C1D81}"/>
               </a:ext>
             </a:extLst>
           </p:cNvPr>
@@ -6082,7 +8250,7 @@
     </p:spTree>
     <p:extLst>
       <p:ext uri="{BB962C8B-B14F-4D97-AF65-F5344CB8AC3E}">
-        <p14:creationId xmlns:p14="http://schemas.microsoft.com/office/powerpoint/2010/main" val="1716778306"/>
+        <p14:creationId xmlns:p14="http://schemas.microsoft.com/office/powerpoint/2010/main" val="1605544224"/>
       </p:ext>
     </p:extLst>
   </p:cSld>
@@ -6113,7 +8281,7 @@
           <p:cNvPr id="9" name="accent-line">
             <a:extLst xmlns:a="http://schemas.openxmlformats.org/drawingml/2006/main">
               <a:ext uri="{FF2B5EF4-FFF2-40B4-BE49-F238E27FC236}">
-                <a16:creationId xmlns:a16="http://schemas.microsoft.com/office/drawing/2014/main" id="{41BE510B-AF4A-48FC-9A40-8FE8CCC6767C}"/>
+                <a16:creationId xmlns:a16="http://schemas.microsoft.com/office/drawing/2014/main" id="{FA766F36-4B8D-4774-BBE5-2541BDB526C7}"/>
               </a:ext>
             </a:extLst>
           </p:cNvPr>
@@ -6146,7 +8314,7 @@
           <p:cNvPr id="2" name="chapter-label">
             <a:extLst xmlns:a="http://schemas.openxmlformats.org/drawingml/2006/main">
               <a:ext uri="{FF2B5EF4-FFF2-40B4-BE49-F238E27FC236}">
-                <a16:creationId xmlns:a16="http://schemas.microsoft.com/office/drawing/2014/main" id="{C99386B8-71A0-4C03-99D5-9664299C5EBA}"/>
+                <a16:creationId xmlns:a16="http://schemas.microsoft.com/office/drawing/2014/main" id="{FEAF6820-6582-4976-95D5-7E5B6C1A0E66}"/>
               </a:ext>
             </a:extLst>
           </p:cNvPr>
@@ -6204,7 +8372,7 @@
           <p:cNvPr id="3" name="slide-number">
             <a:extLst xmlns:a="http://schemas.openxmlformats.org/drawingml/2006/main">
               <a:ext uri="{FF2B5EF4-FFF2-40B4-BE49-F238E27FC236}">
-                <a16:creationId xmlns:a16="http://schemas.microsoft.com/office/drawing/2014/main" id="{321CF574-11AF-4C21-92FD-0ABAB715FE1A}"/>
+                <a16:creationId xmlns:a16="http://schemas.microsoft.com/office/drawing/2014/main" id="{80687D9F-096E-4DCA-874F-4B8838D13107}"/>
               </a:ext>
             </a:extLst>
           </p:cNvPr>
@@ -6262,7 +8430,7 @@
           <p:cNvPr id="4" name="chapter-footer">
             <a:extLst xmlns:a="http://schemas.openxmlformats.org/drawingml/2006/main">
               <a:ext uri="{FF2B5EF4-FFF2-40B4-BE49-F238E27FC236}">
-                <a16:creationId xmlns:a16="http://schemas.microsoft.com/office/drawing/2014/main" id="{2074D71C-ED07-4C9D-948F-FB43859A1403}"/>
+                <a16:creationId xmlns:a16="http://schemas.microsoft.com/office/drawing/2014/main" id="{D5AF3604-022F-463F-A90A-2F23B32DB739}"/>
               </a:ext>
             </a:extLst>
           </p:cNvPr>
@@ -6320,7 +8488,7 @@
           <p:cNvPr id="5" name="section-title">
             <a:extLst xmlns:a="http://schemas.openxmlformats.org/drawingml/2006/main">
               <a:ext uri="{FF2B5EF4-FFF2-40B4-BE49-F238E27FC236}">
-                <a16:creationId xmlns:a16="http://schemas.microsoft.com/office/drawing/2014/main" id="{D728E92B-1621-45BC-BF6F-154EFD450CAE}"/>
+                <a16:creationId xmlns:a16="http://schemas.microsoft.com/office/drawing/2014/main" id="{E8103670-88F6-4DF3-8E08-BECF0049C7A2}"/>
               </a:ext>
             </a:extLst>
           </p:cNvPr>
@@ -6378,7 +8546,7 @@
           <p:cNvPr id="6" name="section-explanation">
             <a:extLst xmlns:a="http://schemas.openxmlformats.org/drawingml/2006/main">
               <a:ext uri="{FF2B5EF4-FFF2-40B4-BE49-F238E27FC236}">
-                <a16:creationId xmlns:a16="http://schemas.microsoft.com/office/drawing/2014/main" id="{125BCFB6-EC6A-4E5F-A811-4F561579CCCB}"/>
+                <a16:creationId xmlns:a16="http://schemas.microsoft.com/office/drawing/2014/main" id="{E8AA759C-9FA3-4499-9D22-89D2F2F397CA}"/>
               </a:ext>
             </a:extLst>
           </p:cNvPr>
@@ -6436,7 +8604,7 @@
           <p:cNvPr id="7" name="column-rule">
             <a:extLst xmlns:a="http://schemas.openxmlformats.org/drawingml/2006/main">
               <a:ext uri="{FF2B5EF4-FFF2-40B4-BE49-F238E27FC236}">
-                <a16:creationId xmlns:a16="http://schemas.microsoft.com/office/drawing/2014/main" id="{2E115B80-AB27-4273-A193-C539AC63F0F4}"/>
+                <a16:creationId xmlns:a16="http://schemas.microsoft.com/office/drawing/2014/main" id="{06169B5E-0B61-435C-AB07-7F86C8F4DD0D}"/>
               </a:ext>
             </a:extLst>
           </p:cNvPr>
@@ -6469,7 +8637,7 @@
           <p:cNvPr id="8" name="section-points">
             <a:extLst xmlns:a="http://schemas.openxmlformats.org/drawingml/2006/main">
               <a:ext uri="{FF2B5EF4-FFF2-40B4-BE49-F238E27FC236}">
-                <a16:creationId xmlns:a16="http://schemas.microsoft.com/office/drawing/2014/main" id="{9C48D62F-999F-41A0-9601-814D4C1AD8DB}"/>
+                <a16:creationId xmlns:a16="http://schemas.microsoft.com/office/drawing/2014/main" id="{FF206B7E-E8AA-460A-A221-3EA632157E83}"/>
               </a:ext>
             </a:extLst>
           </p:cNvPr>
@@ -6581,7 +8749,7 @@
     </p:spTree>
     <p:extLst>
       <p:ext uri="{BB962C8B-B14F-4D97-AF65-F5344CB8AC3E}">
-        <p14:creationId xmlns:p14="http://schemas.microsoft.com/office/powerpoint/2010/main" val="1654783348"/>
+        <p14:creationId xmlns:p14="http://schemas.microsoft.com/office/powerpoint/2010/main" val="1947226583"/>
       </p:ext>
     </p:extLst>
   </p:cSld>
@@ -6612,7 +8780,7 @@
           <p:cNvPr id="13" name="accent-line">
             <a:extLst xmlns:a="http://schemas.openxmlformats.org/drawingml/2006/main">
               <a:ext uri="{FF2B5EF4-FFF2-40B4-BE49-F238E27FC236}">
-                <a16:creationId xmlns:a16="http://schemas.microsoft.com/office/drawing/2014/main" id="{4D12598C-30A8-4E1D-BE2A-0656C6A63DD0}"/>
+                <a16:creationId xmlns:a16="http://schemas.microsoft.com/office/drawing/2014/main" id="{93EE5CB3-B494-4D9D-B76D-8D5C125FE60C}"/>
               </a:ext>
             </a:extLst>
           </p:cNvPr>
@@ -6645,7 +8813,7 @@
           <p:cNvPr id="2" name="chapter-label">
             <a:extLst xmlns:a="http://schemas.openxmlformats.org/drawingml/2006/main">
               <a:ext uri="{FF2B5EF4-FFF2-40B4-BE49-F238E27FC236}">
-                <a16:creationId xmlns:a16="http://schemas.microsoft.com/office/drawing/2014/main" id="{44210382-B89C-45CD-BB9C-15CE072B3A4E}"/>
+                <a16:creationId xmlns:a16="http://schemas.microsoft.com/office/drawing/2014/main" id="{02EC91CD-D555-4E44-A9F8-AD03FFA01C48}"/>
               </a:ext>
             </a:extLst>
           </p:cNvPr>
@@ -6703,7 +8871,7 @@
           <p:cNvPr id="3" name="slide-number">
             <a:extLst xmlns:a="http://schemas.openxmlformats.org/drawingml/2006/main">
               <a:ext uri="{FF2B5EF4-FFF2-40B4-BE49-F238E27FC236}">
-                <a16:creationId xmlns:a16="http://schemas.microsoft.com/office/drawing/2014/main" id="{0C8AA024-2A7D-4066-AFAB-B05B303171AE}"/>
+                <a16:creationId xmlns:a16="http://schemas.microsoft.com/office/drawing/2014/main" id="{754B1F3B-1A6A-4C35-96CE-F0AEB4447F86}"/>
               </a:ext>
             </a:extLst>
           </p:cNvPr>
@@ -6761,7 +8929,7 @@
           <p:cNvPr id="4" name="chapter-footer">
             <a:extLst xmlns:a="http://schemas.openxmlformats.org/drawingml/2006/main">
               <a:ext uri="{FF2B5EF4-FFF2-40B4-BE49-F238E27FC236}">
-                <a16:creationId xmlns:a16="http://schemas.microsoft.com/office/drawing/2014/main" id="{A116F2C6-0BCA-4905-B3DE-11F1B75BB77F}"/>
+                <a16:creationId xmlns:a16="http://schemas.microsoft.com/office/drawing/2014/main" id="{CE0D6419-B454-4E75-B33B-FC85709B5FCC}"/>
               </a:ext>
             </a:extLst>
           </p:cNvPr>
@@ -6819,7 +8987,7 @@
           <p:cNvPr id="5" name="section-title">
             <a:extLst xmlns:a="http://schemas.openxmlformats.org/drawingml/2006/main">
               <a:ext uri="{FF2B5EF4-FFF2-40B4-BE49-F238E27FC236}">
-                <a16:creationId xmlns:a16="http://schemas.microsoft.com/office/drawing/2014/main" id="{85B62A6A-BE07-42FD-AA5E-A7C4C927961B}"/>
+                <a16:creationId xmlns:a16="http://schemas.microsoft.com/office/drawing/2014/main" id="{FCFFC236-1855-4E88-A3D0-0C32497C2B56}"/>
               </a:ext>
             </a:extLst>
           </p:cNvPr>
@@ -6877,7 +9045,7 @@
           <p:cNvPr id="6" name="section-explanation">
             <a:extLst xmlns:a="http://schemas.openxmlformats.org/drawingml/2006/main">
               <a:ext uri="{FF2B5EF4-FFF2-40B4-BE49-F238E27FC236}">
-                <a16:creationId xmlns:a16="http://schemas.microsoft.com/office/drawing/2014/main" id="{AB1AA5A5-06BD-48D0-942A-D63AECFFE24A}"/>
+                <a16:creationId xmlns:a16="http://schemas.microsoft.com/office/drawing/2014/main" id="{CD9424FB-2852-4DBF-8AEB-3977231DAC0C}"/>
               </a:ext>
             </a:extLst>
           </p:cNvPr>
@@ -6935,7 +9103,7 @@
           <p:cNvPr id="7" name="point-band-1">
             <a:extLst xmlns:a="http://schemas.openxmlformats.org/drawingml/2006/main">
               <a:ext uri="{FF2B5EF4-FFF2-40B4-BE49-F238E27FC236}">
-                <a16:creationId xmlns:a16="http://schemas.microsoft.com/office/drawing/2014/main" id="{F88236C6-2461-433A-898C-27C1DDB20569}"/>
+                <a16:creationId xmlns:a16="http://schemas.microsoft.com/office/drawing/2014/main" id="{F75F3736-7771-4503-805E-272CB6824D1F}"/>
               </a:ext>
             </a:extLst>
           </p:cNvPr>
@@ -6968,7 +9136,7 @@
           <p:cNvPr id="8" name="point-1">
             <a:extLst xmlns:a="http://schemas.openxmlformats.org/drawingml/2006/main">
               <a:ext uri="{FF2B5EF4-FFF2-40B4-BE49-F238E27FC236}">
-                <a16:creationId xmlns:a16="http://schemas.microsoft.com/office/drawing/2014/main" id="{8BE4DCCB-9F28-4C58-8936-56DFA51DA94F}"/>
+                <a16:creationId xmlns:a16="http://schemas.microsoft.com/office/drawing/2014/main" id="{422F0E49-BFB3-488F-9EF9-A34720E3FC5D}"/>
               </a:ext>
             </a:extLst>
           </p:cNvPr>
@@ -7026,7 +9194,7 @@
           <p:cNvPr id="9" name="point-band-2">
             <a:extLst xmlns:a="http://schemas.openxmlformats.org/drawingml/2006/main">
               <a:ext uri="{FF2B5EF4-FFF2-40B4-BE49-F238E27FC236}">
-                <a16:creationId xmlns:a16="http://schemas.microsoft.com/office/drawing/2014/main" id="{50B11EB8-D55C-404E-8CBB-18D1770D5AA4}"/>
+                <a16:creationId xmlns:a16="http://schemas.microsoft.com/office/drawing/2014/main" id="{60A095E3-6767-486F-82AF-2135E732DF71}"/>
               </a:ext>
             </a:extLst>
           </p:cNvPr>
@@ -7059,7 +9227,7 @@
           <p:cNvPr id="10" name="point-2">
             <a:extLst xmlns:a="http://schemas.openxmlformats.org/drawingml/2006/main">
               <a:ext uri="{FF2B5EF4-FFF2-40B4-BE49-F238E27FC236}">
-                <a16:creationId xmlns:a16="http://schemas.microsoft.com/office/drawing/2014/main" id="{0D6C8BAD-5524-4D3C-8AAB-1EDF7F3546DE}"/>
+                <a16:creationId xmlns:a16="http://schemas.microsoft.com/office/drawing/2014/main" id="{191F7582-6726-433A-A903-DE23C30FA893}"/>
               </a:ext>
             </a:extLst>
           </p:cNvPr>
@@ -7117,7 +9285,7 @@
           <p:cNvPr id="11" name="point-band-3">
             <a:extLst xmlns:a="http://schemas.openxmlformats.org/drawingml/2006/main">
               <a:ext uri="{FF2B5EF4-FFF2-40B4-BE49-F238E27FC236}">
-                <a16:creationId xmlns:a16="http://schemas.microsoft.com/office/drawing/2014/main" id="{450D1C84-53A8-49AF-AA25-6BEE971A8C0B}"/>
+                <a16:creationId xmlns:a16="http://schemas.microsoft.com/office/drawing/2014/main" id="{6A2B96A6-34E8-4DAC-8BC1-C238C2FF5B53}"/>
               </a:ext>
             </a:extLst>
           </p:cNvPr>
@@ -7150,7 +9318,7 @@
           <p:cNvPr id="12" name="point-3">
             <a:extLst xmlns:a="http://schemas.openxmlformats.org/drawingml/2006/main">
               <a:ext uri="{FF2B5EF4-FFF2-40B4-BE49-F238E27FC236}">
-                <a16:creationId xmlns:a16="http://schemas.microsoft.com/office/drawing/2014/main" id="{D71262AD-231C-4C70-B528-6FB63A11214E}"/>
+                <a16:creationId xmlns:a16="http://schemas.microsoft.com/office/drawing/2014/main" id="{DDEF550D-2A88-4473-A69F-8B5C75F5A71C}"/>
               </a:ext>
             </a:extLst>
           </p:cNvPr>
@@ -7206,7 +9374,7 @@
     </p:spTree>
     <p:extLst>
       <p:ext uri="{BB962C8B-B14F-4D97-AF65-F5344CB8AC3E}">
-        <p14:creationId xmlns:p14="http://schemas.microsoft.com/office/powerpoint/2010/main" val="546515272"/>
+        <p14:creationId xmlns:p14="http://schemas.microsoft.com/office/powerpoint/2010/main" val="1670067343"/>
       </p:ext>
     </p:extLst>
   </p:cSld>
@@ -7234,10 +9402,10 @@
       </p:grpSpPr>
       <p:sp>
         <p:nvSpPr>
-          <p:cNvPr id="18" name="accent-line">
-            <a:extLst xmlns:a="http://schemas.openxmlformats.org/drawingml/2006/main">
-              <a:ext uri="{FF2B5EF4-FFF2-40B4-BE49-F238E27FC236}">
-                <a16:creationId xmlns:a16="http://schemas.microsoft.com/office/drawing/2014/main" id="{46152310-7961-4050-8498-BAFC9D9D6874}"/>
+          <p:cNvPr id="9" name="accent-line">
+            <a:extLst xmlns:a="http://schemas.openxmlformats.org/drawingml/2006/main">
+              <a:ext uri="{FF2B5EF4-FFF2-40B4-BE49-F238E27FC236}">
+                <a16:creationId xmlns:a16="http://schemas.microsoft.com/office/drawing/2014/main" id="{9CE65238-1B8F-4DC6-A583-191A275D50FD}"/>
               </a:ext>
             </a:extLst>
           </p:cNvPr>
@@ -7270,7 +9438,7 @@
           <p:cNvPr id="2" name="chapter-label">
             <a:extLst xmlns:a="http://schemas.openxmlformats.org/drawingml/2006/main">
               <a:ext uri="{FF2B5EF4-FFF2-40B4-BE49-F238E27FC236}">
-                <a16:creationId xmlns:a16="http://schemas.microsoft.com/office/drawing/2014/main" id="{16B4A380-DF74-4421-8580-76DA18B763E0}"/>
+                <a16:creationId xmlns:a16="http://schemas.microsoft.com/office/drawing/2014/main" id="{10588AD9-19C7-4324-B23B-FD998426CE53}"/>
               </a:ext>
             </a:extLst>
           </p:cNvPr>
@@ -7318,7 +9486,7 @@
                 <a:ea typeface="Helvetica Neue"/>
                 <a:cs typeface="Helvetica Neue"/>
               </a:rPr>
-              <a:t>EXAM CHECK  /  04</a:t>
+              <a:t>CORE IDEA 07  /  04</a:t>
             </a:r>
           </a:p>
         </p:txBody>
@@ -7328,7 +9496,7 @@
           <p:cNvPr id="3" name="slide-number">
             <a:extLst xmlns:a="http://schemas.openxmlformats.org/drawingml/2006/main">
               <a:ext uri="{FF2B5EF4-FFF2-40B4-BE49-F238E27FC236}">
-                <a16:creationId xmlns:a16="http://schemas.microsoft.com/office/drawing/2014/main" id="{BA77B533-2BC3-4B34-B06E-5606980AE1F5}"/>
+                <a16:creationId xmlns:a16="http://schemas.microsoft.com/office/drawing/2014/main" id="{79F85F45-6E9A-4077-A6DC-B59D0CBF8A58}"/>
               </a:ext>
             </a:extLst>
           </p:cNvPr>
@@ -7386,7 +9554,7 @@
           <p:cNvPr id="4" name="chapter-footer">
             <a:extLst xmlns:a="http://schemas.openxmlformats.org/drawingml/2006/main">
               <a:ext uri="{FF2B5EF4-FFF2-40B4-BE49-F238E27FC236}">
-                <a16:creationId xmlns:a16="http://schemas.microsoft.com/office/drawing/2014/main" id="{4640D4A3-17F8-4FDC-B17A-71AA67E5BA47}"/>
+                <a16:creationId xmlns:a16="http://schemas.microsoft.com/office/drawing/2014/main" id="{60D9BEC5-0AA4-4451-9315-4152D21731F0}"/>
               </a:ext>
             </a:extLst>
           </p:cNvPr>
@@ -7441,138 +9609,22 @@
       </p:sp>
       <p:sp>
         <p:nvSpPr>
-          <p:cNvPr id="5" name="exam-title">
-            <a:extLst xmlns:a="http://schemas.openxmlformats.org/drawingml/2006/main">
-              <a:ext uri="{FF2B5EF4-FFF2-40B4-BE49-F238E27FC236}">
-                <a16:creationId xmlns:a16="http://schemas.microsoft.com/office/drawing/2014/main" id="{F3A69D62-001E-4166-A482-C926A4BA972A}"/>
-              </a:ext>
-            </a:extLst>
-          </p:cNvPr>
-          <p:cNvSpPr>
-            <a:spLocks xmlns:a="http://schemas.openxmlformats.org/drawingml/2006/main" noGrp="1"/>
-          </p:cNvSpPr>
-          <p:nvPr/>
-        </p:nvSpPr>
-        <p:spPr>
-          <a:xfrm xmlns:a="http://schemas.openxmlformats.org/drawingml/2006/main">
-            <a:off x="390525" y="981075"/>
-            <a:ext cx="10668000" cy="781050"/>
-          </a:xfrm>
-          <a:prstGeom xmlns:a="http://schemas.openxmlformats.org/drawingml/2006/main" prst="rect">
-            <a:avLst/>
-          </a:prstGeom>
-          <a:noFill xmlns:a="http://schemas.openxmlformats.org/drawingml/2006/main"/>
-          <a:ln xmlns:a="http://schemas.openxmlformats.org/drawingml/2006/main" w="0">
-            <a:noFill/>
-            <a:prstDash val="solid"/>
-          </a:ln>
-        </p:spPr>
-        <p:txBody>
-          <a:bodyPr xmlns:a="http://schemas.openxmlformats.org/drawingml/2006/main" anchor="t">
-            <a:noAutofit/>
-          </a:bodyPr>
-          <a:lstStyle xmlns:a="http://schemas.openxmlformats.org/drawingml/2006/main"/>
-          <a:p xmlns:a="http://schemas.openxmlformats.org/drawingml/2006/main">
-            <a:pPr algn="l">
-              <a:defRPr sz="3150" b="1">
-                <a:solidFill>
-                  <a:srgbClr val="111111"/>
-                </a:solidFill>
-                <a:latin typeface="Helvetica Neue"/>
-                <a:ea typeface="Helvetica Neue"/>
-                <a:cs typeface="Helvetica Neue"/>
-              </a:defRPr>
-            </a:pPr>
-            <a:r>
-              <a:rPr sz="3150" b="1">
-                <a:solidFill>
-                  <a:srgbClr val="111111"/>
-                </a:solidFill>
-                <a:latin typeface="Helvetica Neue"/>
-                <a:ea typeface="Helvetica Neue"/>
-                <a:cs typeface="Helvetica Neue"/>
-              </a:rPr>
-              <a:t>Can you answer these without notes?</a:t>
-            </a:r>
-          </a:p>
-        </p:txBody>
-      </p:sp>
-      <p:sp>
-        <p:nvSpPr>
-          <p:cNvPr id="6" name="exam-number-1">
-            <a:extLst xmlns:a="http://schemas.openxmlformats.org/drawingml/2006/main">
-              <a:ext uri="{FF2B5EF4-FFF2-40B4-BE49-F238E27FC236}">
-                <a16:creationId xmlns:a16="http://schemas.microsoft.com/office/drawing/2014/main" id="{69793B58-F798-4964-81B1-B13DC4338179}"/>
-              </a:ext>
-            </a:extLst>
-          </p:cNvPr>
-          <p:cNvSpPr>
-            <a:spLocks xmlns:a="http://schemas.openxmlformats.org/drawingml/2006/main" noGrp="1"/>
-          </p:cNvSpPr>
-          <p:nvPr/>
-        </p:nvSpPr>
-        <p:spPr>
-          <a:xfrm xmlns:a="http://schemas.openxmlformats.org/drawingml/2006/main">
-            <a:off x="390525" y="2238375"/>
-            <a:ext cx="590550" cy="400050"/>
-          </a:xfrm>
-          <a:prstGeom xmlns:a="http://schemas.openxmlformats.org/drawingml/2006/main" prst="rect">
-            <a:avLst/>
-          </a:prstGeom>
-          <a:noFill xmlns:a="http://schemas.openxmlformats.org/drawingml/2006/main"/>
-          <a:ln xmlns:a="http://schemas.openxmlformats.org/drawingml/2006/main" w="0">
-            <a:noFill/>
-            <a:prstDash val="solid"/>
-          </a:ln>
-        </p:spPr>
-        <p:txBody>
-          <a:bodyPr xmlns:a="http://schemas.openxmlformats.org/drawingml/2006/main" anchor="t">
-            <a:noAutofit/>
-          </a:bodyPr>
-          <a:lstStyle xmlns:a="http://schemas.openxmlformats.org/drawingml/2006/main"/>
-          <a:p xmlns:a="http://schemas.openxmlformats.org/drawingml/2006/main">
-            <a:pPr algn="l">
-              <a:defRPr sz="1725" b="1">
-                <a:solidFill>
-                  <a:srgbClr val="73C8FF"/>
-                </a:solidFill>
-                <a:latin typeface="Helvetica Neue"/>
-                <a:ea typeface="Helvetica Neue"/>
-                <a:cs typeface="Helvetica Neue"/>
-              </a:defRPr>
-            </a:pPr>
-            <a:r>
-              <a:rPr sz="1725" b="1">
-                <a:solidFill>
-                  <a:srgbClr val="73C8FF"/>
-                </a:solidFill>
-                <a:latin typeface="Helvetica Neue"/>
-                <a:ea typeface="Helvetica Neue"/>
-                <a:cs typeface="Helvetica Neue"/>
-              </a:rPr>
-              <a:t>01</a:t>
-            </a:r>
-          </a:p>
-        </p:txBody>
-      </p:sp>
-      <p:sp>
-        <p:nvSpPr>
-          <p:cNvPr id="7" name="exam-question-1">
-            <a:extLst xmlns:a="http://schemas.openxmlformats.org/drawingml/2006/main">
-              <a:ext uri="{FF2B5EF4-FFF2-40B4-BE49-F238E27FC236}">
-                <a16:creationId xmlns:a16="http://schemas.microsoft.com/office/drawing/2014/main" id="{D18CDBCB-F70D-460A-8C91-EEA0A2103F8D}"/>
-              </a:ext>
-            </a:extLst>
-          </p:cNvPr>
-          <p:cNvSpPr>
-            <a:spLocks xmlns:a="http://schemas.openxmlformats.org/drawingml/2006/main" noGrp="1"/>
-          </p:cNvSpPr>
-          <p:nvPr/>
-        </p:nvSpPr>
-        <p:spPr>
-          <a:xfrm xmlns:a="http://schemas.openxmlformats.org/drawingml/2006/main">
-            <a:off x="1076325" y="2238375"/>
-            <a:ext cx="4762500" cy="895350"/>
+          <p:cNvPr id="5" name="section-title">
+            <a:extLst xmlns:a="http://schemas.openxmlformats.org/drawingml/2006/main">
+              <a:ext uri="{FF2B5EF4-FFF2-40B4-BE49-F238E27FC236}">
+                <a16:creationId xmlns:a16="http://schemas.microsoft.com/office/drawing/2014/main" id="{C2DC54A3-03A6-4239-91A5-EC7B1CF42527}"/>
+              </a:ext>
+            </a:extLst>
+          </p:cNvPr>
+          <p:cNvSpPr>
+            <a:spLocks xmlns:a="http://schemas.openxmlformats.org/drawingml/2006/main" noGrp="1"/>
+          </p:cNvSpPr>
+          <p:nvPr/>
+        </p:nvSpPr>
+        <p:spPr>
+          <a:xfrm xmlns:a="http://schemas.openxmlformats.org/drawingml/2006/main">
+            <a:off x="390525" y="971550"/>
+            <a:ext cx="11144250" cy="971550"/>
           </a:xfrm>
           <a:prstGeom xmlns:a="http://schemas.openxmlformats.org/drawingml/2006/main" prst="rect">
             <a:avLst/>
@@ -7590,105 +9642,47 @@
           <a:lstStyle xmlns:a="http://schemas.openxmlformats.org/drawingml/2006/main"/>
           <a:p xmlns:a="http://schemas.openxmlformats.org/drawingml/2006/main">
             <a:pPr algn="l">
-              <a:defRPr sz="1575" b="1">
-                <a:solidFill>
-                  <a:srgbClr val="111111"/>
-                </a:solidFill>
-                <a:latin typeface="Helvetica Neue"/>
-                <a:ea typeface="Helvetica Neue"/>
-                <a:cs typeface="Helvetica Neue"/>
-              </a:defRPr>
-            </a:pPr>
-            <a:r>
-              <a:rPr sz="1575" b="1">
-                <a:solidFill>
-                  <a:srgbClr val="111111"/>
-                </a:solidFill>
-                <a:latin typeface="Helvetica Neue"/>
-                <a:ea typeface="Helvetica Neue"/>
-                <a:cs typeface="Helvetica Neue"/>
-              </a:rPr>
-              <a:t>What distinguishes a workflow from an agent?</a:t>
-            </a:r>
-          </a:p>
-        </p:txBody>
-      </p:sp>
-      <p:sp>
-        <p:nvSpPr>
-          <p:cNvPr id="8" name="exam-number-2">
-            <a:extLst xmlns:a="http://schemas.openxmlformats.org/drawingml/2006/main">
-              <a:ext uri="{FF2B5EF4-FFF2-40B4-BE49-F238E27FC236}">
-                <a16:creationId xmlns:a16="http://schemas.microsoft.com/office/drawing/2014/main" id="{3A9BA9DA-A077-4D88-BD6D-0F8639AE7BFD}"/>
-              </a:ext>
-            </a:extLst>
-          </p:cNvPr>
-          <p:cNvSpPr>
-            <a:spLocks xmlns:a="http://schemas.openxmlformats.org/drawingml/2006/main" noGrp="1"/>
-          </p:cNvSpPr>
-          <p:nvPr/>
-        </p:nvSpPr>
-        <p:spPr>
-          <a:xfrm xmlns:a="http://schemas.openxmlformats.org/drawingml/2006/main">
-            <a:off x="6191250" y="2238375"/>
-            <a:ext cx="590550" cy="400050"/>
-          </a:xfrm>
-          <a:prstGeom xmlns:a="http://schemas.openxmlformats.org/drawingml/2006/main" prst="rect">
-            <a:avLst/>
-          </a:prstGeom>
-          <a:noFill xmlns:a="http://schemas.openxmlformats.org/drawingml/2006/main"/>
-          <a:ln xmlns:a="http://schemas.openxmlformats.org/drawingml/2006/main" w="0">
-            <a:noFill/>
-            <a:prstDash val="solid"/>
-          </a:ln>
-        </p:spPr>
-        <p:txBody>
-          <a:bodyPr xmlns:a="http://schemas.openxmlformats.org/drawingml/2006/main" anchor="t">
-            <a:noAutofit/>
-          </a:bodyPr>
-          <a:lstStyle xmlns:a="http://schemas.openxmlformats.org/drawingml/2006/main"/>
-          <a:p xmlns:a="http://schemas.openxmlformats.org/drawingml/2006/main">
-            <a:pPr algn="l">
-              <a:defRPr sz="1725" b="1">
-                <a:solidFill>
-                  <a:srgbClr val="73C8FF"/>
-                </a:solidFill>
-                <a:latin typeface="Helvetica Neue"/>
-                <a:ea typeface="Helvetica Neue"/>
-                <a:cs typeface="Helvetica Neue"/>
-              </a:defRPr>
-            </a:pPr>
-            <a:r>
-              <a:rPr sz="1725" b="1">
-                <a:solidFill>
-                  <a:srgbClr val="73C8FF"/>
-                </a:solidFill>
-                <a:latin typeface="Helvetica Neue"/>
-                <a:ea typeface="Helvetica Neue"/>
-                <a:cs typeface="Helvetica Neue"/>
-              </a:rPr>
-              <a:t>02</a:t>
-            </a:r>
-          </a:p>
-        </p:txBody>
-      </p:sp>
-      <p:sp>
-        <p:nvSpPr>
-          <p:cNvPr id="9" name="exam-question-2">
-            <a:extLst xmlns:a="http://schemas.openxmlformats.org/drawingml/2006/main">
-              <a:ext uri="{FF2B5EF4-FFF2-40B4-BE49-F238E27FC236}">
-                <a16:creationId xmlns:a16="http://schemas.microsoft.com/office/drawing/2014/main" id="{DF4E7790-4433-45A1-8A65-9EE8B1428E71}"/>
-              </a:ext>
-            </a:extLst>
-          </p:cNvPr>
-          <p:cNvSpPr>
-            <a:spLocks xmlns:a="http://schemas.openxmlformats.org/drawingml/2006/main" noGrp="1"/>
-          </p:cNvSpPr>
-          <p:nvPr/>
-        </p:nvSpPr>
-        <p:spPr>
-          <a:xfrm xmlns:a="http://schemas.openxmlformats.org/drawingml/2006/main">
-            <a:off x="6877050" y="2238375"/>
-            <a:ext cx="4762500" cy="895350"/>
+              <a:defRPr sz="3000" b="1">
+                <a:solidFill>
+                  <a:srgbClr val="111111"/>
+                </a:solidFill>
+                <a:latin typeface="Helvetica Neue"/>
+                <a:ea typeface="Helvetica Neue"/>
+                <a:cs typeface="Helvetica Neue"/>
+              </a:defRPr>
+            </a:pPr>
+            <a:r>
+              <a:rPr sz="3000" b="1">
+                <a:solidFill>
+                  <a:srgbClr val="111111"/>
+                </a:solidFill>
+                <a:latin typeface="Helvetica Neue"/>
+                <a:ea typeface="Helvetica Neue"/>
+                <a:cs typeface="Helvetica Neue"/>
+              </a:rPr>
+              <a:t>An extra stage must justify its cost</a:t>
+            </a:r>
+          </a:p>
+        </p:txBody>
+      </p:sp>
+      <p:sp>
+        <p:nvSpPr>
+          <p:cNvPr id="6" name="section-explanation">
+            <a:extLst xmlns:a="http://schemas.openxmlformats.org/drawingml/2006/main">
+              <a:ext uri="{FF2B5EF4-FFF2-40B4-BE49-F238E27FC236}">
+                <a16:creationId xmlns:a16="http://schemas.microsoft.com/office/drawing/2014/main" id="{0D5C3631-C4D0-4348-9C45-CE592587A64C}"/>
+              </a:ext>
+            </a:extLst>
+          </p:cNvPr>
+          <p:cNvSpPr>
+            <a:spLocks xmlns:a="http://schemas.openxmlformats.org/drawingml/2006/main" noGrp="1"/>
+          </p:cNvSpPr>
+          <p:nvPr/>
+        </p:nvSpPr>
+        <p:spPr>
+          <a:xfrm xmlns:a="http://schemas.openxmlformats.org/drawingml/2006/main">
+            <a:off x="390525" y="2381250"/>
+            <a:ext cx="4524375" cy="2905125"/>
           </a:xfrm>
           <a:prstGeom xmlns:a="http://schemas.openxmlformats.org/drawingml/2006/main" prst="rect">
             <a:avLst/>
@@ -7706,105 +9700,80 @@
           <a:lstStyle xmlns:a="http://schemas.openxmlformats.org/drawingml/2006/main"/>
           <a:p xmlns:a="http://schemas.openxmlformats.org/drawingml/2006/main">
             <a:pPr algn="l">
-              <a:defRPr sz="1575" b="1">
-                <a:solidFill>
-                  <a:srgbClr val="111111"/>
-                </a:solidFill>
-                <a:latin typeface="Helvetica Neue"/>
-                <a:ea typeface="Helvetica Neue"/>
-                <a:cs typeface="Helvetica Neue"/>
-              </a:defRPr>
-            </a:pPr>
-            <a:r>
-              <a:rPr sz="1575" b="1">
-                <a:solidFill>
-                  <a:srgbClr val="111111"/>
-                </a:solidFill>
-                <a:latin typeface="Helvetica Neue"/>
-                <a:ea typeface="Helvetica Neue"/>
-                <a:cs typeface="Helvetica Neue"/>
-              </a:rPr>
-              <a:t>Compare prompt chaining and orchestrator-workers.</a:t>
-            </a:r>
-          </a:p>
-        </p:txBody>
-      </p:sp>
-      <p:sp>
-        <p:nvSpPr>
-          <p:cNvPr id="10" name="exam-number-3">
-            <a:extLst xmlns:a="http://schemas.openxmlformats.org/drawingml/2006/main">
-              <a:ext uri="{FF2B5EF4-FFF2-40B4-BE49-F238E27FC236}">
-                <a16:creationId xmlns:a16="http://schemas.microsoft.com/office/drawing/2014/main" id="{2A64B282-6B77-4E2E-A514-2B0D335FFFEE}"/>
-              </a:ext>
-            </a:extLst>
-          </p:cNvPr>
-          <p:cNvSpPr>
-            <a:spLocks xmlns:a="http://schemas.openxmlformats.org/drawingml/2006/main" noGrp="1"/>
-          </p:cNvSpPr>
-          <p:nvPr/>
-        </p:nvSpPr>
-        <p:spPr>
-          <a:xfrm xmlns:a="http://schemas.openxmlformats.org/drawingml/2006/main">
-            <a:off x="390525" y="3495675"/>
-            <a:ext cx="590550" cy="400050"/>
-          </a:xfrm>
-          <a:prstGeom xmlns:a="http://schemas.openxmlformats.org/drawingml/2006/main" prst="rect">
-            <a:avLst/>
-          </a:prstGeom>
-          <a:noFill xmlns:a="http://schemas.openxmlformats.org/drawingml/2006/main"/>
-          <a:ln xmlns:a="http://schemas.openxmlformats.org/drawingml/2006/main" w="0">
-            <a:noFill/>
-            <a:prstDash val="solid"/>
-          </a:ln>
-        </p:spPr>
-        <p:txBody>
-          <a:bodyPr xmlns:a="http://schemas.openxmlformats.org/drawingml/2006/main" anchor="t">
-            <a:noAutofit/>
-          </a:bodyPr>
-          <a:lstStyle xmlns:a="http://schemas.openxmlformats.org/drawingml/2006/main"/>
-          <a:p xmlns:a="http://schemas.openxmlformats.org/drawingml/2006/main">
-            <a:pPr algn="l">
-              <a:defRPr sz="1725" b="1">
-                <a:solidFill>
-                  <a:srgbClr val="73C8FF"/>
-                </a:solidFill>
-                <a:latin typeface="Helvetica Neue"/>
-                <a:ea typeface="Helvetica Neue"/>
-                <a:cs typeface="Helvetica Neue"/>
-              </a:defRPr>
-            </a:pPr>
-            <a:r>
-              <a:rPr sz="1725" b="1">
-                <a:solidFill>
-                  <a:srgbClr val="73C8FF"/>
-                </a:solidFill>
-                <a:latin typeface="Helvetica Neue"/>
-                <a:ea typeface="Helvetica Neue"/>
-                <a:cs typeface="Helvetica Neue"/>
-              </a:rPr>
-              <a:t>03</a:t>
-            </a:r>
-          </a:p>
-        </p:txBody>
-      </p:sp>
-      <p:sp>
-        <p:nvSpPr>
-          <p:cNvPr id="11" name="exam-question-3">
-            <a:extLst xmlns:a="http://schemas.openxmlformats.org/drawingml/2006/main">
-              <a:ext uri="{FF2B5EF4-FFF2-40B4-BE49-F238E27FC236}">
-                <a16:creationId xmlns:a16="http://schemas.microsoft.com/office/drawing/2014/main" id="{6AB8C80F-44F8-4E40-B2F3-4AB17FE38CDA}"/>
-              </a:ext>
-            </a:extLst>
-          </p:cNvPr>
-          <p:cNvSpPr>
-            <a:spLocks xmlns:a="http://schemas.openxmlformats.org/drawingml/2006/main" noGrp="1"/>
-          </p:cNvSpPr>
-          <p:nvPr/>
-        </p:nvSpPr>
-        <p:spPr>
-          <a:xfrm xmlns:a="http://schemas.openxmlformats.org/drawingml/2006/main">
-            <a:off x="1076325" y="3495675"/>
-            <a:ext cx="4762500" cy="895350"/>
+              <a:defRPr sz="1875" b="0">
+                <a:solidFill>
+                  <a:srgbClr val="5B5B57"/>
+                </a:solidFill>
+                <a:latin typeface="Helvetica Neue"/>
+                <a:ea typeface="Helvetica Neue"/>
+                <a:cs typeface="Helvetica Neue"/>
+              </a:defRPr>
+            </a:pPr>
+            <a:r>
+              <a:rPr sz="1875" b="0">
+                <a:solidFill>
+                  <a:srgbClr val="5B5B57"/>
+                </a:solidFill>
+                <a:latin typeface="Helvetica Neue"/>
+                <a:ea typeface="Helvetica Neue"/>
+                <a:cs typeface="Helvetica Neue"/>
+              </a:rPr>
+              <a:t>A reviewer or worker adds another opportunity to help and another opportunity to fail. Use identical cases to compare a baseline with the proposed composition. Count review and coordination calls when evaluating the whole system.</a:t>
+            </a:r>
+          </a:p>
+        </p:txBody>
+      </p:sp>
+      <p:sp>
+        <p:nvSpPr>
+          <p:cNvPr id="7" name="column-rule">
+            <a:extLst xmlns:a="http://schemas.openxmlformats.org/drawingml/2006/main">
+              <a:ext uri="{FF2B5EF4-FFF2-40B4-BE49-F238E27FC236}">
+                <a16:creationId xmlns:a16="http://schemas.microsoft.com/office/drawing/2014/main" id="{58C11046-2F0D-4436-8130-047ED185ADB5}"/>
+              </a:ext>
+            </a:extLst>
+          </p:cNvPr>
+          <p:cNvSpPr>
+            <a:spLocks xmlns:a="http://schemas.openxmlformats.org/drawingml/2006/main" noGrp="1"/>
+          </p:cNvSpPr>
+          <p:nvPr/>
+        </p:nvSpPr>
+        <p:spPr>
+          <a:xfrm xmlns:a="http://schemas.openxmlformats.org/drawingml/2006/main">
+            <a:off x="5334000" y="2343150"/>
+            <a:ext cx="47625" cy="3257550"/>
+          </a:xfrm>
+          <a:prstGeom xmlns:a="http://schemas.openxmlformats.org/drawingml/2006/main" prst="rect">
+            <a:avLst/>
+          </a:prstGeom>
+          <a:solidFill xmlns:a="http://schemas.openxmlformats.org/drawingml/2006/main">
+            <a:srgbClr val="73C8FF"/>
+          </a:solidFill>
+          <a:ln xmlns:a="http://schemas.openxmlformats.org/drawingml/2006/main" w="0">
+            <a:solidFill>
+              <a:srgbClr val="73C8FF"/>
+            </a:solidFill>
+            <a:prstDash val="solid"/>
+          </a:ln>
+        </p:spPr>
+      </p:sp>
+      <p:sp>
+        <p:nvSpPr>
+          <p:cNvPr id="8" name="section-points">
+            <a:extLst xmlns:a="http://schemas.openxmlformats.org/drawingml/2006/main">
+              <a:ext uri="{FF2B5EF4-FFF2-40B4-BE49-F238E27FC236}">
+                <a16:creationId xmlns:a16="http://schemas.microsoft.com/office/drawing/2014/main" id="{D990E027-C353-4161-A2E0-9F8C117678CD}"/>
+              </a:ext>
+            </a:extLst>
+          </p:cNvPr>
+          <p:cNvSpPr>
+            <a:spLocks xmlns:a="http://schemas.openxmlformats.org/drawingml/2006/main" noGrp="1"/>
+          </p:cNvSpPr>
+          <p:nvPr/>
+        </p:nvSpPr>
+        <p:spPr>
+          <a:xfrm xmlns:a="http://schemas.openxmlformats.org/drawingml/2006/main">
+            <a:off x="5857875" y="2343150"/>
+            <a:ext cx="5572125" cy="3429000"/>
           </a:xfrm>
           <a:prstGeom xmlns:a="http://schemas.openxmlformats.org/drawingml/2006/main" prst="rect">
             <a:avLst/>
@@ -7822,67 +9791,37 @@
           <a:lstStyle xmlns:a="http://schemas.openxmlformats.org/drawingml/2006/main"/>
           <a:p xmlns:a="http://schemas.openxmlformats.org/drawingml/2006/main">
             <a:pPr algn="l">
-              <a:defRPr sz="1575" b="1">
-                <a:solidFill>
-                  <a:srgbClr val="111111"/>
-                </a:solidFill>
-                <a:latin typeface="Helvetica Neue"/>
-                <a:ea typeface="Helvetica Neue"/>
-                <a:cs typeface="Helvetica Neue"/>
-              </a:defRPr>
-            </a:pPr>
-            <a:r>
-              <a:rPr sz="1575" b="1">
-                <a:solidFill>
-                  <a:srgbClr val="111111"/>
-                </a:solidFill>
-                <a:latin typeface="Helvetica Neue"/>
-                <a:ea typeface="Helvetica Neue"/>
-                <a:cs typeface="Helvetica Neue"/>
-              </a:rPr>
-              <a:t>Name the two forms of parallelization and their goals.</a:t>
-            </a:r>
-          </a:p>
-        </p:txBody>
-      </p:sp>
-      <p:sp>
-        <p:nvSpPr>
-          <p:cNvPr id="12" name="exam-number-4">
-            <a:extLst xmlns:a="http://schemas.openxmlformats.org/drawingml/2006/main">
-              <a:ext uri="{FF2B5EF4-FFF2-40B4-BE49-F238E27FC236}">
-                <a16:creationId xmlns:a16="http://schemas.microsoft.com/office/drawing/2014/main" id="{2393C177-3708-4488-A019-91BD8AA113C9}"/>
-              </a:ext>
-            </a:extLst>
-          </p:cNvPr>
-          <p:cNvSpPr>
-            <a:spLocks xmlns:a="http://schemas.openxmlformats.org/drawingml/2006/main" noGrp="1"/>
-          </p:cNvSpPr>
-          <p:nvPr/>
-        </p:nvSpPr>
-        <p:spPr>
-          <a:xfrm xmlns:a="http://schemas.openxmlformats.org/drawingml/2006/main">
-            <a:off x="6191250" y="3495675"/>
-            <a:ext cx="590550" cy="400050"/>
-          </a:xfrm>
-          <a:prstGeom xmlns:a="http://schemas.openxmlformats.org/drawingml/2006/main" prst="rect">
-            <a:avLst/>
-          </a:prstGeom>
-          <a:noFill xmlns:a="http://schemas.openxmlformats.org/drawingml/2006/main"/>
-          <a:ln xmlns:a="http://schemas.openxmlformats.org/drawingml/2006/main" w="0">
-            <a:noFill/>
-            <a:prstDash val="solid"/>
-          </a:ln>
-        </p:spPr>
-        <p:txBody>
-          <a:bodyPr xmlns:a="http://schemas.openxmlformats.org/drawingml/2006/main" anchor="t">
-            <a:noAutofit/>
-          </a:bodyPr>
-          <a:lstStyle xmlns:a="http://schemas.openxmlformats.org/drawingml/2006/main"/>
+              <a:defRPr sz="1725" b="1">
+                <a:solidFill>
+                  <a:srgbClr val="111111"/>
+                </a:solidFill>
+                <a:latin typeface="Helvetica Neue"/>
+                <a:ea typeface="Helvetica Neue"/>
+                <a:cs typeface="Helvetica Neue"/>
+              </a:defRPr>
+            </a:pPr>
+            <a:r>
+              <a:rPr sz="1725" b="1">
+                <a:solidFill>
+                  <a:srgbClr val="111111"/>
+                </a:solidFill>
+                <a:latin typeface="Helvetica Neue"/>
+                <a:ea typeface="Helvetica Neue"/>
+                <a:cs typeface="Helvetica Neue"/>
+              </a:rPr>
+              <a:t>01  Use a fixed baseline before changing the architecture.</a:t>
+            </a:r>
+          </a:p>
+          <a:p xmlns:a="http://schemas.openxmlformats.org/drawingml/2006/main">
+            <a:r>
+              <a:t/>
+            </a:r>
+          </a:p>
           <a:p xmlns:a="http://schemas.openxmlformats.org/drawingml/2006/main">
             <a:pPr algn="l">
               <a:defRPr sz="1725" b="1">
                 <a:solidFill>
-                  <a:srgbClr val="73C8FF"/>
+                  <a:srgbClr val="111111"/>
                 </a:solidFill>
                 <a:latin typeface="Helvetica Neue"/>
                 <a:ea typeface="Helvetica Neue"/>
@@ -7892,113 +9831,25 @@
             <a:r>
               <a:rPr sz="1725" b="1">
                 <a:solidFill>
-                  <a:srgbClr val="73C8FF"/>
-                </a:solidFill>
-                <a:latin typeface="Helvetica Neue"/>
-                <a:ea typeface="Helvetica Neue"/>
-                <a:cs typeface="Helvetica Neue"/>
-              </a:rPr>
-              <a:t>04</a:t>
-            </a:r>
-          </a:p>
-        </p:txBody>
-      </p:sp>
-      <p:sp>
-        <p:nvSpPr>
-          <p:cNvPr id="13" name="exam-question-4">
-            <a:extLst xmlns:a="http://schemas.openxmlformats.org/drawingml/2006/main">
-              <a:ext uri="{FF2B5EF4-FFF2-40B4-BE49-F238E27FC236}">
-                <a16:creationId xmlns:a16="http://schemas.microsoft.com/office/drawing/2014/main" id="{CA9EDCF0-2E6E-4E91-A4F2-16B3490EE0C7}"/>
-              </a:ext>
-            </a:extLst>
-          </p:cNvPr>
-          <p:cNvSpPr>
-            <a:spLocks xmlns:a="http://schemas.openxmlformats.org/drawingml/2006/main" noGrp="1"/>
-          </p:cNvSpPr>
-          <p:nvPr/>
-        </p:nvSpPr>
-        <p:spPr>
-          <a:xfrm xmlns:a="http://schemas.openxmlformats.org/drawingml/2006/main">
-            <a:off x="6877050" y="3495675"/>
-            <a:ext cx="4762500" cy="895350"/>
-          </a:xfrm>
-          <a:prstGeom xmlns:a="http://schemas.openxmlformats.org/drawingml/2006/main" prst="rect">
-            <a:avLst/>
-          </a:prstGeom>
-          <a:noFill xmlns:a="http://schemas.openxmlformats.org/drawingml/2006/main"/>
-          <a:ln xmlns:a="http://schemas.openxmlformats.org/drawingml/2006/main" w="0">
-            <a:noFill/>
-            <a:prstDash val="solid"/>
-          </a:ln>
-        </p:spPr>
-        <p:txBody>
-          <a:bodyPr xmlns:a="http://schemas.openxmlformats.org/drawingml/2006/main" anchor="t">
-            <a:normAutofit fontScale="100000"/>
-          </a:bodyPr>
-          <a:lstStyle xmlns:a="http://schemas.openxmlformats.org/drawingml/2006/main"/>
-          <a:p xmlns:a="http://schemas.openxmlformats.org/drawingml/2006/main">
-            <a:pPr algn="l">
-              <a:defRPr sz="1575" b="1">
-                <a:solidFill>
-                  <a:srgbClr val="111111"/>
-                </a:solidFill>
-                <a:latin typeface="Helvetica Neue"/>
-                <a:ea typeface="Helvetica Neue"/>
-                <a:cs typeface="Helvetica Neue"/>
-              </a:defRPr>
-            </a:pPr>
-            <a:r>
-              <a:rPr sz="1575" b="1">
-                <a:solidFill>
-                  <a:srgbClr val="111111"/>
-                </a:solidFill>
-                <a:latin typeface="Helvetica Neue"/>
-                <a:ea typeface="Helvetica Neue"/>
-                <a:cs typeface="Helvetica Neue"/>
-              </a:rPr>
-              <a:t>Why do evaluator-optimizer loops need verifiable criteria?</a:t>
-            </a:r>
-          </a:p>
-        </p:txBody>
-      </p:sp>
-      <p:sp>
-        <p:nvSpPr>
-          <p:cNvPr id="14" name="exam-number-5">
-            <a:extLst xmlns:a="http://schemas.openxmlformats.org/drawingml/2006/main">
-              <a:ext uri="{FF2B5EF4-FFF2-40B4-BE49-F238E27FC236}">
-                <a16:creationId xmlns:a16="http://schemas.microsoft.com/office/drawing/2014/main" id="{64AFC6AC-1302-41E2-AE9A-62BE678ED480}"/>
-              </a:ext>
-            </a:extLst>
-          </p:cNvPr>
-          <p:cNvSpPr>
-            <a:spLocks xmlns:a="http://schemas.openxmlformats.org/drawingml/2006/main" noGrp="1"/>
-          </p:cNvSpPr>
-          <p:nvPr/>
-        </p:nvSpPr>
-        <p:spPr>
-          <a:xfrm xmlns:a="http://schemas.openxmlformats.org/drawingml/2006/main">
-            <a:off x="390525" y="4752975"/>
-            <a:ext cx="590550" cy="400050"/>
-          </a:xfrm>
-          <a:prstGeom xmlns:a="http://schemas.openxmlformats.org/drawingml/2006/main" prst="rect">
-            <a:avLst/>
-          </a:prstGeom>
-          <a:noFill xmlns:a="http://schemas.openxmlformats.org/drawingml/2006/main"/>
-          <a:ln xmlns:a="http://schemas.openxmlformats.org/drawingml/2006/main" w="0">
-            <a:noFill/>
-            <a:prstDash val="solid"/>
-          </a:ln>
-        </p:spPr>
-        <p:txBody>
-          <a:bodyPr xmlns:a="http://schemas.openxmlformats.org/drawingml/2006/main" anchor="t">
-            <a:noAutofit/>
-          </a:bodyPr>
-          <a:lstStyle xmlns:a="http://schemas.openxmlformats.org/drawingml/2006/main"/>
+                  <a:srgbClr val="111111"/>
+                </a:solidFill>
+                <a:latin typeface="Helvetica Neue"/>
+                <a:ea typeface="Helvetica Neue"/>
+                <a:cs typeface="Helvetica Neue"/>
+              </a:rPr>
+              <a:t>02  Score outcomes and failures with the same rules.</a:t>
+            </a:r>
+          </a:p>
+          <a:p xmlns:a="http://schemas.openxmlformats.org/drawingml/2006/main">
+            <a:r>
+              <a:t/>
+            </a:r>
+          </a:p>
           <a:p xmlns:a="http://schemas.openxmlformats.org/drawingml/2006/main">
             <a:pPr algn="l">
               <a:defRPr sz="1725" b="1">
                 <a:solidFill>
-                  <a:srgbClr val="73C8FF"/>
+                  <a:srgbClr val="111111"/>
                 </a:solidFill>
                 <a:latin typeface="Helvetica Neue"/>
                 <a:ea typeface="Helvetica Neue"/>
@@ -8008,187 +9859,13 @@
             <a:r>
               <a:rPr sz="1725" b="1">
                 <a:solidFill>
-                  <a:srgbClr val="73C8FF"/>
-                </a:solidFill>
-                <a:latin typeface="Helvetica Neue"/>
-                <a:ea typeface="Helvetica Neue"/>
-                <a:cs typeface="Helvetica Neue"/>
-              </a:rPr>
-              <a:t>05</a:t>
-            </a:r>
-          </a:p>
-        </p:txBody>
-      </p:sp>
-      <p:sp>
-        <p:nvSpPr>
-          <p:cNvPr id="15" name="exam-question-5">
-            <a:extLst xmlns:a="http://schemas.openxmlformats.org/drawingml/2006/main">
-              <a:ext uri="{FF2B5EF4-FFF2-40B4-BE49-F238E27FC236}">
-                <a16:creationId xmlns:a16="http://schemas.microsoft.com/office/drawing/2014/main" id="{52A7B20A-D6F5-4C4E-BD50-F5A99690F2EF}"/>
-              </a:ext>
-            </a:extLst>
-          </p:cNvPr>
-          <p:cNvSpPr>
-            <a:spLocks xmlns:a="http://schemas.openxmlformats.org/drawingml/2006/main" noGrp="1"/>
-          </p:cNvSpPr>
-          <p:nvPr/>
-        </p:nvSpPr>
-        <p:spPr>
-          <a:xfrm xmlns:a="http://schemas.openxmlformats.org/drawingml/2006/main">
-            <a:off x="1076325" y="4752975"/>
-            <a:ext cx="4762500" cy="895350"/>
-          </a:xfrm>
-          <a:prstGeom xmlns:a="http://schemas.openxmlformats.org/drawingml/2006/main" prst="rect">
-            <a:avLst/>
-          </a:prstGeom>
-          <a:noFill xmlns:a="http://schemas.openxmlformats.org/drawingml/2006/main"/>
-          <a:ln xmlns:a="http://schemas.openxmlformats.org/drawingml/2006/main" w="0">
-            <a:noFill/>
-            <a:prstDash val="solid"/>
-          </a:ln>
-        </p:spPr>
-        <p:txBody>
-          <a:bodyPr xmlns:a="http://schemas.openxmlformats.org/drawingml/2006/main" anchor="t">
-            <a:normAutofit fontScale="100000"/>
-          </a:bodyPr>
-          <a:lstStyle xmlns:a="http://schemas.openxmlformats.org/drawingml/2006/main"/>
-          <a:p xmlns:a="http://schemas.openxmlformats.org/drawingml/2006/main">
-            <a:pPr algn="l">
-              <a:defRPr sz="1575" b="1">
-                <a:solidFill>
-                  <a:srgbClr val="111111"/>
-                </a:solidFill>
-                <a:latin typeface="Helvetica Neue"/>
-                <a:ea typeface="Helvetica Neue"/>
-                <a:cs typeface="Helvetica Neue"/>
-              </a:defRPr>
-            </a:pPr>
-            <a:r>
-              <a:rPr sz="1575" b="1">
-                <a:solidFill>
-                  <a:srgbClr val="111111"/>
-                </a:solidFill>
-                <a:latin typeface="Helvetica Neue"/>
-                <a:ea typeface="Helvetica Neue"/>
-                <a:cs typeface="Helvetica Neue"/>
-              </a:rPr>
-              <a:t>Give a valid composition of three patterns.</a:t>
-            </a:r>
-          </a:p>
-        </p:txBody>
-      </p:sp>
-      <p:sp>
-        <p:nvSpPr>
-          <p:cNvPr id="16" name="exam-number-6">
-            <a:extLst xmlns:a="http://schemas.openxmlformats.org/drawingml/2006/main">
-              <a:ext uri="{FF2B5EF4-FFF2-40B4-BE49-F238E27FC236}">
-                <a16:creationId xmlns:a16="http://schemas.microsoft.com/office/drawing/2014/main" id="{25C79418-C889-4E9B-8B4D-A317E0DA54E8}"/>
-              </a:ext>
-            </a:extLst>
-          </p:cNvPr>
-          <p:cNvSpPr>
-            <a:spLocks xmlns:a="http://schemas.openxmlformats.org/drawingml/2006/main" noGrp="1"/>
-          </p:cNvSpPr>
-          <p:nvPr/>
-        </p:nvSpPr>
-        <p:spPr>
-          <a:xfrm xmlns:a="http://schemas.openxmlformats.org/drawingml/2006/main">
-            <a:off x="6191250" y="4752975"/>
-            <a:ext cx="590550" cy="400050"/>
-          </a:xfrm>
-          <a:prstGeom xmlns:a="http://schemas.openxmlformats.org/drawingml/2006/main" prst="rect">
-            <a:avLst/>
-          </a:prstGeom>
-          <a:noFill xmlns:a="http://schemas.openxmlformats.org/drawingml/2006/main"/>
-          <a:ln xmlns:a="http://schemas.openxmlformats.org/drawingml/2006/main" w="0">
-            <a:noFill/>
-            <a:prstDash val="solid"/>
-          </a:ln>
-        </p:spPr>
-        <p:txBody>
-          <a:bodyPr xmlns:a="http://schemas.openxmlformats.org/drawingml/2006/main" anchor="t">
-            <a:noAutofit/>
-          </a:bodyPr>
-          <a:lstStyle xmlns:a="http://schemas.openxmlformats.org/drawingml/2006/main"/>
-          <a:p xmlns:a="http://schemas.openxmlformats.org/drawingml/2006/main">
-            <a:pPr algn="l">
-              <a:defRPr sz="1725" b="1">
-                <a:solidFill>
-                  <a:srgbClr val="73C8FF"/>
-                </a:solidFill>
-                <a:latin typeface="Helvetica Neue"/>
-                <a:ea typeface="Helvetica Neue"/>
-                <a:cs typeface="Helvetica Neue"/>
-              </a:defRPr>
-            </a:pPr>
-            <a:r>
-              <a:rPr sz="1725" b="1">
-                <a:solidFill>
-                  <a:srgbClr val="73C8FF"/>
-                </a:solidFill>
-                <a:latin typeface="Helvetica Neue"/>
-                <a:ea typeface="Helvetica Neue"/>
-                <a:cs typeface="Helvetica Neue"/>
-              </a:rPr>
-              <a:t>06</a:t>
-            </a:r>
-          </a:p>
-        </p:txBody>
-      </p:sp>
-      <p:sp>
-        <p:nvSpPr>
-          <p:cNvPr id="17" name="exam-question-6">
-            <a:extLst xmlns:a="http://schemas.openxmlformats.org/drawingml/2006/main">
-              <a:ext uri="{FF2B5EF4-FFF2-40B4-BE49-F238E27FC236}">
-                <a16:creationId xmlns:a16="http://schemas.microsoft.com/office/drawing/2014/main" id="{9CD29F5E-2D2E-4367-A880-46E3F062C67D}"/>
-              </a:ext>
-            </a:extLst>
-          </p:cNvPr>
-          <p:cNvSpPr>
-            <a:spLocks xmlns:a="http://schemas.openxmlformats.org/drawingml/2006/main" noGrp="1"/>
-          </p:cNvSpPr>
-          <p:nvPr/>
-        </p:nvSpPr>
-        <p:spPr>
-          <a:xfrm xmlns:a="http://schemas.openxmlformats.org/drawingml/2006/main">
-            <a:off x="6877050" y="4752975"/>
-            <a:ext cx="4762500" cy="895350"/>
-          </a:xfrm>
-          <a:prstGeom xmlns:a="http://schemas.openxmlformats.org/drawingml/2006/main" prst="rect">
-            <a:avLst/>
-          </a:prstGeom>
-          <a:noFill xmlns:a="http://schemas.openxmlformats.org/drawingml/2006/main"/>
-          <a:ln xmlns:a="http://schemas.openxmlformats.org/drawingml/2006/main" w="0">
-            <a:noFill/>
-            <a:prstDash val="solid"/>
-          </a:ln>
-        </p:spPr>
-        <p:txBody>
-          <a:bodyPr xmlns:a="http://schemas.openxmlformats.org/drawingml/2006/main" anchor="t">
-            <a:normAutofit fontScale="100000"/>
-          </a:bodyPr>
-          <a:lstStyle xmlns:a="http://schemas.openxmlformats.org/drawingml/2006/main"/>
-          <a:p xmlns:a="http://schemas.openxmlformats.org/drawingml/2006/main">
-            <a:pPr algn="l">
-              <a:defRPr sz="1575" b="1">
-                <a:solidFill>
-                  <a:srgbClr val="111111"/>
-                </a:solidFill>
-                <a:latin typeface="Helvetica Neue"/>
-                <a:ea typeface="Helvetica Neue"/>
-                <a:cs typeface="Helvetica Neue"/>
-              </a:defRPr>
-            </a:pPr>
-            <a:r>
-              <a:rPr sz="1575" b="1">
-                <a:solidFill>
-                  <a:srgbClr val="111111"/>
-                </a:solidFill>
-                <a:latin typeface="Helvetica Neue"/>
-                <a:ea typeface="Helvetica Neue"/>
-                <a:cs typeface="Helvetica Neue"/>
-              </a:rPr>
-              <a:t>List four common agentic anti-patterns.</a:t>
+                  <a:srgbClr val="111111"/>
+                </a:solidFill>
+                <a:latin typeface="Helvetica Neue"/>
+                <a:ea typeface="Helvetica Neue"/>
+                <a:cs typeface="Helvetica Neue"/>
+              </a:rPr>
+              <a:t>03  Account for overhead even when review leaves the answer unchanged.</a:t>
             </a:r>
           </a:p>
         </p:txBody>
@@ -8196,7 +9873,7 @@
     </p:spTree>
     <p:extLst>
       <p:ext uri="{BB962C8B-B14F-4D97-AF65-F5344CB8AC3E}">
-        <p14:creationId xmlns:p14="http://schemas.microsoft.com/office/powerpoint/2010/main" val="798075610"/>
+        <p14:creationId xmlns:p14="http://schemas.microsoft.com/office/powerpoint/2010/main" val="459572249"/>
       </p:ext>
     </p:extLst>
   </p:cSld>
@@ -8204,9 +9881,9 @@
 </file>
 
 <file path=ppt/theme/theme1.xml><?xml version="1.0" encoding="utf-8"?>
-<a:theme xmlns:a="http://schemas.openxmlformats.org/drawingml/2006/main" name="ChatGPT">
+<a:theme xmlns:a="http://schemas.openxmlformats.org/drawingml/2006/main" name="Course">
   <a:themeElements>
-    <a:clrScheme name="ChatGPT">
+    <a:clrScheme name="Course">
       <a:dk1>
         <a:srgbClr val="000000"/>
       </a:dk1>
@@ -8256,7 +9933,7 @@
         <a:cs typeface="Calibri"/>
       </a:minorFont>
     </a:fontScheme>
-    <a:fmtScheme name="ChatGPT">
+    <a:fmtScheme name="Course">
       <a:fillStyleLst>
         <a:solidFill>
           <a:schemeClr val="phClr"/>
